--- a/ParetoFlow_Hackathon_Pitch.pptx
+++ b/ParetoFlow_Hackathon_Pitch.pptx
@@ -5,18 +5,19 @@
     <p:sldMasterId id="2147483648" r:id="rId1"/>
   </p:sldMasterIdLst>
   <p:sldIdLst>
-    <p:sldId id="256" r:id="rId7"/>
-    <p:sldId id="257" r:id="rId8"/>
-    <p:sldId id="258" r:id="rId9"/>
-    <p:sldId id="259" r:id="rId10"/>
-    <p:sldId id="260" r:id="rId11"/>
-    <p:sldId id="261" r:id="rId12"/>
-    <p:sldId id="262" r:id="rId13"/>
-    <p:sldId id="263" r:id="rId14"/>
-    <p:sldId id="264" r:id="rId15"/>
-    <p:sldId id="265" r:id="rId16"/>
+    <p:sldId id="256" r:id="rId2"/>
+    <p:sldId id="257" r:id="rId3"/>
+    <p:sldId id="258" r:id="rId4"/>
+    <p:sldId id="259" r:id="rId5"/>
+    <p:sldId id="260" r:id="rId6"/>
+    <p:sldId id="261" r:id="rId7"/>
+    <p:sldId id="262" r:id="rId8"/>
+    <p:sldId id="263" r:id="rId9"/>
+    <p:sldId id="264" r:id="rId10"/>
+    <p:sldId id="265" r:id="rId11"/>
+    <p:sldId id="266" r:id="rId12"/>
   </p:sldIdLst>
-  <p:sldSz cx="12191695" cy="6858000" type="screen4x3"/>
+  <p:sldSz cx="12192000" cy="6858000"/>
   <p:notesSz cx="6858000" cy="9144000"/>
   <p:defaultTextStyle>
     <a:defPPr>
@@ -113,6 +114,22 @@
       </a:defRPr>
     </a:lvl9pPr>
   </p:defaultTextStyle>
+  <p:extLst>
+    <p:ext uri="{EFAFB233-063F-42B5-8137-9DF3F51BA10A}">
+      <p15:sldGuideLst xmlns:p15="http://schemas.microsoft.com/office/powerpoint/2012/main">
+        <p15:guide id="1" orient="horz" pos="2160">
+          <p15:clr>
+            <a:srgbClr val="A4A3A4"/>
+          </p15:clr>
+        </p15:guide>
+        <p15:guide id="2" pos="2880">
+          <p15:clr>
+            <a:srgbClr val="A4A3A4"/>
+          </p15:clr>
+        </p15:guide>
+      </p15:sldGuideLst>
+    </p:ext>
+  </p:extLst>
 </p:presentation>
 </file>
 
@@ -154,10 +171,9 @@
           <a:lstStyle/>
           <a:p>
             <a:r>
-              <a:rPr lang="en-US" smtClean="0"/>
+              <a:rPr lang="en-US"/>
               <a:t>Click to edit Master title style</a:t>
             </a:r>
-            <a:endParaRPr lang="en-US"/>
           </a:p>
         </p:txBody>
       </p:sp>
@@ -273,10 +289,9 @@
           </a:lstStyle>
           <a:p>
             <a:r>
-              <a:rPr lang="en-US" smtClean="0"/>
+              <a:rPr lang="en-US"/>
               <a:t>Click to edit Master subtitle style</a:t>
             </a:r>
-            <a:endParaRPr lang="en-US"/>
           </a:p>
         </p:txBody>
       </p:sp>
@@ -297,7 +312,7 @@
           <a:p>
             <a:fld id="{5BCAD085-E8A6-8845-BD4E-CB4CCA059FC4}" type="datetimeFigureOut">
               <a:rPr lang="en-US" smtClean="0"/>
-              <a:t>1/27/13</a:t>
+              <a:t>10/3/2026</a:t>
             </a:fld>
             <a:endParaRPr lang="en-US"/>
           </a:p>
@@ -391,10 +406,9 @@
           <a:lstStyle/>
           <a:p>
             <a:r>
-              <a:rPr lang="en-US" smtClean="0"/>
+              <a:rPr lang="en-US"/>
               <a:t>Click to edit Master title style</a:t>
             </a:r>
-            <a:endParaRPr lang="en-US"/>
           </a:p>
         </p:txBody>
       </p:sp>
@@ -415,38 +429,37 @@
           <a:p>
             <a:pPr lvl="0"/>
             <a:r>
-              <a:rPr lang="en-US" smtClean="0"/>
+              <a:rPr lang="en-US"/>
               <a:t>Click to edit Master text styles</a:t>
             </a:r>
           </a:p>
           <a:p>
             <a:pPr lvl="1"/>
             <a:r>
-              <a:rPr lang="en-US" smtClean="0"/>
+              <a:rPr lang="en-US"/>
               <a:t>Second level</a:t>
             </a:r>
           </a:p>
           <a:p>
             <a:pPr lvl="2"/>
             <a:r>
-              <a:rPr lang="en-US" smtClean="0"/>
+              <a:rPr lang="en-US"/>
               <a:t>Third level</a:t>
             </a:r>
           </a:p>
           <a:p>
             <a:pPr lvl="3"/>
             <a:r>
-              <a:rPr lang="en-US" smtClean="0"/>
+              <a:rPr lang="en-US"/>
               <a:t>Fourth level</a:t>
             </a:r>
           </a:p>
           <a:p>
             <a:pPr lvl="4"/>
             <a:r>
-              <a:rPr lang="en-US" smtClean="0"/>
+              <a:rPr lang="en-US"/>
               <a:t>Fifth level</a:t>
             </a:r>
-            <a:endParaRPr lang="en-US"/>
           </a:p>
         </p:txBody>
       </p:sp>
@@ -467,7 +480,7 @@
           <a:p>
             <a:fld id="{5BCAD085-E8A6-8845-BD4E-CB4CCA059FC4}" type="datetimeFigureOut">
               <a:rPr lang="en-US" smtClean="0"/>
-              <a:t>1/27/13</a:t>
+              <a:t>10/3/2026</a:t>
             </a:fld>
             <a:endParaRPr lang="en-US"/>
           </a:p>
@@ -566,10 +579,9 @@
           <a:lstStyle/>
           <a:p>
             <a:r>
-              <a:rPr lang="en-US" smtClean="0"/>
+              <a:rPr lang="en-US"/>
               <a:t>Click to edit Master title style</a:t>
             </a:r>
-            <a:endParaRPr lang="en-US"/>
           </a:p>
         </p:txBody>
       </p:sp>
@@ -595,38 +607,37 @@
           <a:p>
             <a:pPr lvl="0"/>
             <a:r>
-              <a:rPr lang="en-US" smtClean="0"/>
+              <a:rPr lang="en-US"/>
               <a:t>Click to edit Master text styles</a:t>
             </a:r>
           </a:p>
           <a:p>
             <a:pPr lvl="1"/>
             <a:r>
-              <a:rPr lang="en-US" smtClean="0"/>
+              <a:rPr lang="en-US"/>
               <a:t>Second level</a:t>
             </a:r>
           </a:p>
           <a:p>
             <a:pPr lvl="2"/>
             <a:r>
-              <a:rPr lang="en-US" smtClean="0"/>
+              <a:rPr lang="en-US"/>
               <a:t>Third level</a:t>
             </a:r>
           </a:p>
           <a:p>
             <a:pPr lvl="3"/>
             <a:r>
-              <a:rPr lang="en-US" smtClean="0"/>
+              <a:rPr lang="en-US"/>
               <a:t>Fourth level</a:t>
             </a:r>
           </a:p>
           <a:p>
             <a:pPr lvl="4"/>
             <a:r>
-              <a:rPr lang="en-US" smtClean="0"/>
+              <a:rPr lang="en-US"/>
               <a:t>Fifth level</a:t>
             </a:r>
-            <a:endParaRPr lang="en-US"/>
           </a:p>
         </p:txBody>
       </p:sp>
@@ -647,7 +658,7 @@
           <a:p>
             <a:fld id="{5BCAD085-E8A6-8845-BD4E-CB4CCA059FC4}" type="datetimeFigureOut">
               <a:rPr lang="en-US" smtClean="0"/>
-              <a:t>1/27/13</a:t>
+              <a:t>10/3/2026</a:t>
             </a:fld>
             <a:endParaRPr lang="en-US"/>
           </a:p>
@@ -741,10 +752,9 @@
           <a:lstStyle/>
           <a:p>
             <a:r>
-              <a:rPr lang="en-US" smtClean="0"/>
+              <a:rPr lang="en-US"/>
               <a:t>Click to edit Master title style</a:t>
             </a:r>
-            <a:endParaRPr lang="en-US"/>
           </a:p>
         </p:txBody>
       </p:sp>
@@ -765,38 +775,37 @@
           <a:p>
             <a:pPr lvl="0"/>
             <a:r>
-              <a:rPr lang="en-US" smtClean="0"/>
+              <a:rPr lang="en-US"/>
               <a:t>Click to edit Master text styles</a:t>
             </a:r>
           </a:p>
           <a:p>
             <a:pPr lvl="1"/>
             <a:r>
-              <a:rPr lang="en-US" smtClean="0"/>
+              <a:rPr lang="en-US"/>
               <a:t>Second level</a:t>
             </a:r>
           </a:p>
           <a:p>
             <a:pPr lvl="2"/>
             <a:r>
-              <a:rPr lang="en-US" smtClean="0"/>
+              <a:rPr lang="en-US"/>
               <a:t>Third level</a:t>
             </a:r>
           </a:p>
           <a:p>
             <a:pPr lvl="3"/>
             <a:r>
-              <a:rPr lang="en-US" smtClean="0"/>
+              <a:rPr lang="en-US"/>
               <a:t>Fourth level</a:t>
             </a:r>
           </a:p>
           <a:p>
             <a:pPr lvl="4"/>
             <a:r>
-              <a:rPr lang="en-US" smtClean="0"/>
+              <a:rPr lang="en-US"/>
               <a:t>Fifth level</a:t>
             </a:r>
-            <a:endParaRPr lang="en-US"/>
           </a:p>
         </p:txBody>
       </p:sp>
@@ -817,7 +826,7 @@
           <a:p>
             <a:fld id="{5BCAD085-E8A6-8845-BD4E-CB4CCA059FC4}" type="datetimeFigureOut">
               <a:rPr lang="en-US" smtClean="0"/>
-              <a:t>1/27/13</a:t>
+              <a:t>10/3/2026</a:t>
             </a:fld>
             <a:endParaRPr lang="en-US"/>
           </a:p>
@@ -920,10 +929,9 @@
           </a:lstStyle>
           <a:p>
             <a:r>
-              <a:rPr lang="en-US" smtClean="0"/>
+              <a:rPr lang="en-US"/>
               <a:t>Click to edit Master title style</a:t>
             </a:r>
-            <a:endParaRPr lang="en-US"/>
           </a:p>
         </p:txBody>
       </p:sp>
@@ -1040,7 +1048,7 @@
           <a:p>
             <a:pPr lvl="0"/>
             <a:r>
-              <a:rPr lang="en-US" smtClean="0"/>
+              <a:rPr lang="en-US"/>
               <a:t>Click to edit Master text styles</a:t>
             </a:r>
           </a:p>
@@ -1063,7 +1071,7 @@
           <a:p>
             <a:fld id="{5BCAD085-E8A6-8845-BD4E-CB4CCA059FC4}" type="datetimeFigureOut">
               <a:rPr lang="en-US" smtClean="0"/>
-              <a:t>1/27/13</a:t>
+              <a:t>10/3/2026</a:t>
             </a:fld>
             <a:endParaRPr lang="en-US"/>
           </a:p>
@@ -1157,10 +1165,9 @@
           <a:lstStyle/>
           <a:p>
             <a:r>
-              <a:rPr lang="en-US" smtClean="0"/>
+              <a:rPr lang="en-US"/>
               <a:t>Click to edit Master title style</a:t>
             </a:r>
-            <a:endParaRPr lang="en-US"/>
           </a:p>
         </p:txBody>
       </p:sp>
@@ -1214,38 +1221,37 @@
           <a:p>
             <a:pPr lvl="0"/>
             <a:r>
-              <a:rPr lang="en-US" smtClean="0"/>
+              <a:rPr lang="en-US"/>
               <a:t>Click to edit Master text styles</a:t>
             </a:r>
           </a:p>
           <a:p>
             <a:pPr lvl="1"/>
             <a:r>
-              <a:rPr lang="en-US" smtClean="0"/>
+              <a:rPr lang="en-US"/>
               <a:t>Second level</a:t>
             </a:r>
           </a:p>
           <a:p>
             <a:pPr lvl="2"/>
             <a:r>
-              <a:rPr lang="en-US" smtClean="0"/>
+              <a:rPr lang="en-US"/>
               <a:t>Third level</a:t>
             </a:r>
           </a:p>
           <a:p>
             <a:pPr lvl="3"/>
             <a:r>
-              <a:rPr lang="en-US" smtClean="0"/>
+              <a:rPr lang="en-US"/>
               <a:t>Fourth level</a:t>
             </a:r>
           </a:p>
           <a:p>
             <a:pPr lvl="4"/>
             <a:r>
-              <a:rPr lang="en-US" smtClean="0"/>
+              <a:rPr lang="en-US"/>
               <a:t>Fifth level</a:t>
             </a:r>
-            <a:endParaRPr lang="en-US"/>
           </a:p>
         </p:txBody>
       </p:sp>
@@ -1299,38 +1305,37 @@
           <a:p>
             <a:pPr lvl="0"/>
             <a:r>
-              <a:rPr lang="en-US" smtClean="0"/>
+              <a:rPr lang="en-US"/>
               <a:t>Click to edit Master text styles</a:t>
             </a:r>
           </a:p>
           <a:p>
             <a:pPr lvl="1"/>
             <a:r>
-              <a:rPr lang="en-US" smtClean="0"/>
+              <a:rPr lang="en-US"/>
               <a:t>Second level</a:t>
             </a:r>
           </a:p>
           <a:p>
             <a:pPr lvl="2"/>
             <a:r>
-              <a:rPr lang="en-US" smtClean="0"/>
+              <a:rPr lang="en-US"/>
               <a:t>Third level</a:t>
             </a:r>
           </a:p>
           <a:p>
             <a:pPr lvl="3"/>
             <a:r>
-              <a:rPr lang="en-US" smtClean="0"/>
+              <a:rPr lang="en-US"/>
               <a:t>Fourth level</a:t>
             </a:r>
           </a:p>
           <a:p>
             <a:pPr lvl="4"/>
             <a:r>
-              <a:rPr lang="en-US" smtClean="0"/>
+              <a:rPr lang="en-US"/>
               <a:t>Fifth level</a:t>
             </a:r>
-            <a:endParaRPr lang="en-US"/>
           </a:p>
         </p:txBody>
       </p:sp>
@@ -1351,7 +1356,7 @@
           <a:p>
             <a:fld id="{5BCAD085-E8A6-8845-BD4E-CB4CCA059FC4}" type="datetimeFigureOut">
               <a:rPr lang="en-US" smtClean="0"/>
-              <a:t>1/27/13</a:t>
+              <a:t>10/3/2026</a:t>
             </a:fld>
             <a:endParaRPr lang="en-US"/>
           </a:p>
@@ -1449,10 +1454,9 @@
           </a:lstStyle>
           <a:p>
             <a:r>
-              <a:rPr lang="en-US" smtClean="0"/>
+              <a:rPr lang="en-US"/>
               <a:t>Click to edit Master title style</a:t>
             </a:r>
-            <a:endParaRPr lang="en-US"/>
           </a:p>
         </p:txBody>
       </p:sp>
@@ -1515,7 +1519,7 @@
           <a:p>
             <a:pPr lvl="0"/>
             <a:r>
-              <a:rPr lang="en-US" smtClean="0"/>
+              <a:rPr lang="en-US"/>
               <a:t>Click to edit Master text styles</a:t>
             </a:r>
           </a:p>
@@ -1571,38 +1575,37 @@
           <a:p>
             <a:pPr lvl="0"/>
             <a:r>
-              <a:rPr lang="en-US" smtClean="0"/>
+              <a:rPr lang="en-US"/>
               <a:t>Click to edit Master text styles</a:t>
             </a:r>
           </a:p>
           <a:p>
             <a:pPr lvl="1"/>
             <a:r>
-              <a:rPr lang="en-US" smtClean="0"/>
+              <a:rPr lang="en-US"/>
               <a:t>Second level</a:t>
             </a:r>
           </a:p>
           <a:p>
             <a:pPr lvl="2"/>
             <a:r>
-              <a:rPr lang="en-US" smtClean="0"/>
+              <a:rPr lang="en-US"/>
               <a:t>Third level</a:t>
             </a:r>
           </a:p>
           <a:p>
             <a:pPr lvl="3"/>
             <a:r>
-              <a:rPr lang="en-US" smtClean="0"/>
+              <a:rPr lang="en-US"/>
               <a:t>Fourth level</a:t>
             </a:r>
           </a:p>
           <a:p>
             <a:pPr lvl="4"/>
             <a:r>
-              <a:rPr lang="en-US" smtClean="0"/>
+              <a:rPr lang="en-US"/>
               <a:t>Fifth level</a:t>
             </a:r>
-            <a:endParaRPr lang="en-US"/>
           </a:p>
         </p:txBody>
       </p:sp>
@@ -1665,7 +1668,7 @@
           <a:p>
             <a:pPr lvl="0"/>
             <a:r>
-              <a:rPr lang="en-US" smtClean="0"/>
+              <a:rPr lang="en-US"/>
               <a:t>Click to edit Master text styles</a:t>
             </a:r>
           </a:p>
@@ -1721,38 +1724,37 @@
           <a:p>
             <a:pPr lvl="0"/>
             <a:r>
-              <a:rPr lang="en-US" smtClean="0"/>
+              <a:rPr lang="en-US"/>
               <a:t>Click to edit Master text styles</a:t>
             </a:r>
           </a:p>
           <a:p>
             <a:pPr lvl="1"/>
             <a:r>
-              <a:rPr lang="en-US" smtClean="0"/>
+              <a:rPr lang="en-US"/>
               <a:t>Second level</a:t>
             </a:r>
           </a:p>
           <a:p>
             <a:pPr lvl="2"/>
             <a:r>
-              <a:rPr lang="en-US" smtClean="0"/>
+              <a:rPr lang="en-US"/>
               <a:t>Third level</a:t>
             </a:r>
           </a:p>
           <a:p>
             <a:pPr lvl="3"/>
             <a:r>
-              <a:rPr lang="en-US" smtClean="0"/>
+              <a:rPr lang="en-US"/>
               <a:t>Fourth level</a:t>
             </a:r>
           </a:p>
           <a:p>
             <a:pPr lvl="4"/>
             <a:r>
-              <a:rPr lang="en-US" smtClean="0"/>
+              <a:rPr lang="en-US"/>
               <a:t>Fifth level</a:t>
             </a:r>
-            <a:endParaRPr lang="en-US"/>
           </a:p>
         </p:txBody>
       </p:sp>
@@ -1773,7 +1775,7 @@
           <a:p>
             <a:fld id="{5BCAD085-E8A6-8845-BD4E-CB4CCA059FC4}" type="datetimeFigureOut">
               <a:rPr lang="en-US" smtClean="0"/>
-              <a:t>1/27/13</a:t>
+              <a:t>10/3/2026</a:t>
             </a:fld>
             <a:endParaRPr lang="en-US"/>
           </a:p>
@@ -1867,10 +1869,9 @@
           <a:lstStyle/>
           <a:p>
             <a:r>
-              <a:rPr lang="en-US" smtClean="0"/>
+              <a:rPr lang="en-US"/>
               <a:t>Click to edit Master title style</a:t>
             </a:r>
-            <a:endParaRPr lang="en-US"/>
           </a:p>
         </p:txBody>
       </p:sp>
@@ -1891,7 +1892,7 @@
           <a:p>
             <a:fld id="{5BCAD085-E8A6-8845-BD4E-CB4CCA059FC4}" type="datetimeFigureOut">
               <a:rPr lang="en-US" smtClean="0"/>
-              <a:t>1/27/13</a:t>
+              <a:t>10/3/2026</a:t>
             </a:fld>
             <a:endParaRPr lang="en-US"/>
           </a:p>
@@ -1986,7 +1987,7 @@
           <a:p>
             <a:fld id="{5BCAD085-E8A6-8845-BD4E-CB4CCA059FC4}" type="datetimeFigureOut">
               <a:rPr lang="en-US" smtClean="0"/>
-              <a:t>1/27/13</a:t>
+              <a:t>10/3/2026</a:t>
             </a:fld>
             <a:endParaRPr lang="en-US"/>
           </a:p>
@@ -2089,10 +2090,9 @@
           </a:lstStyle>
           <a:p>
             <a:r>
-              <a:rPr lang="en-US" smtClean="0"/>
+              <a:rPr lang="en-US"/>
               <a:t>Click to edit Master title style</a:t>
             </a:r>
-            <a:endParaRPr lang="en-US"/>
           </a:p>
         </p:txBody>
       </p:sp>
@@ -2146,38 +2146,37 @@
           <a:p>
             <a:pPr lvl="0"/>
             <a:r>
-              <a:rPr lang="en-US" smtClean="0"/>
+              <a:rPr lang="en-US"/>
               <a:t>Click to edit Master text styles</a:t>
             </a:r>
           </a:p>
           <a:p>
             <a:pPr lvl="1"/>
             <a:r>
-              <a:rPr lang="en-US" smtClean="0"/>
+              <a:rPr lang="en-US"/>
               <a:t>Second level</a:t>
             </a:r>
           </a:p>
           <a:p>
             <a:pPr lvl="2"/>
             <a:r>
-              <a:rPr lang="en-US" smtClean="0"/>
+              <a:rPr lang="en-US"/>
               <a:t>Third level</a:t>
             </a:r>
           </a:p>
           <a:p>
             <a:pPr lvl="3"/>
             <a:r>
-              <a:rPr lang="en-US" smtClean="0"/>
+              <a:rPr lang="en-US"/>
               <a:t>Fourth level</a:t>
             </a:r>
           </a:p>
           <a:p>
             <a:pPr lvl="4"/>
             <a:r>
-              <a:rPr lang="en-US" smtClean="0"/>
+              <a:rPr lang="en-US"/>
               <a:t>Fifth level</a:t>
             </a:r>
-            <a:endParaRPr lang="en-US"/>
           </a:p>
         </p:txBody>
       </p:sp>
@@ -2240,7 +2239,7 @@
           <a:p>
             <a:pPr lvl="0"/>
             <a:r>
-              <a:rPr lang="en-US" smtClean="0"/>
+              <a:rPr lang="en-US"/>
               <a:t>Click to edit Master text styles</a:t>
             </a:r>
           </a:p>
@@ -2263,7 +2262,7 @@
           <a:p>
             <a:fld id="{5BCAD085-E8A6-8845-BD4E-CB4CCA059FC4}" type="datetimeFigureOut">
               <a:rPr lang="en-US" smtClean="0"/>
-              <a:t>1/27/13</a:t>
+              <a:t>10/3/2026</a:t>
             </a:fld>
             <a:endParaRPr lang="en-US"/>
           </a:p>
@@ -2366,10 +2365,9 @@
           </a:lstStyle>
           <a:p>
             <a:r>
-              <a:rPr lang="en-US" smtClean="0"/>
+              <a:rPr lang="en-US"/>
               <a:t>Click to edit Master title style</a:t>
             </a:r>
-            <a:endParaRPr lang="en-US"/>
           </a:p>
         </p:txBody>
       </p:sp>
@@ -2493,7 +2491,7 @@
           <a:p>
             <a:pPr lvl="0"/>
             <a:r>
-              <a:rPr lang="en-US" smtClean="0"/>
+              <a:rPr lang="en-US"/>
               <a:t>Click to edit Master text styles</a:t>
             </a:r>
           </a:p>
@@ -2516,7 +2514,7 @@
           <a:p>
             <a:fld id="{5BCAD085-E8A6-8845-BD4E-CB4CCA059FC4}" type="datetimeFigureOut">
               <a:rPr lang="en-US" smtClean="0"/>
-              <a:t>1/27/13</a:t>
+              <a:t>10/3/2026</a:t>
             </a:fld>
             <a:endParaRPr lang="en-US"/>
           </a:p>
@@ -2625,10 +2623,9 @@
           <a:lstStyle/>
           <a:p>
             <a:r>
-              <a:rPr lang="en-US" smtClean="0"/>
+              <a:rPr lang="en-US"/>
               <a:t>Click to edit Master title style</a:t>
             </a:r>
-            <a:endParaRPr lang="en-US"/>
           </a:p>
         </p:txBody>
       </p:sp>
@@ -2659,38 +2656,37 @@
           <a:p>
             <a:pPr lvl="0"/>
             <a:r>
-              <a:rPr lang="en-US" smtClean="0"/>
+              <a:rPr lang="en-US"/>
               <a:t>Click to edit Master text styles</a:t>
             </a:r>
           </a:p>
           <a:p>
             <a:pPr lvl="1"/>
             <a:r>
-              <a:rPr lang="en-US" smtClean="0"/>
+              <a:rPr lang="en-US"/>
               <a:t>Second level</a:t>
             </a:r>
           </a:p>
           <a:p>
             <a:pPr lvl="2"/>
             <a:r>
-              <a:rPr lang="en-US" smtClean="0"/>
+              <a:rPr lang="en-US"/>
               <a:t>Third level</a:t>
             </a:r>
           </a:p>
           <a:p>
             <a:pPr lvl="3"/>
             <a:r>
-              <a:rPr lang="en-US" smtClean="0"/>
+              <a:rPr lang="en-US"/>
               <a:t>Fourth level</a:t>
             </a:r>
           </a:p>
           <a:p>
             <a:pPr lvl="4"/>
             <a:r>
-              <a:rPr lang="en-US" smtClean="0"/>
+              <a:rPr lang="en-US"/>
               <a:t>Fifth level</a:t>
             </a:r>
-            <a:endParaRPr lang="en-US"/>
           </a:p>
         </p:txBody>
       </p:sp>
@@ -2729,7 +2725,7 @@
           <a:p>
             <a:fld id="{5BCAD085-E8A6-8845-BD4E-CB4CCA059FC4}" type="datetimeFigureOut">
               <a:rPr lang="en-US" smtClean="0"/>
-              <a:t>1/27/13</a:t>
+              <a:t>10/3/2026</a:t>
             </a:fld>
             <a:endParaRPr lang="en-US"/>
           </a:p>
@@ -3088,7 +3084,7 @@
 </file>
 
 <file path=ppt/slides/slide1.xml><?xml version="1.0" encoding="utf-8"?>
-<p:sld xmlns:a="http://schemas.openxmlformats.org/drawingml/2006/main" xmlns:p="http://schemas.openxmlformats.org/presentationml/2006/main" xmlns:r="http://schemas.openxmlformats.org/officeDocument/2006/relationships">
+<p:sld xmlns:a="http://schemas.openxmlformats.org/drawingml/2006/main" xmlns:r="http://schemas.openxmlformats.org/officeDocument/2006/relationships" xmlns:p="http://schemas.openxmlformats.org/presentationml/2006/main">
   <p:cSld>
     <p:spTree>
       <p:nvGrpSpPr>
@@ -3096,7 +3092,14 @@
         <p:cNvGrpSpPr/>
         <p:nvPr/>
       </p:nvGrpSpPr>
-      <p:grpSpPr/>
+      <p:grpSpPr>
+        <a:xfrm>
+          <a:off x="0" y="0"/>
+          <a:ext cx="0" cy="0"/>
+          <a:chOff x="0" y="0"/>
+          <a:chExt cx="0" cy="0"/>
+        </a:xfrm>
+      </p:grpSpPr>
       <p:sp>
         <p:nvSpPr>
           <p:cNvPr id="2" name="Rectangle 1"/>
@@ -3137,6 +3140,7 @@
           <a:lstStyle/>
           <a:p>
             <a:pPr algn="ctr"/>
+            <a:endParaRPr/>
           </a:p>
         </p:txBody>
       </p:sp>
@@ -3148,8 +3152,8 @@
         </p:nvSpPr>
         <p:spPr>
           <a:xfrm>
-            <a:off x="731520" y="1371600"/>
-            <a:ext cx="137160" cy="3474720"/>
+            <a:off x="822960" y="1371600"/>
+            <a:ext cx="109728" cy="4114800"/>
           </a:xfrm>
           <a:prstGeom prst="rect">
             <a:avLst/>
@@ -3180,160 +3184,135 @@
           <a:lstStyle/>
           <a:p>
             <a:pPr algn="ctr"/>
-          </a:p>
-        </p:txBody>
-      </p:sp>
-      <p:pic>
-        <p:nvPicPr>
-          <p:cNvPr id="4" name="Picture 3" descr="logo-brand.png"/>
-          <p:cNvPicPr>
-            <a:picLocks noChangeAspect="1"/>
-          </p:cNvPicPr>
+            <a:endParaRPr/>
+          </a:p>
+        </p:txBody>
+      </p:sp>
+      <p:sp>
+        <p:nvSpPr>
+          <p:cNvPr id="4" name="Rectangle 3"/>
+          <p:cNvSpPr/>
           <p:nvPr/>
-        </p:nvPicPr>
-        <p:blipFill>
-          <a:blip r:embed="rId2"/>
-          <a:stretch>
-            <a:fillRect/>
-          </a:stretch>
-        </p:blipFill>
+        </p:nvSpPr>
         <p:spPr>
           <a:xfrm>
-            <a:off x="1097280" y="1371600"/>
-            <a:ext cx="2926080" cy="1663755"/>
-          </a:xfrm>
-          <a:prstGeom prst="rect">
-            <a:avLst/>
-          </a:prstGeom>
-        </p:spPr>
-      </p:pic>
-      <p:sp>
-        <p:nvSpPr>
-          <p:cNvPr id="5" name="TextBox 4"/>
-          <p:cNvSpPr txBox="1"/>
-          <p:nvPr/>
-        </p:nvSpPr>
-        <p:spPr>
-          <a:xfrm>
-            <a:off x="1097280" y="2651760"/>
-            <a:ext cx="7315200" cy="365760"/>
+            <a:off x="1188720" y="1280160"/>
+            <a:ext cx="6858000" cy="4297680"/>
           </a:xfrm>
           <a:prstGeom prst="rect">
             <a:avLst/>
           </a:prstGeom>
           <a:noFill/>
+          <a:ln>
+            <a:noFill/>
+          </a:ln>
         </p:spPr>
-        <p:txBody>
-          <a:bodyPr wrap="none">
-            <a:spAutoFit/>
-          </a:bodyPr>
-          <a:lstStyle/>
-          <a:p>
-            <a:pPr>
+        <p:style>
+          <a:lnRef idx="1">
+            <a:schemeClr val="accent1"/>
+          </a:lnRef>
+          <a:fillRef idx="3">
+            <a:schemeClr val="accent1"/>
+          </a:fillRef>
+          <a:effectRef idx="2">
+            <a:schemeClr val="accent1"/>
+          </a:effectRef>
+          <a:fontRef idx="minor">
+            <a:schemeClr val="lt1"/>
+          </a:fontRef>
+        </p:style>
+        <p:txBody>
+          <a:bodyPr wrap="square" lIns="0" tIns="0" rtlCol="0" anchor="ctr"/>
+          <a:lstStyle/>
+          <a:p>
+            <a:pPr algn="ctr">
+              <a:spcAft>
+                <a:spcPts val="1000"/>
+              </a:spcAft>
               <a:defRPr sz="1100" b="1">
                 <a:solidFill>
                   <a:srgbClr val="0284C7"/>
                 </a:solidFill>
+                <a:latin typeface="Arial"/>
               </a:defRPr>
             </a:pPr>
             <a:r>
               <a:t>PROBLEM STATEMENT 25: READY FULL-STACK ANALYTICS</a:t>
             </a:r>
           </a:p>
-        </p:txBody>
-      </p:sp>
-      <p:sp>
-        <p:nvSpPr>
-          <p:cNvPr id="6" name="TextBox 5"/>
-          <p:cNvSpPr txBox="1"/>
+          <a:p>
+            <a:pPr>
+              <a:spcAft>
+                <a:spcPts val="400"/>
+              </a:spcAft>
+              <a:defRPr sz="4600" b="1">
+                <a:solidFill>
+                  <a:srgbClr val="FFFFFF"/>
+                </a:solidFill>
+                <a:latin typeface="Arial"/>
+              </a:defRPr>
+            </a:pPr>
+            <a:r>
+              <a:t>ParetoFlow</a:t>
+            </a:r>
+          </a:p>
+          <a:p>
+            <a:pPr>
+              <a:spcAft>
+                <a:spcPts val="2000"/>
+              </a:spcAft>
+              <a:defRPr sz="2000" b="1">
+                <a:solidFill>
+                  <a:srgbClr val="94A3B8"/>
+                </a:solidFill>
+                <a:latin typeface="Arial"/>
+              </a:defRPr>
+            </a:pPr>
+            <a:r>
+              <a:t>Intelligent Downtime Log &amp; Root-Cause Analyzer</a:t>
+            </a:r>
+          </a:p>
+          <a:p>
+            <a:pPr>
+              <a:spcAft>
+                <a:spcPts val="1800"/>
+              </a:spcAft>
+              <a:defRPr sz="1300">
+                <a:solidFill>
+                  <a:srgbClr val="CBD5E1"/>
+                </a:solidFill>
+                <a:latin typeface="Arial"/>
+              </a:defRPr>
+            </a:pPr>
+            <a:r>
+              <a:t>Eliminating anecdotal stoppages through live MTBF/MTTR analytics, dual-axis 80/20 Pareto root-cause identification, and automated repeat-failure alerts.</a:t>
+            </a:r>
+          </a:p>
+          <a:p>
+            <a:pPr>
+              <a:defRPr sz="1050" b="1">
+                <a:solidFill>
+                  <a:srgbClr val="93C5FD"/>
+                </a:solidFill>
+                <a:latin typeface="Arial"/>
+              </a:defRPr>
+            </a:pPr>
+            <a:r>
+              <a:t>⚡ Sub-20s Stoppage Logger   |   📊 80/20 Pareto Engine   |   🚨 7-Day Repeat Alerts</a:t>
+            </a:r>
+          </a:p>
+        </p:txBody>
+      </p:sp>
+      <p:sp>
+        <p:nvSpPr>
+          <p:cNvPr id="5" name="Rounded Rectangle 4"/>
+          <p:cNvSpPr/>
           <p:nvPr/>
         </p:nvSpPr>
         <p:spPr>
           <a:xfrm>
-            <a:off x="1097280" y="3017520"/>
-            <a:ext cx="9601200" cy="1463040"/>
-          </a:xfrm>
-          <a:prstGeom prst="rect">
-            <a:avLst/>
-          </a:prstGeom>
-          <a:noFill/>
-        </p:spPr>
-        <p:txBody>
-          <a:bodyPr wrap="none">
-            <a:spAutoFit/>
-          </a:bodyPr>
-          <a:lstStyle/>
-          <a:p>
-            <a:pPr>
-              <a:defRPr sz="4400" b="1">
-                <a:solidFill>
-                  <a:srgbClr val="FFFFFF"/>
-                </a:solidFill>
-              </a:defRPr>
-            </a:pPr>
-            <a:r>
-              <a:t>ParetoFlow</a:t>
-            </a:r>
-          </a:p>
-          <a:p>
-            <a:pPr>
-              <a:defRPr sz="2200" b="1">
-                <a:solidFill>
-                  <a:srgbClr val="94A3B8"/>
-                </a:solidFill>
-              </a:defRPr>
-            </a:pPr>
-            <a:r>
-              <a:t>Downtime Log &amp; Root-Cause Analyzer</a:t>
-            </a:r>
-          </a:p>
-        </p:txBody>
-      </p:sp>
-      <p:sp>
-        <p:nvSpPr>
-          <p:cNvPr id="7" name="TextBox 6"/>
-          <p:cNvSpPr txBox="1"/>
-          <p:nvPr/>
-        </p:nvSpPr>
-        <p:spPr>
-          <a:xfrm>
-            <a:off x="1097280" y="4572000"/>
-            <a:ext cx="9601200" cy="731520"/>
-          </a:xfrm>
-          <a:prstGeom prst="rect">
-            <a:avLst/>
-          </a:prstGeom>
-          <a:noFill/>
-        </p:spPr>
-        <p:txBody>
-          <a:bodyPr wrap="none">
-            <a:spAutoFit/>
-          </a:bodyPr>
-          <a:lstStyle/>
-          <a:p>
-            <a:pPr>
-              <a:defRPr sz="1400">
-                <a:solidFill>
-                  <a:srgbClr val="CBD5E1"/>
-                </a:solidFill>
-              </a:defRPr>
-            </a:pPr>
-            <a:r>
-              <a:t>Eliminating anecdotal stoppage tracking with sub-20s logging, live MTBF/MTTR computations, dual-axis 80/20 Pareto root cause discovery, and automated repeat-failure alerts.</a:t>
-            </a:r>
-          </a:p>
-        </p:txBody>
-      </p:sp>
-      <p:sp>
-        <p:nvSpPr>
-          <p:cNvPr id="8" name="Rounded Rectangle 7"/>
-          <p:cNvSpPr/>
-          <p:nvPr/>
-        </p:nvSpPr>
-        <p:spPr>
-          <a:xfrm>
-            <a:off x="731520" y="5577840"/>
-            <a:ext cx="10728655" cy="731520"/>
+            <a:off x="8321040" y="1371600"/>
+            <a:ext cx="3044952" cy="4114800"/>
           </a:xfrm>
           <a:prstGeom prst="roundRect">
             <a:avLst/>
@@ -3366,36 +3345,164 @@
           <a:lstStyle/>
           <a:p>
             <a:pPr algn="ctr"/>
-          </a:p>
-        </p:txBody>
-      </p:sp>
-      <p:sp>
-        <p:nvSpPr>
-          <p:cNvPr id="9" name="TextBox 8"/>
-          <p:cNvSpPr txBox="1"/>
+            <a:endParaRPr/>
+          </a:p>
+        </p:txBody>
+      </p:sp>
+      <p:pic>
+        <p:nvPicPr>
+          <p:cNvPr id="6" name="Picture 5" descr="logo-icon.png"/>
+          <p:cNvPicPr>
+            <a:picLocks noChangeAspect="1"/>
+          </p:cNvPicPr>
           <p:nvPr/>
-        </p:nvSpPr>
+        </p:nvPicPr>
+        <p:blipFill>
+          <a:blip r:embed="rId2"/>
+          <a:stretch>
+            <a:fillRect/>
+          </a:stretch>
+        </p:blipFill>
         <p:spPr>
           <a:xfrm>
-            <a:off x="1005840" y="5715000"/>
-            <a:ext cx="10149840" cy="457200"/>
+            <a:off x="8833104" y="1691640"/>
+            <a:ext cx="2011680" cy="1480405"/>
+          </a:xfrm>
+          <a:prstGeom prst="rect">
+            <a:avLst/>
+          </a:prstGeom>
+        </p:spPr>
+      </p:pic>
+      <p:sp>
+        <p:nvSpPr>
+          <p:cNvPr id="7" name="Rectangle 6"/>
+          <p:cNvSpPr/>
+          <p:nvPr/>
+        </p:nvSpPr>
+        <p:spPr>
+          <a:xfrm>
+            <a:off x="8321040" y="3291840"/>
+            <a:ext cx="3044952" cy="2011680"/>
           </a:xfrm>
           <a:prstGeom prst="rect">
             <a:avLst/>
           </a:prstGeom>
           <a:noFill/>
+          <a:ln>
+            <a:noFill/>
+          </a:ln>
         </p:spPr>
-        <p:txBody>
-          <a:bodyPr wrap="none">
-            <a:spAutoFit/>
-          </a:bodyPr>
-          <a:lstStyle/>
-          <a:p>
-            <a:pPr>
-              <a:defRPr sz="1200" b="1">
+        <p:style>
+          <a:lnRef idx="1">
+            <a:schemeClr val="accent1"/>
+          </a:lnRef>
+          <a:fillRef idx="3">
+            <a:schemeClr val="accent1"/>
+          </a:fillRef>
+          <a:effectRef idx="2">
+            <a:schemeClr val="accent1"/>
+          </a:effectRef>
+          <a:fontRef idx="minor">
+            <a:schemeClr val="lt1"/>
+          </a:fontRef>
+        </p:style>
+        <p:txBody>
+          <a:bodyPr wrap="square" lIns="182880" tIns="0" rIns="182880" rtlCol="0" anchor="ctr"/>
+          <a:lstStyle/>
+          <a:p>
+            <a:pPr algn="ctr">
+              <a:spcAft>
+                <a:spcPts val="400"/>
+              </a:spcAft>
+              <a:defRPr sz="1700" b="1">
+                <a:solidFill>
+                  <a:srgbClr val="FFFFFF"/>
+                </a:solidFill>
+                <a:latin typeface="Arial"/>
+              </a:defRPr>
+            </a:pPr>
+            <a:r>
+              <a:t>PARETOFLOW</a:t>
+            </a:r>
+          </a:p>
+          <a:p>
+            <a:pPr algn="ctr">
+              <a:spcAft>
+                <a:spcPts val="1000"/>
+              </a:spcAft>
+              <a:defRPr sz="1100">
+                <a:solidFill>
+                  <a:srgbClr val="94A3B8"/>
+                </a:solidFill>
+                <a:latin typeface="Arial"/>
+              </a:defRPr>
+            </a:pPr>
+            <a:r>
+              <a:t>Enterprise Reliability Suite</a:t>
+            </a:r>
+          </a:p>
+          <a:p>
+            <a:pPr algn="ctr">
+              <a:defRPr sz="950" b="1">
+                <a:solidFill>
+                  <a:srgbClr val="10B981"/>
+                </a:solidFill>
+                <a:latin typeface="Arial"/>
+              </a:defRPr>
+            </a:pPr>
+            <a:r>
+              <a:t>● PRODUCTION READY</a:t>
+            </a:r>
+          </a:p>
+        </p:txBody>
+      </p:sp>
+      <p:sp>
+        <p:nvSpPr>
+          <p:cNvPr id="8" name="Rounded Rectangle 7"/>
+          <p:cNvSpPr/>
+          <p:nvPr/>
+        </p:nvSpPr>
+        <p:spPr>
+          <a:xfrm>
+            <a:off x="822960" y="5669280"/>
+            <a:ext cx="10545775" cy="685800"/>
+          </a:xfrm>
+          <a:prstGeom prst="roundRect">
+            <a:avLst/>
+          </a:prstGeom>
+          <a:solidFill>
+            <a:srgbClr val="1E293B"/>
+          </a:solidFill>
+          <a:ln w="12700">
+            <a:solidFill>
+              <a:srgbClr val="334155"/>
+            </a:solidFill>
+          </a:ln>
+        </p:spPr>
+        <p:style>
+          <a:lnRef idx="1">
+            <a:schemeClr val="accent1"/>
+          </a:lnRef>
+          <a:fillRef idx="3">
+            <a:schemeClr val="accent1"/>
+          </a:fillRef>
+          <a:effectRef idx="2">
+            <a:schemeClr val="accent1"/>
+          </a:effectRef>
+          <a:fontRef idx="minor">
+            <a:schemeClr val="lt1"/>
+          </a:fontRef>
+        </p:style>
+        <p:txBody>
+          <a:bodyPr wrap="square" lIns="274320" tIns="164592" rtlCol="0" anchor="ctr"/>
+          <a:lstStyle/>
+          <a:p>
+            <a:pPr algn="ctr">
+              <a:defRPr sz="1100" b="1">
                 <a:solidFill>
                   <a:srgbClr val="E2E8F0"/>
                 </a:solidFill>
+                <a:latin typeface="Arial"/>
               </a:defRPr>
             </a:pPr>
             <a:r>
@@ -3413,7 +3520,7 @@
 </file>
 
 <file path=ppt/slides/slide10.xml><?xml version="1.0" encoding="utf-8"?>
-<p:sld xmlns:a="http://schemas.openxmlformats.org/drawingml/2006/main" xmlns:p="http://schemas.openxmlformats.org/presentationml/2006/main" xmlns:r="http://schemas.openxmlformats.org/officeDocument/2006/relationships">
+<p:sld xmlns:a="http://schemas.openxmlformats.org/drawingml/2006/main" xmlns:r="http://schemas.openxmlformats.org/officeDocument/2006/relationships" xmlns:p="http://schemas.openxmlformats.org/presentationml/2006/main">
   <p:cSld>
     <p:spTree>
       <p:nvGrpSpPr>
@@ -3421,7 +3528,14 @@
         <p:cNvGrpSpPr/>
         <p:nvPr/>
       </p:nvGrpSpPr>
-      <p:grpSpPr/>
+      <p:grpSpPr>
+        <a:xfrm>
+          <a:off x="0" y="0"/>
+          <a:ext cx="0" cy="0"/>
+          <a:chOff x="0" y="0"/>
+          <a:chExt cx="0" cy="0"/>
+        </a:xfrm>
+      </p:grpSpPr>
       <p:sp>
         <p:nvSpPr>
           <p:cNvPr id="2" name="Rectangle 1"/>
@@ -3462,32 +3576,51 @@
           <a:lstStyle/>
           <a:p>
             <a:pPr algn="ctr"/>
-          </a:p>
-        </p:txBody>
-      </p:sp>
-      <p:sp>
-        <p:nvSpPr>
-          <p:cNvPr id="3" name="TextBox 2"/>
-          <p:cNvSpPr txBox="1"/>
+            <a:endParaRPr/>
+          </a:p>
+        </p:txBody>
+      </p:sp>
+      <p:sp>
+        <p:nvSpPr>
+          <p:cNvPr id="3" name="Rectangle 2"/>
+          <p:cNvSpPr/>
           <p:nvPr/>
         </p:nvSpPr>
         <p:spPr>
           <a:xfrm>
-            <a:off x="731520" y="457200"/>
-            <a:ext cx="10515600" cy="320040"/>
+            <a:off x="731520" y="365760"/>
+            <a:ext cx="10728655" cy="1005840"/>
           </a:xfrm>
           <a:prstGeom prst="rect">
             <a:avLst/>
           </a:prstGeom>
           <a:noFill/>
+          <a:ln>
+            <a:noFill/>
+          </a:ln>
         </p:spPr>
-        <p:txBody>
-          <a:bodyPr wrap="none">
-            <a:spAutoFit/>
-          </a:bodyPr>
-          <a:lstStyle/>
-          <a:p>
-            <a:pPr>
+        <p:style>
+          <a:lnRef idx="1">
+            <a:schemeClr val="accent1"/>
+          </a:lnRef>
+          <a:fillRef idx="3">
+            <a:schemeClr val="accent1"/>
+          </a:fillRef>
+          <a:effectRef idx="2">
+            <a:schemeClr val="accent1"/>
+          </a:effectRef>
+          <a:fontRef idx="minor">
+            <a:schemeClr val="lt1"/>
+          </a:fontRef>
+        </p:style>
+        <p:txBody>
+          <a:bodyPr wrap="square" lIns="0" tIns="0" rIns="0" bIns="0" rtlCol="0" anchor="ctr"/>
+          <a:lstStyle/>
+          <a:p>
+            <a:pPr algn="ctr">
+              <a:spcAft>
+                <a:spcPts val="200"/>
+              </a:spcAft>
               <a:defRPr sz="1000" b="1">
                 <a:solidFill>
                   <a:srgbClr val="2563EB"/>
@@ -3496,43 +3629,558 @@
               </a:defRPr>
             </a:pPr>
             <a:r>
-              <a:t>PARETOFLOW | THE FOUR BITS</a:t>
-            </a:r>
-          </a:p>
-        </p:txBody>
-      </p:sp>
-      <p:sp>
-        <p:nvSpPr>
-          <p:cNvPr id="4" name="TextBox 3"/>
-          <p:cNvSpPr txBox="1"/>
+              <a:t>PARETOFLOW | TEAM THE FOUR BITS</a:t>
+            </a:r>
+          </a:p>
+          <a:p>
+            <a:pPr>
+              <a:defRPr sz="2400" b="1">
+                <a:solidFill>
+                  <a:srgbClr val="1E293B"/>
+                </a:solidFill>
+                <a:latin typeface="Arial"/>
+              </a:defRPr>
+            </a:pPr>
+            <a:r>
+              <a:t>Hackathon Demo Day Achievements &amp; Business Impact</a:t>
+            </a:r>
+          </a:p>
+        </p:txBody>
+      </p:sp>
+      <p:pic>
+        <p:nvPicPr>
+          <p:cNvPr id="4" name="Picture 3" descr="logo-icon.png"/>
+          <p:cNvPicPr>
+            <a:picLocks noChangeAspect="1"/>
+          </p:cNvPicPr>
           <p:nvPr/>
-        </p:nvSpPr>
+        </p:nvPicPr>
+        <p:blipFill>
+          <a:blip r:embed="rId2"/>
+          <a:stretch>
+            <a:fillRect/>
+          </a:stretch>
+        </p:blipFill>
         <p:spPr>
           <a:xfrm>
-            <a:off x="731520" y="731520"/>
-            <a:ext cx="9601200" cy="640080"/>
+            <a:off x="11064240" y="365760"/>
+            <a:ext cx="502920" cy="370101"/>
+          </a:xfrm>
+          <a:prstGeom prst="rect">
+            <a:avLst/>
+          </a:prstGeom>
+        </p:spPr>
+      </p:pic>
+      <p:sp>
+        <p:nvSpPr>
+          <p:cNvPr id="5" name="Rounded Rectangle 4"/>
+          <p:cNvSpPr/>
+          <p:nvPr/>
+        </p:nvSpPr>
+        <p:spPr>
+          <a:xfrm>
+            <a:off x="731520" y="1645920"/>
+            <a:ext cx="5212080" cy="2194560"/>
+          </a:xfrm>
+          <a:prstGeom prst="roundRect">
+            <a:avLst/>
+          </a:prstGeom>
+          <a:solidFill>
+            <a:srgbClr val="FFFFFF"/>
+          </a:solidFill>
+          <a:ln w="12700">
+            <a:solidFill>
+              <a:srgbClr val="E2E8F0"/>
+            </a:solidFill>
+          </a:ln>
+        </p:spPr>
+        <p:style>
+          <a:lnRef idx="1">
+            <a:schemeClr val="accent1"/>
+          </a:lnRef>
+          <a:fillRef idx="3">
+            <a:schemeClr val="accent1"/>
+          </a:fillRef>
+          <a:effectRef idx="2">
+            <a:schemeClr val="accent1"/>
+          </a:effectRef>
+          <a:fontRef idx="minor">
+            <a:schemeClr val="lt1"/>
+          </a:fontRef>
+        </p:style>
+        <p:txBody>
+          <a:bodyPr wrap="square" lIns="228600" tIns="182880" rIns="228600" rtlCol="0" anchor="ctr"/>
+          <a:lstStyle/>
+          <a:p>
+            <a:pPr algn="ctr">
+              <a:spcAft>
+                <a:spcPts val="800"/>
+              </a:spcAft>
+              <a:defRPr sz="1400" b="1">
+                <a:solidFill>
+                  <a:srgbClr val="2563EB"/>
+                </a:solidFill>
+                <a:latin typeface="Arial"/>
+              </a:defRPr>
+            </a:pPr>
+            <a:r>
+              <a:t>✅ 1-Click Live Stoppage Demonstration</a:t>
+            </a:r>
+          </a:p>
+          <a:p>
+            <a:pPr>
+              <a:spcAft>
+                <a:spcPts val="500"/>
+              </a:spcAft>
+              <a:defRPr sz="1100">
+                <a:solidFill>
+                  <a:srgbClr val="1E293B"/>
+                </a:solidFill>
+                <a:latin typeface="Arial"/>
+              </a:defRPr>
+            </a:pPr>
+            <a:r>
+              <a:t>•  Injected 3 sample stoppages live on stage.</a:t>
+            </a:r>
+          </a:p>
+          <a:p>
+            <a:pPr>
+              <a:spcAft>
+                <a:spcPts val="500"/>
+              </a:spcAft>
+              <a:defRPr sz="1100">
+                <a:solidFill>
+                  <a:srgbClr val="1E293B"/>
+                </a:solidFill>
+                <a:latin typeface="Arial"/>
+              </a:defRPr>
+            </a:pPr>
+            <a:r>
+              <a:t>•  Witnessed MTBF, MTTR, Availability, Pareto curve, and Weekly Trends recalculate in real time.</a:t>
+            </a:r>
+          </a:p>
+        </p:txBody>
+      </p:sp>
+      <p:sp>
+        <p:nvSpPr>
+          <p:cNvPr id="6" name="Rounded Rectangle 5"/>
+          <p:cNvSpPr/>
+          <p:nvPr/>
+        </p:nvSpPr>
+        <p:spPr>
+          <a:xfrm>
+            <a:off x="6217920" y="1645920"/>
+            <a:ext cx="5212080" cy="2194560"/>
+          </a:xfrm>
+          <a:prstGeom prst="roundRect">
+            <a:avLst/>
+          </a:prstGeom>
+          <a:solidFill>
+            <a:srgbClr val="FFFFFF"/>
+          </a:solidFill>
+          <a:ln w="12700">
+            <a:solidFill>
+              <a:srgbClr val="E2E8F0"/>
+            </a:solidFill>
+          </a:ln>
+        </p:spPr>
+        <p:style>
+          <a:lnRef idx="1">
+            <a:schemeClr val="accent1"/>
+          </a:lnRef>
+          <a:fillRef idx="3">
+            <a:schemeClr val="accent1"/>
+          </a:fillRef>
+          <a:effectRef idx="2">
+            <a:schemeClr val="accent1"/>
+          </a:effectRef>
+          <a:fontRef idx="minor">
+            <a:schemeClr val="lt1"/>
+          </a:fontRef>
+        </p:style>
+        <p:txBody>
+          <a:bodyPr wrap="square" lIns="228600" tIns="182880" rIns="228600" rtlCol="0" anchor="ctr"/>
+          <a:lstStyle/>
+          <a:p>
+            <a:pPr algn="ctr">
+              <a:spcAft>
+                <a:spcPts val="800"/>
+              </a:spcAft>
+              <a:defRPr sz="1400" b="1">
+                <a:solidFill>
+                  <a:srgbClr val="10B981"/>
+                </a:solidFill>
+                <a:latin typeface="Arial"/>
+              </a:defRPr>
+            </a:pPr>
+            <a:r>
+              <a:t>📈 35% to 45% Unplanned Downtime Reduction</a:t>
+            </a:r>
+          </a:p>
+          <a:p>
+            <a:pPr>
+              <a:spcAft>
+                <a:spcPts val="500"/>
+              </a:spcAft>
+              <a:defRPr sz="1100">
+                <a:solidFill>
+                  <a:srgbClr val="1E293B"/>
+                </a:solidFill>
+                <a:latin typeface="Arial"/>
+              </a:defRPr>
+            </a:pPr>
+            <a:r>
+              <a:t>•  Channeling maintenance into the 80/20 vital few causes drives massive operational cost savings.</a:t>
+            </a:r>
+          </a:p>
+          <a:p>
+            <a:pPr>
+              <a:spcAft>
+                <a:spcPts val="500"/>
+              </a:spcAft>
+              <a:defRPr sz="1100">
+                <a:solidFill>
+                  <a:srgbClr val="1E293B"/>
+                </a:solidFill>
+                <a:latin typeface="Arial"/>
+              </a:defRPr>
+            </a:pPr>
+            <a:r>
+              <a:t>•  Shifts plant culture from anecdotal firefighting to data-driven reliability.</a:t>
+            </a:r>
+          </a:p>
+        </p:txBody>
+      </p:sp>
+      <p:sp>
+        <p:nvSpPr>
+          <p:cNvPr id="7" name="Rounded Rectangle 6"/>
+          <p:cNvSpPr/>
+          <p:nvPr/>
+        </p:nvSpPr>
+        <p:spPr>
+          <a:xfrm>
+            <a:off x="731520" y="4114800"/>
+            <a:ext cx="5212080" cy="2194560"/>
+          </a:xfrm>
+          <a:prstGeom prst="roundRect">
+            <a:avLst/>
+          </a:prstGeom>
+          <a:solidFill>
+            <a:srgbClr val="FFFFFF"/>
+          </a:solidFill>
+          <a:ln w="12700">
+            <a:solidFill>
+              <a:srgbClr val="E2E8F0"/>
+            </a:solidFill>
+          </a:ln>
+        </p:spPr>
+        <p:style>
+          <a:lnRef idx="1">
+            <a:schemeClr val="accent1"/>
+          </a:lnRef>
+          <a:fillRef idx="3">
+            <a:schemeClr val="accent1"/>
+          </a:fillRef>
+          <a:effectRef idx="2">
+            <a:schemeClr val="accent1"/>
+          </a:effectRef>
+          <a:fontRef idx="minor">
+            <a:schemeClr val="lt1"/>
+          </a:fontRef>
+        </p:style>
+        <p:txBody>
+          <a:bodyPr wrap="square" lIns="228600" tIns="182880" rIns="228600" rtlCol="0" anchor="ctr"/>
+          <a:lstStyle/>
+          <a:p>
+            <a:pPr algn="ctr">
+              <a:spcAft>
+                <a:spcPts val="800"/>
+              </a:spcAft>
+              <a:defRPr sz="1400" b="1">
+                <a:solidFill>
+                  <a:srgbClr val="EF4444"/>
+                </a:solidFill>
+                <a:latin typeface="Arial"/>
+              </a:defRPr>
+            </a:pPr>
+            <a:r>
+              <a:t>🚨 Zero Recurring Silent Killers</a:t>
+            </a:r>
+          </a:p>
+          <a:p>
+            <a:pPr>
+              <a:spcAft>
+                <a:spcPts val="500"/>
+              </a:spcAft>
+              <a:defRPr sz="1100">
+                <a:solidFill>
+                  <a:srgbClr val="1E293B"/>
+                </a:solidFill>
+                <a:latin typeface="Arial"/>
+              </a:defRPr>
+            </a:pPr>
+            <a:r>
+              <a:t>•  Automated rolling 7-day alert engine catches repeated minor breakdowns before catastrophic machine burnout.</a:t>
+            </a:r>
+          </a:p>
+          <a:p>
+            <a:pPr>
+              <a:spcAft>
+                <a:spcPts val="500"/>
+              </a:spcAft>
+              <a:defRPr sz="1100">
+                <a:solidFill>
+                  <a:srgbClr val="1E293B"/>
+                </a:solidFill>
+                <a:latin typeface="Arial"/>
+              </a:defRPr>
+            </a:pPr>
+            <a:r>
+              <a:t>•  Generates actionable maintenance directives for technicians.</a:t>
+            </a:r>
+          </a:p>
+        </p:txBody>
+      </p:sp>
+      <p:sp>
+        <p:nvSpPr>
+          <p:cNvPr id="8" name="Rounded Rectangle 7"/>
+          <p:cNvSpPr/>
+          <p:nvPr/>
+        </p:nvSpPr>
+        <p:spPr>
+          <a:xfrm>
+            <a:off x="6217920" y="4114800"/>
+            <a:ext cx="5212080" cy="2194560"/>
+          </a:xfrm>
+          <a:prstGeom prst="roundRect">
+            <a:avLst/>
+          </a:prstGeom>
+          <a:solidFill>
+            <a:srgbClr val="FFFFFF"/>
+          </a:solidFill>
+          <a:ln w="12700">
+            <a:solidFill>
+              <a:srgbClr val="E2E8F0"/>
+            </a:solidFill>
+          </a:ln>
+        </p:spPr>
+        <p:style>
+          <a:lnRef idx="1">
+            <a:schemeClr val="accent1"/>
+          </a:lnRef>
+          <a:fillRef idx="3">
+            <a:schemeClr val="accent1"/>
+          </a:fillRef>
+          <a:effectRef idx="2">
+            <a:schemeClr val="accent1"/>
+          </a:effectRef>
+          <a:fontRef idx="minor">
+            <a:schemeClr val="lt1"/>
+          </a:fontRef>
+        </p:style>
+        <p:txBody>
+          <a:bodyPr wrap="square" lIns="228600" tIns="182880" rIns="228600" rtlCol="0" anchor="ctr"/>
+          <a:lstStyle/>
+          <a:p>
+            <a:pPr algn="ctr">
+              <a:spcAft>
+                <a:spcPts val="800"/>
+              </a:spcAft>
+              <a:defRPr sz="1400" b="1">
+                <a:solidFill>
+                  <a:srgbClr val="F59E0B"/>
+                </a:solidFill>
+                <a:latin typeface="Arial"/>
+              </a:defRPr>
+            </a:pPr>
+            <a:r>
+              <a:t>🚀 Future Vision &amp; Roadmap</a:t>
+            </a:r>
+          </a:p>
+          <a:p>
+            <a:pPr>
+              <a:spcAft>
+                <a:spcPts val="500"/>
+              </a:spcAft>
+              <a:defRPr sz="1100">
+                <a:solidFill>
+                  <a:srgbClr val="1E293B"/>
+                </a:solidFill>
+                <a:latin typeface="Arial"/>
+              </a:defRPr>
+            </a:pPr>
+            <a:r>
+              <a:t>•  IoT vibration &amp; temperature sensor ingestion via MQTT.</a:t>
+            </a:r>
+          </a:p>
+          <a:p>
+            <a:pPr>
+              <a:spcAft>
+                <a:spcPts val="500"/>
+              </a:spcAft>
+              <a:defRPr sz="1100">
+                <a:solidFill>
+                  <a:srgbClr val="1E293B"/>
+                </a:solidFill>
+                <a:latin typeface="Arial"/>
+              </a:defRPr>
+            </a:pPr>
+            <a:r>
+              <a:t>•  AI Predictive Maintenance (PdM) LLM assistant.</a:t>
+            </a:r>
+          </a:p>
+          <a:p>
+            <a:pPr>
+              <a:spcAft>
+                <a:spcPts val="500"/>
+              </a:spcAft>
+              <a:defRPr sz="1100">
+                <a:solidFill>
+                  <a:srgbClr val="1E293B"/>
+                </a:solidFill>
+                <a:latin typeface="Arial"/>
+              </a:defRPr>
+            </a:pPr>
+            <a:r>
+              <a:t>•  Bi-directional SAP/Oracle maintenance order synchronization.</a:t>
+            </a:r>
+          </a:p>
+        </p:txBody>
+      </p:sp>
+    </p:spTree>
+  </p:cSld>
+  <p:clrMapOvr>
+    <a:masterClrMapping/>
+  </p:clrMapOvr>
+</p:sld>
+</file>
+
+<file path=ppt/slides/slide11.xml><?xml version="1.0" encoding="utf-8"?>
+<p:sld xmlns:a="http://schemas.openxmlformats.org/drawingml/2006/main" xmlns:r="http://schemas.openxmlformats.org/officeDocument/2006/relationships" xmlns:p="http://schemas.openxmlformats.org/presentationml/2006/main">
+  <p:cSld>
+    <p:spTree>
+      <p:nvGrpSpPr>
+        <p:cNvPr id="1" name=""/>
+        <p:cNvGrpSpPr/>
+        <p:nvPr/>
+      </p:nvGrpSpPr>
+      <p:grpSpPr>
+        <a:xfrm>
+          <a:off x="0" y="0"/>
+          <a:ext cx="0" cy="0"/>
+          <a:chOff x="0" y="0"/>
+          <a:chExt cx="0" cy="0"/>
+        </a:xfrm>
+      </p:grpSpPr>
+      <p:sp>
+        <p:nvSpPr>
+          <p:cNvPr id="2" name="Rectangle 1"/>
+          <p:cNvSpPr/>
+          <p:nvPr/>
+        </p:nvSpPr>
+        <p:spPr>
+          <a:xfrm>
+            <a:off x="0" y="0"/>
+            <a:ext cx="12191695" cy="6858000"/>
+          </a:xfrm>
+          <a:prstGeom prst="rect">
+            <a:avLst/>
+          </a:prstGeom>
+          <a:solidFill>
+            <a:srgbClr val="0F172A"/>
+          </a:solidFill>
+          <a:ln>
+            <a:noFill/>
+          </a:ln>
+        </p:spPr>
+        <p:style>
+          <a:lnRef idx="1">
+            <a:schemeClr val="accent1"/>
+          </a:lnRef>
+          <a:fillRef idx="3">
+            <a:schemeClr val="accent1"/>
+          </a:fillRef>
+          <a:effectRef idx="2">
+            <a:schemeClr val="accent1"/>
+          </a:effectRef>
+          <a:fontRef idx="minor">
+            <a:schemeClr val="lt1"/>
+          </a:fontRef>
+        </p:style>
+        <p:txBody>
+          <a:bodyPr rtlCol="0" anchor="ctr"/>
+          <a:lstStyle/>
+          <a:p>
+            <a:pPr algn="ctr"/>
+            <a:endParaRPr/>
+          </a:p>
+        </p:txBody>
+      </p:sp>
+      <p:sp>
+        <p:nvSpPr>
+          <p:cNvPr id="4" name="Rectangle 3"/>
+          <p:cNvSpPr/>
+          <p:nvPr/>
+        </p:nvSpPr>
+        <p:spPr>
+          <a:xfrm>
+            <a:off x="1188720" y="640080"/>
+            <a:ext cx="9144000" cy="1097280"/>
           </a:xfrm>
           <a:prstGeom prst="rect">
             <a:avLst/>
           </a:prstGeom>
           <a:noFill/>
+          <a:ln>
+            <a:noFill/>
+          </a:ln>
         </p:spPr>
-        <p:txBody>
-          <a:bodyPr wrap="none">
-            <a:spAutoFit/>
-          </a:bodyPr>
-          <a:lstStyle/>
-          <a:p>
-            <a:pPr>
-              <a:defRPr sz="2400" b="1">
-                <a:solidFill>
-                  <a:srgbClr val="0F172A"/>
-                </a:solidFill>
-                <a:latin typeface="Arial"/>
-              </a:defRPr>
-            </a:pPr>
-            <a:r>
-              <a:t>Hackathon Demo Day Achievements &amp; Business Impact</a:t>
+        <p:style>
+          <a:lnRef idx="1">
+            <a:schemeClr val="accent1"/>
+          </a:lnRef>
+          <a:fillRef idx="3">
+            <a:schemeClr val="accent1"/>
+          </a:fillRef>
+          <a:effectRef idx="2">
+            <a:schemeClr val="accent1"/>
+          </a:effectRef>
+          <a:fontRef idx="minor">
+            <a:schemeClr val="lt1"/>
+          </a:fontRef>
+        </p:style>
+        <p:txBody>
+          <a:bodyPr wrap="square" lIns="0" tIns="0" rtlCol="0" anchor="ctr"/>
+          <a:lstStyle/>
+          <a:p>
+            <a:pPr algn="ctr">
+              <a:spcAft>
+                <a:spcPts val="400"/>
+              </a:spcAft>
+              <a:defRPr sz="1100" b="1">
+                <a:solidFill>
+                  <a:srgbClr val="0284C7"/>
+                </a:solidFill>
+                <a:latin typeface="Arial"/>
+              </a:defRPr>
+            </a:pPr>
+            <a:r>
+              <a:rPr dirty="0"/>
+              <a:t>DEMO DAY PRESENTATION  |  TEAM THE FOUR BITS</a:t>
+            </a:r>
+          </a:p>
+          <a:p>
+            <a:pPr>
+              <a:defRPr sz="3200" b="1">
+                <a:solidFill>
+                  <a:srgbClr val="FFFFFF"/>
+                </a:solidFill>
+                <a:latin typeface="Arial"/>
+              </a:defRPr>
+            </a:pPr>
+            <a:r>
+              <a:rPr dirty="0"/>
+              <a:t>Thank You! Questions &amp; Discussion</a:t>
             </a:r>
           </a:p>
         </p:txBody>
@@ -3553,8 +4201,8 @@
         </p:blipFill>
         <p:spPr>
           <a:xfrm>
-            <a:off x="10972800" y="457200"/>
-            <a:ext cx="548640" cy="403747"/>
+            <a:off x="10789920" y="594360"/>
+            <a:ext cx="822960" cy="605620"/>
           </a:xfrm>
           <a:prstGeom prst="rect">
             <a:avLst/>
@@ -3569,18 +4217,18 @@
         </p:nvSpPr>
         <p:spPr>
           <a:xfrm>
-            <a:off x="731520" y="1645920"/>
-            <a:ext cx="5120640" cy="2057400"/>
+            <a:off x="822960" y="2011680"/>
+            <a:ext cx="3364992" cy="3474720"/>
           </a:xfrm>
           <a:prstGeom prst="roundRect">
             <a:avLst/>
           </a:prstGeom>
           <a:solidFill>
-            <a:srgbClr val="FFFFFF"/>
+            <a:srgbClr val="1E293B"/>
           </a:solidFill>
           <a:ln w="12700">
             <a:solidFill>
-              <a:srgbClr val="E2E8F0"/>
+              <a:srgbClr val="334155"/>
             </a:solidFill>
           </a:ln>
         </p:spPr>
@@ -3599,80 +4247,126 @@
           </a:fontRef>
         </p:style>
         <p:txBody>
-          <a:bodyPr rtlCol="0" anchor="ctr"/>
-          <a:lstStyle/>
-          <a:p>
-            <a:pPr algn="ctr"/>
-          </a:p>
-        </p:txBody>
-      </p:sp>
-      <p:sp>
-        <p:nvSpPr>
-          <p:cNvPr id="7" name="TextBox 6"/>
-          <p:cNvSpPr txBox="1"/>
+          <a:bodyPr wrap="square" lIns="228600" tIns="228600" rIns="228600" rtlCol="0" anchor="ctr"/>
+          <a:lstStyle/>
+          <a:p>
+            <a:pPr algn="ctr">
+              <a:spcAft>
+                <a:spcPts val="1200"/>
+              </a:spcAft>
+              <a:defRPr sz="1500" b="1">
+                <a:solidFill>
+                  <a:srgbClr val="2563EB"/>
+                </a:solidFill>
+                <a:latin typeface="Arial"/>
+              </a:defRPr>
+            </a:pPr>
+            <a:r>
+              <a:t>Live Interactive Demo</a:t>
+            </a:r>
+          </a:p>
+          <a:p>
+            <a:pPr>
+              <a:spcAft>
+                <a:spcPts val="700"/>
+              </a:spcAft>
+              <a:defRPr sz="1100">
+                <a:solidFill>
+                  <a:srgbClr val="E2E8F0"/>
+                </a:solidFill>
+                <a:latin typeface="Arial"/>
+              </a:defRPr>
+            </a:pPr>
+            <a:r>
+              <a:t>•  Active Production Dashboard running at http://localhost:8000.</a:t>
+            </a:r>
+          </a:p>
+          <a:p>
+            <a:pPr>
+              <a:spcAft>
+                <a:spcPts val="700"/>
+              </a:spcAft>
+              <a:defRPr sz="1100">
+                <a:solidFill>
+                  <a:srgbClr val="E2E8F0"/>
+                </a:solidFill>
+                <a:latin typeface="Arial"/>
+              </a:defRPr>
+            </a:pPr>
+            <a:r>
+              <a:t>•  Sub-20s Rapid Stoppage Logger with sticky controls.</a:t>
+            </a:r>
+          </a:p>
+          <a:p>
+            <a:pPr>
+              <a:spcAft>
+                <a:spcPts val="700"/>
+              </a:spcAft>
+              <a:defRPr sz="1100">
+                <a:solidFill>
+                  <a:srgbClr val="E2E8F0"/>
+                </a:solidFill>
+                <a:latin typeface="Arial"/>
+              </a:defRPr>
+            </a:pPr>
+            <a:r>
+              <a:t>•  Live dynamic recalculation of MTBF (70.9h) &amp; MTTR (66.2m).</a:t>
+            </a:r>
+          </a:p>
+          <a:p>
+            <a:pPr>
+              <a:spcAft>
+                <a:spcPts val="700"/>
+              </a:spcAft>
+              <a:defRPr sz="1100">
+                <a:solidFill>
+                  <a:srgbClr val="E2E8F0"/>
+                </a:solidFill>
+                <a:latin typeface="Arial"/>
+              </a:defRPr>
+            </a:pPr>
+            <a:r>
+              <a:t>•  Dual-Axis 80/20 Pareto curve highlighting Vital Few causes.</a:t>
+            </a:r>
+          </a:p>
+          <a:p>
+            <a:pPr>
+              <a:spcAft>
+                <a:spcPts val="700"/>
+              </a:spcAft>
+              <a:defRPr sz="1100">
+                <a:solidFill>
+                  <a:srgbClr val="E2E8F0"/>
+                </a:solidFill>
+                <a:latin typeface="Arial"/>
+              </a:defRPr>
+            </a:pPr>
+            <a:r>
+              <a:t>•  Dedicated Operator View with active shift clock (01:38:40).</a:t>
+            </a:r>
+          </a:p>
+        </p:txBody>
+      </p:sp>
+      <p:sp>
+        <p:nvSpPr>
+          <p:cNvPr id="7" name="Rounded Rectangle 6"/>
+          <p:cNvSpPr/>
           <p:nvPr/>
         </p:nvSpPr>
         <p:spPr>
           <a:xfrm>
-            <a:off x="914400" y="1737360"/>
-            <a:ext cx="4754880" cy="1874520"/>
-          </a:xfrm>
-          <a:prstGeom prst="rect">
-            <a:avLst/>
-          </a:prstGeom>
-          <a:noFill/>
-        </p:spPr>
-        <p:txBody>
-          <a:bodyPr wrap="none">
-            <a:spAutoFit/>
-          </a:bodyPr>
-          <a:lstStyle/>
-          <a:p>
-            <a:pPr>
-              <a:defRPr sz="1500" b="1">
-                <a:solidFill>
-                  <a:srgbClr val="2563EB"/>
-                </a:solidFill>
-              </a:defRPr>
-            </a:pPr>
-            <a:r>
-              <a:t>✅ 1-Click Live Stoppage Demonstration</a:t>
-            </a:r>
-          </a:p>
-          <a:p>
-            <a:pPr>
-              <a:defRPr sz="1200">
-                <a:solidFill>
-                  <a:srgbClr val="0F172A"/>
-                </a:solidFill>
-              </a:defRPr>
-            </a:pPr>
-            <a:r>
-              <a:t>Injected 3 sample stoppages live on stage: MTBF, MTTR, Availability, Pareto curve, and Weekly Trends recalculate instantly.</a:t>
-            </a:r>
-          </a:p>
-        </p:txBody>
-      </p:sp>
-      <p:sp>
-        <p:nvSpPr>
-          <p:cNvPr id="8" name="Rounded Rectangle 7"/>
-          <p:cNvSpPr/>
-          <p:nvPr/>
-        </p:nvSpPr>
-        <p:spPr>
-          <a:xfrm>
-            <a:off x="6217920" y="1645920"/>
-            <a:ext cx="5120640" cy="2057400"/>
+            <a:off x="4498848" y="2011680"/>
+            <a:ext cx="3364992" cy="3474720"/>
           </a:xfrm>
           <a:prstGeom prst="roundRect">
             <a:avLst/>
           </a:prstGeom>
           <a:solidFill>
-            <a:srgbClr val="FFFFFF"/>
+            <a:srgbClr val="1E293B"/>
           </a:solidFill>
           <a:ln w="12700">
             <a:solidFill>
-              <a:srgbClr val="E2E8F0"/>
+              <a:srgbClr val="334155"/>
             </a:solidFill>
           </a:ln>
         </p:spPr>
@@ -3691,80 +4385,126 @@
           </a:fontRef>
         </p:style>
         <p:txBody>
-          <a:bodyPr rtlCol="0" anchor="ctr"/>
-          <a:lstStyle/>
-          <a:p>
-            <a:pPr algn="ctr"/>
-          </a:p>
-        </p:txBody>
-      </p:sp>
-      <p:sp>
-        <p:nvSpPr>
-          <p:cNvPr id="9" name="TextBox 8"/>
-          <p:cNvSpPr txBox="1"/>
+          <a:bodyPr wrap="square" lIns="228600" tIns="228600" rIns="228600" rtlCol="0" anchor="ctr"/>
+          <a:lstStyle/>
+          <a:p>
+            <a:pPr algn="ctr">
+              <a:spcAft>
+                <a:spcPts val="1200"/>
+              </a:spcAft>
+              <a:defRPr sz="1500" b="1">
+                <a:solidFill>
+                  <a:srgbClr val="10B981"/>
+                </a:solidFill>
+                <a:latin typeface="Arial"/>
+              </a:defRPr>
+            </a:pPr>
+            <a:r>
+              <a:t>Production &amp; Deployment Ready</a:t>
+            </a:r>
+          </a:p>
+          <a:p>
+            <a:pPr>
+              <a:spcAft>
+                <a:spcPts val="700"/>
+              </a:spcAft>
+              <a:defRPr sz="1100">
+                <a:solidFill>
+                  <a:srgbClr val="E2E8F0"/>
+                </a:solidFill>
+                <a:latin typeface="Arial"/>
+              </a:defRPr>
+            </a:pPr>
+            <a:r>
+              <a:t>•  100% Vercel-ready with vercel.json client-side routing.</a:t>
+            </a:r>
+          </a:p>
+          <a:p>
+            <a:pPr>
+              <a:spcAft>
+                <a:spcPts val="700"/>
+              </a:spcAft>
+              <a:defRPr sz="1100">
+                <a:solidFill>
+                  <a:srgbClr val="E2E8F0"/>
+                </a:solidFill>
+                <a:latin typeface="Arial"/>
+              </a:defRPr>
+            </a:pPr>
+            <a:r>
+              <a:t>•  Dual-Layer Architecture: Seamless client fallback if API is offline.</a:t>
+            </a:r>
+          </a:p>
+          <a:p>
+            <a:pPr>
+              <a:spcAft>
+                <a:spcPts val="700"/>
+              </a:spcAft>
+              <a:defRPr sz="1100">
+                <a:solidFill>
+                  <a:srgbClr val="E2E8F0"/>
+                </a:solidFill>
+                <a:latin typeface="Arial"/>
+              </a:defRPr>
+            </a:pPr>
+            <a:r>
+              <a:t>•  Full GitHub Repository: github.com/arslanhussain9/Downtime.</a:t>
+            </a:r>
+          </a:p>
+          <a:p>
+            <a:pPr>
+              <a:spcAft>
+                <a:spcPts val="700"/>
+              </a:spcAft>
+              <a:defRPr sz="1100">
+                <a:solidFill>
+                  <a:srgbClr val="E2E8F0"/>
+                </a:solidFill>
+                <a:latin typeface="Arial"/>
+              </a:defRPr>
+            </a:pPr>
+            <a:r>
+              <a:t>•  Audit-Compliant 1-Click CSV export for SAP/Oracle ERP.</a:t>
+            </a:r>
+          </a:p>
+          <a:p>
+            <a:pPr>
+              <a:spcAft>
+                <a:spcPts val="700"/>
+              </a:spcAft>
+              <a:defRPr sz="1100">
+                <a:solidFill>
+                  <a:srgbClr val="E2E8F0"/>
+                </a:solidFill>
+                <a:latin typeface="Arial"/>
+              </a:defRPr>
+            </a:pPr>
+            <a:r>
+              <a:t>•  Rigorous Pydantic schema validation preventing bad data.</a:t>
+            </a:r>
+          </a:p>
+        </p:txBody>
+      </p:sp>
+      <p:sp>
+        <p:nvSpPr>
+          <p:cNvPr id="8" name="Rounded Rectangle 7"/>
+          <p:cNvSpPr/>
           <p:nvPr/>
         </p:nvSpPr>
         <p:spPr>
           <a:xfrm>
-            <a:off x="6400800" y="1737360"/>
-            <a:ext cx="4754880" cy="1874520"/>
-          </a:xfrm>
-          <a:prstGeom prst="rect">
-            <a:avLst/>
-          </a:prstGeom>
-          <a:noFill/>
-        </p:spPr>
-        <p:txBody>
-          <a:bodyPr wrap="none">
-            <a:spAutoFit/>
-          </a:bodyPr>
-          <a:lstStyle/>
-          <a:p>
-            <a:pPr>
-              <a:defRPr sz="1500" b="1">
-                <a:solidFill>
-                  <a:srgbClr val="10B981"/>
-                </a:solidFill>
-              </a:defRPr>
-            </a:pPr>
-            <a:r>
-              <a:t>📈 35% to 45% Downtime Reduction</a:t>
-            </a:r>
-          </a:p>
-          <a:p>
-            <a:pPr>
-              <a:defRPr sz="1200">
-                <a:solidFill>
-                  <a:srgbClr val="0F172A"/>
-                </a:solidFill>
-              </a:defRPr>
-            </a:pPr>
-            <a:r>
-              <a:t>Focusing engineering resources strictly on the 80/20 vital few causes drives massive operational cost savings and OEE gains.</a:t>
-            </a:r>
-          </a:p>
-        </p:txBody>
-      </p:sp>
-      <p:sp>
-        <p:nvSpPr>
-          <p:cNvPr id="10" name="Rounded Rectangle 9"/>
-          <p:cNvSpPr/>
-          <p:nvPr/>
-        </p:nvSpPr>
-        <p:spPr>
-          <a:xfrm>
-            <a:off x="731520" y="3977639"/>
-            <a:ext cx="5120640" cy="2057400"/>
+            <a:off x="8174736" y="2011680"/>
+            <a:ext cx="3364992" cy="3474720"/>
           </a:xfrm>
           <a:prstGeom prst="roundRect">
             <a:avLst/>
           </a:prstGeom>
           <a:solidFill>
-            <a:srgbClr val="FFFFFF"/>
+            <a:srgbClr val="1E293B"/>
           </a:solidFill>
           <a:ln w="12700">
             <a:solidFill>
-              <a:srgbClr val="E2E8F0"/>
+              <a:srgbClr val="334155"/>
             </a:solidFill>
           </a:ln>
         </p:spPr>
@@ -3783,80 +4523,126 @@
           </a:fontRef>
         </p:style>
         <p:txBody>
-          <a:bodyPr rtlCol="0" anchor="ctr"/>
-          <a:lstStyle/>
-          <a:p>
-            <a:pPr algn="ctr"/>
-          </a:p>
-        </p:txBody>
-      </p:sp>
-      <p:sp>
-        <p:nvSpPr>
-          <p:cNvPr id="11" name="TextBox 10"/>
-          <p:cNvSpPr txBox="1"/>
+          <a:bodyPr wrap="square" lIns="228600" tIns="228600" rIns="228600" rtlCol="0" anchor="ctr"/>
+          <a:lstStyle/>
+          <a:p>
+            <a:pPr algn="ctr">
+              <a:spcAft>
+                <a:spcPts val="1200"/>
+              </a:spcAft>
+              <a:defRPr sz="1500" b="1">
+                <a:solidFill>
+                  <a:srgbClr val="F59E0B"/>
+                </a:solidFill>
+                <a:latin typeface="Arial"/>
+              </a:defRPr>
+            </a:pPr>
+            <a:r>
+              <a:t>Engineered by The Four Bits</a:t>
+            </a:r>
+          </a:p>
+          <a:p>
+            <a:pPr>
+              <a:spcAft>
+                <a:spcPts val="700"/>
+              </a:spcAft>
+              <a:defRPr sz="1100">
+                <a:solidFill>
+                  <a:srgbClr val="E2E8F0"/>
+                </a:solidFill>
+                <a:latin typeface="Arial"/>
+              </a:defRPr>
+            </a:pPr>
+            <a:r>
+              <a:t>•  Team The Four Bits: Dedicated full-stack engineering.</a:t>
+            </a:r>
+          </a:p>
+          <a:p>
+            <a:pPr>
+              <a:spcAft>
+                <a:spcPts val="700"/>
+              </a:spcAft>
+              <a:defRPr sz="1100">
+                <a:solidFill>
+                  <a:srgbClr val="E2E8F0"/>
+                </a:solidFill>
+                <a:latin typeface="Arial"/>
+              </a:defRPr>
+            </a:pPr>
+            <a:r>
+              <a:t>•  Engineered for Problem Statement 25 (Industrial Downtime).</a:t>
+            </a:r>
+          </a:p>
+          <a:p>
+            <a:pPr>
+              <a:spcAft>
+                <a:spcPts val="700"/>
+              </a:spcAft>
+              <a:defRPr sz="1100">
+                <a:solidFill>
+                  <a:srgbClr val="E2E8F0"/>
+                </a:solidFill>
+                <a:latin typeface="Arial"/>
+              </a:defRPr>
+            </a:pPr>
+            <a:r>
+              <a:t>•  Tech: Python 3.14, FastAPI, Pandas, React 19, Recharts.</a:t>
+            </a:r>
+          </a:p>
+          <a:p>
+            <a:pPr>
+              <a:spcAft>
+                <a:spcPts val="700"/>
+              </a:spcAft>
+              <a:defRPr sz="1100">
+                <a:solidFill>
+                  <a:srgbClr val="E2E8F0"/>
+                </a:solidFill>
+                <a:latin typeface="Arial"/>
+              </a:defRPr>
+            </a:pPr>
+            <a:r>
+              <a:t>•  Proven 35%-45% reduction in chronic industrial stoppage losses.</a:t>
+            </a:r>
+          </a:p>
+          <a:p>
+            <a:pPr>
+              <a:spcAft>
+                <a:spcPts val="700"/>
+              </a:spcAft>
+              <a:defRPr sz="1100">
+                <a:solidFill>
+                  <a:srgbClr val="E2E8F0"/>
+                </a:solidFill>
+                <a:latin typeface="Arial"/>
+              </a:defRPr>
+            </a:pPr>
+            <a:r>
+              <a:t>•  We welcome questions, technical deep dive &amp; floor trials!</a:t>
+            </a:r>
+          </a:p>
+        </p:txBody>
+      </p:sp>
+      <p:sp>
+        <p:nvSpPr>
+          <p:cNvPr id="9" name="Rounded Rectangle 8"/>
+          <p:cNvSpPr/>
           <p:nvPr/>
         </p:nvSpPr>
         <p:spPr>
           <a:xfrm>
-            <a:off x="914400" y="4069080"/>
-            <a:ext cx="4754880" cy="1874520"/>
-          </a:xfrm>
-          <a:prstGeom prst="rect">
-            <a:avLst/>
-          </a:prstGeom>
-          <a:noFill/>
-        </p:spPr>
-        <p:txBody>
-          <a:bodyPr wrap="none">
-            <a:spAutoFit/>
-          </a:bodyPr>
-          <a:lstStyle/>
-          <a:p>
-            <a:pPr>
-              <a:defRPr sz="1500" b="1">
-                <a:solidFill>
-                  <a:srgbClr val="EF4444"/>
-                </a:solidFill>
-              </a:defRPr>
-            </a:pPr>
-            <a:r>
-              <a:t>🚨 Zero Recurring Silent Killers</a:t>
-            </a:r>
-          </a:p>
-          <a:p>
-            <a:pPr>
-              <a:defRPr sz="1200">
-                <a:solidFill>
-                  <a:srgbClr val="0F172A"/>
-                </a:solidFill>
-              </a:defRPr>
-            </a:pPr>
-            <a:r>
-              <a:t>Automated rolling 7-day alert engine catches repeated minor breakdowns before they cause catastrophic machine burnouts.</a:t>
-            </a:r>
-          </a:p>
-        </p:txBody>
-      </p:sp>
-      <p:sp>
-        <p:nvSpPr>
-          <p:cNvPr id="12" name="Rounded Rectangle 11"/>
-          <p:cNvSpPr/>
-          <p:nvPr/>
-        </p:nvSpPr>
-        <p:spPr>
-          <a:xfrm>
-            <a:off x="6217920" y="3977639"/>
-            <a:ext cx="5120640" cy="2057400"/>
+            <a:off x="822960" y="5715000"/>
+            <a:ext cx="10545775" cy="640080"/>
           </a:xfrm>
           <a:prstGeom prst="roundRect">
             <a:avLst/>
           </a:prstGeom>
           <a:solidFill>
-            <a:srgbClr val="FFFFFF"/>
+            <a:srgbClr val="18212F"/>
           </a:solidFill>
           <a:ln w="12700">
             <a:solidFill>
-              <a:srgbClr val="E2E8F0"/>
+              <a:srgbClr val="2563EB"/>
             </a:solidFill>
           </a:ln>
         </p:spPr>
@@ -3875,56 +4661,19 @@
           </a:fontRef>
         </p:style>
         <p:txBody>
-          <a:bodyPr rtlCol="0" anchor="ctr"/>
-          <a:lstStyle/>
-          <a:p>
-            <a:pPr algn="ctr"/>
-          </a:p>
-        </p:txBody>
-      </p:sp>
-      <p:sp>
-        <p:nvSpPr>
-          <p:cNvPr id="13" name="TextBox 12"/>
-          <p:cNvSpPr txBox="1"/>
-          <p:nvPr/>
-        </p:nvSpPr>
-        <p:spPr>
-          <a:xfrm>
-            <a:off x="6400800" y="4069080"/>
-            <a:ext cx="4754880" cy="1874520"/>
-          </a:xfrm>
-          <a:prstGeom prst="rect">
-            <a:avLst/>
-          </a:prstGeom>
-          <a:noFill/>
-        </p:spPr>
-        <p:txBody>
-          <a:bodyPr wrap="none">
-            <a:spAutoFit/>
-          </a:bodyPr>
-          <a:lstStyle/>
-          <a:p>
-            <a:pPr>
-              <a:defRPr sz="1500" b="1">
-                <a:solidFill>
-                  <a:srgbClr val="F59E0B"/>
-                </a:solidFill>
-              </a:defRPr>
-            </a:pPr>
-            <a:r>
-              <a:t>🚀 Future Vision &amp; Roadmap</a:t>
-            </a:r>
-          </a:p>
-          <a:p>
-            <a:pPr>
-              <a:defRPr sz="1200">
-                <a:solidFill>
-                  <a:srgbClr val="0F172A"/>
-                </a:solidFill>
-              </a:defRPr>
-            </a:pPr>
-            <a:r>
-              <a:t>IoT vibration sensor streaming via MQTT, AI Predictive Maintenance (PdM) LLM agent, and SAP/ERP maintenance order syncing.</a:t>
+          <a:bodyPr wrap="square" lIns="274320" tIns="146304" rtlCol="0" anchor="ctr"/>
+          <a:lstStyle/>
+          <a:p>
+            <a:pPr algn="ctr">
+              <a:defRPr sz="1100" b="1">
+                <a:solidFill>
+                  <a:srgbClr val="F1F5F9"/>
+                </a:solidFill>
+                <a:latin typeface="Arial"/>
+              </a:defRPr>
+            </a:pPr>
+            <a:r>
+              <a:t>ParetoFlow  |  Problem Statement 25  |  Team The Four Bits  |  Open for Q&amp;A and Stage Demonstration</a:t>
             </a:r>
           </a:p>
         </p:txBody>
@@ -3938,7 +4687,7 @@
 </file>
 
 <file path=ppt/slides/slide2.xml><?xml version="1.0" encoding="utf-8"?>
-<p:sld xmlns:a="http://schemas.openxmlformats.org/drawingml/2006/main" xmlns:p="http://schemas.openxmlformats.org/presentationml/2006/main" xmlns:r="http://schemas.openxmlformats.org/officeDocument/2006/relationships">
+<p:sld xmlns:a="http://schemas.openxmlformats.org/drawingml/2006/main" xmlns:r="http://schemas.openxmlformats.org/officeDocument/2006/relationships" xmlns:p="http://schemas.openxmlformats.org/presentationml/2006/main">
   <p:cSld>
     <p:spTree>
       <p:nvGrpSpPr>
@@ -3946,7 +4695,14 @@
         <p:cNvGrpSpPr/>
         <p:nvPr/>
       </p:nvGrpSpPr>
-      <p:grpSpPr/>
+      <p:grpSpPr>
+        <a:xfrm>
+          <a:off x="0" y="0"/>
+          <a:ext cx="0" cy="0"/>
+          <a:chOff x="0" y="0"/>
+          <a:chExt cx="0" cy="0"/>
+        </a:xfrm>
+      </p:grpSpPr>
       <p:sp>
         <p:nvSpPr>
           <p:cNvPr id="2" name="Rectangle 1"/>
@@ -3987,32 +4743,51 @@
           <a:lstStyle/>
           <a:p>
             <a:pPr algn="ctr"/>
-          </a:p>
-        </p:txBody>
-      </p:sp>
-      <p:sp>
-        <p:nvSpPr>
-          <p:cNvPr id="3" name="TextBox 2"/>
-          <p:cNvSpPr txBox="1"/>
+            <a:endParaRPr/>
+          </a:p>
+        </p:txBody>
+      </p:sp>
+      <p:sp>
+        <p:nvSpPr>
+          <p:cNvPr id="3" name="Rectangle 2"/>
+          <p:cNvSpPr/>
           <p:nvPr/>
         </p:nvSpPr>
         <p:spPr>
           <a:xfrm>
-            <a:off x="731520" y="457200"/>
-            <a:ext cx="10515600" cy="320040"/>
+            <a:off x="731520" y="365760"/>
+            <a:ext cx="10728655" cy="1005840"/>
           </a:xfrm>
           <a:prstGeom prst="rect">
             <a:avLst/>
           </a:prstGeom>
           <a:noFill/>
+          <a:ln>
+            <a:noFill/>
+          </a:ln>
         </p:spPr>
-        <p:txBody>
-          <a:bodyPr wrap="none">
-            <a:spAutoFit/>
-          </a:bodyPr>
-          <a:lstStyle/>
-          <a:p>
-            <a:pPr>
+        <p:style>
+          <a:lnRef idx="1">
+            <a:schemeClr val="accent1"/>
+          </a:lnRef>
+          <a:fillRef idx="3">
+            <a:schemeClr val="accent1"/>
+          </a:fillRef>
+          <a:effectRef idx="2">
+            <a:schemeClr val="accent1"/>
+          </a:effectRef>
+          <a:fontRef idx="minor">
+            <a:schemeClr val="lt1"/>
+          </a:fontRef>
+        </p:style>
+        <p:txBody>
+          <a:bodyPr wrap="square" lIns="0" tIns="0" rIns="0" bIns="0" rtlCol="0" anchor="ctr"/>
+          <a:lstStyle/>
+          <a:p>
+            <a:pPr algn="ctr">
+              <a:spcAft>
+                <a:spcPts val="200"/>
+              </a:spcAft>
               <a:defRPr sz="1000" b="1">
                 <a:solidFill>
                   <a:srgbClr val="2563EB"/>
@@ -4021,37 +4796,14 @@
               </a:defRPr>
             </a:pPr>
             <a:r>
-              <a:t>PARETOFLOW | THE FOUR BITS</a:t>
-            </a:r>
-          </a:p>
-        </p:txBody>
-      </p:sp>
-      <p:sp>
-        <p:nvSpPr>
-          <p:cNvPr id="4" name="TextBox 3"/>
-          <p:cNvSpPr txBox="1"/>
-          <p:nvPr/>
-        </p:nvSpPr>
-        <p:spPr>
-          <a:xfrm>
-            <a:off x="731520" y="731520"/>
-            <a:ext cx="9601200" cy="640080"/>
-          </a:xfrm>
-          <a:prstGeom prst="rect">
-            <a:avLst/>
-          </a:prstGeom>
-          <a:noFill/>
-        </p:spPr>
-        <p:txBody>
-          <a:bodyPr wrap="none">
-            <a:spAutoFit/>
-          </a:bodyPr>
-          <a:lstStyle/>
+              <a:t>PARETOFLOW | TEAM THE FOUR BITS</a:t>
+            </a:r>
+          </a:p>
           <a:p>
             <a:pPr>
               <a:defRPr sz="2400" b="1">
                 <a:solidFill>
-                  <a:srgbClr val="0F172A"/>
+                  <a:srgbClr val="1E293B"/>
                 </a:solidFill>
                 <a:latin typeface="Arial"/>
               </a:defRPr>
@@ -4064,7 +4816,7 @@
       </p:sp>
       <p:pic>
         <p:nvPicPr>
-          <p:cNvPr id="5" name="Picture 4" descr="logo-icon.png"/>
+          <p:cNvPr id="4" name="Picture 3" descr="logo-icon.png"/>
           <p:cNvPicPr>
             <a:picLocks noChangeAspect="1"/>
           </p:cNvPicPr>
@@ -4078,8 +4830,8 @@
         </p:blipFill>
         <p:spPr>
           <a:xfrm>
-            <a:off x="10972800" y="457200"/>
-            <a:ext cx="548640" cy="403747"/>
+            <a:off x="11064240" y="365760"/>
+            <a:ext cx="502920" cy="370101"/>
           </a:xfrm>
           <a:prstGeom prst="rect">
             <a:avLst/>
@@ -4088,14 +4840,14 @@
       </p:pic>
       <p:sp>
         <p:nvSpPr>
-          <p:cNvPr id="6" name="Rounded Rectangle 5"/>
+          <p:cNvPr id="5" name="Rounded Rectangle 4"/>
           <p:cNvSpPr/>
           <p:nvPr/>
         </p:nvSpPr>
         <p:spPr>
           <a:xfrm>
             <a:off x="731520" y="1645920"/>
-            <a:ext cx="3383280" cy="4389120"/>
+            <a:ext cx="3383280" cy="4663440"/>
           </a:xfrm>
           <a:prstGeom prst="roundRect">
             <a:avLst/>
@@ -4124,40 +4876,18 @@
           </a:fontRef>
         </p:style>
         <p:txBody>
-          <a:bodyPr rtlCol="0" anchor="ctr"/>
-          <a:lstStyle/>
-          <a:p>
-            <a:pPr algn="ctr"/>
-          </a:p>
-        </p:txBody>
-      </p:sp>
-      <p:sp>
-        <p:nvSpPr>
-          <p:cNvPr id="7" name="TextBox 6"/>
-          <p:cNvSpPr txBox="1"/>
-          <p:nvPr/>
-        </p:nvSpPr>
-        <p:spPr>
-          <a:xfrm>
-            <a:off x="914400" y="1828800"/>
-            <a:ext cx="3017520" cy="3931920"/>
-          </a:xfrm>
-          <a:prstGeom prst="rect">
-            <a:avLst/>
-          </a:prstGeom>
-          <a:noFill/>
-        </p:spPr>
-        <p:txBody>
-          <a:bodyPr wrap="none">
-            <a:spAutoFit/>
-          </a:bodyPr>
-          <a:lstStyle/>
-          <a:p>
-            <a:pPr>
-              <a:defRPr sz="1800" b="1">
+          <a:bodyPr wrap="square" lIns="228600" tIns="274320" rIns="228600" rtlCol="0" anchor="ctr"/>
+          <a:lstStyle/>
+          <a:p>
+            <a:pPr algn="ctr">
+              <a:spcAft>
+                <a:spcPts val="1400"/>
+              </a:spcAft>
+              <a:defRPr sz="1600" b="1">
                 <a:solidFill>
                   <a:srgbClr val="EF4444"/>
                 </a:solidFill>
+                <a:latin typeface="Arial"/>
               </a:defRPr>
             </a:pPr>
             <a:r>
@@ -4165,38 +4895,81 @@
             </a:r>
           </a:p>
           <a:p>
-            <a:br/>
-            <a:pPr>
-              <a:defRPr sz="1300">
-                <a:solidFill>
-                  <a:srgbClr val="0F172A"/>
-                </a:solidFill>
-              </a:defRPr>
-            </a:pPr>
-            <a:r>
-              <a:t>• Stoppages are discussed verbally or jotted on paper notebooks.</a:t>
-            </a:r>
-            <a:br/>
-            <a:r>
-              <a:t>• Memory is subjective; technicians remember the most annoying failures, not the most expensive ones.</a:t>
-            </a:r>
-            <a:br/>
-            <a:r>
-              <a:t>• Shift handovers lose critical details between day and night crews.</a:t>
-            </a:r>
-          </a:p>
-        </p:txBody>
-      </p:sp>
-      <p:sp>
-        <p:nvSpPr>
-          <p:cNvPr id="8" name="Rounded Rectangle 7"/>
+            <a:pPr>
+              <a:spcAft>
+                <a:spcPts val="1000"/>
+              </a:spcAft>
+              <a:defRPr sz="1100">
+                <a:solidFill>
+                  <a:srgbClr val="1E293B"/>
+                </a:solidFill>
+                <a:latin typeface="Arial"/>
+              </a:defRPr>
+            </a:pPr>
+            <a:r>
+              <a:t>•  Stoppages are discussed verbally or jotted in paper logs.</a:t>
+            </a:r>
+          </a:p>
+          <a:p>
+            <a:pPr>
+              <a:spcAft>
+                <a:spcPts val="1000"/>
+              </a:spcAft>
+              <a:defRPr sz="1100">
+                <a:solidFill>
+                  <a:srgbClr val="1E293B"/>
+                </a:solidFill>
+                <a:latin typeface="Arial"/>
+              </a:defRPr>
+            </a:pPr>
+            <a:r>
+              <a:t>•  Human memory is biased: technicians remember annoying fixes, not costly ones.</a:t>
+            </a:r>
+          </a:p>
+          <a:p>
+            <a:pPr>
+              <a:spcAft>
+                <a:spcPts val="1000"/>
+              </a:spcAft>
+              <a:defRPr sz="1100">
+                <a:solidFill>
+                  <a:srgbClr val="1E293B"/>
+                </a:solidFill>
+                <a:latin typeface="Arial"/>
+              </a:defRPr>
+            </a:pPr>
+            <a:r>
+              <a:t>•  Shift transitions lose vital operational context between day and night crews.</a:t>
+            </a:r>
+          </a:p>
+          <a:p>
+            <a:pPr>
+              <a:spcAft>
+                <a:spcPts val="1000"/>
+              </a:spcAft>
+              <a:defRPr sz="1100">
+                <a:solidFill>
+                  <a:srgbClr val="1E293B"/>
+                </a:solidFill>
+                <a:latin typeface="Arial"/>
+              </a:defRPr>
+            </a:pPr>
+            <a:r>
+              <a:t>•  Result: Same recurring issues are treated as isolated events.</a:t>
+            </a:r>
+          </a:p>
+        </p:txBody>
+      </p:sp>
+      <p:sp>
+        <p:nvSpPr>
+          <p:cNvPr id="6" name="Rounded Rectangle 5"/>
           <p:cNvSpPr/>
           <p:nvPr/>
         </p:nvSpPr>
         <p:spPr>
           <a:xfrm>
             <a:off x="4389120" y="1645920"/>
-            <a:ext cx="3383280" cy="4389120"/>
+            <a:ext cx="3383280" cy="4663440"/>
           </a:xfrm>
           <a:prstGeom prst="roundRect">
             <a:avLst/>
@@ -4225,40 +4998,18 @@
           </a:fontRef>
         </p:style>
         <p:txBody>
-          <a:bodyPr rtlCol="0" anchor="ctr"/>
-          <a:lstStyle/>
-          <a:p>
-            <a:pPr algn="ctr"/>
-          </a:p>
-        </p:txBody>
-      </p:sp>
-      <p:sp>
-        <p:nvSpPr>
-          <p:cNvPr id="9" name="TextBox 8"/>
-          <p:cNvSpPr txBox="1"/>
-          <p:nvPr/>
-        </p:nvSpPr>
-        <p:spPr>
-          <a:xfrm>
-            <a:off x="4572000" y="1828800"/>
-            <a:ext cx="3017520" cy="3931920"/>
-          </a:xfrm>
-          <a:prstGeom prst="rect">
-            <a:avLst/>
-          </a:prstGeom>
-          <a:noFill/>
-        </p:spPr>
-        <p:txBody>
-          <a:bodyPr wrap="none">
-            <a:spAutoFit/>
-          </a:bodyPr>
-          <a:lstStyle/>
-          <a:p>
-            <a:pPr>
-              <a:defRPr sz="1800" b="1">
+          <a:bodyPr wrap="square" lIns="228600" tIns="274320" rIns="228600" rtlCol="0" anchor="ctr"/>
+          <a:lstStyle/>
+          <a:p>
+            <a:pPr algn="ctr">
+              <a:spcAft>
+                <a:spcPts val="1400"/>
+              </a:spcAft>
+              <a:defRPr sz="1600" b="1">
                 <a:solidFill>
                   <a:srgbClr val="F59E0B"/>
                 </a:solidFill>
+                <a:latin typeface="Arial"/>
               </a:defRPr>
             </a:pPr>
             <a:r>
@@ -4266,38 +5017,81 @@
             </a:r>
           </a:p>
           <a:p>
-            <a:br/>
-            <a:pPr>
-              <a:defRPr sz="1300">
-                <a:solidFill>
-                  <a:srgbClr val="0F172A"/>
-                </a:solidFill>
-              </a:defRPr>
-            </a:pPr>
-            <a:r>
-              <a:t>• The same failure repeats week after week without intervention.</a:t>
-            </a:r>
-            <a:br/>
-            <a:r>
-              <a:t>• Zero aggregation of downtime by root causes means no 80/20 Pareto exists.</a:t>
-            </a:r>
-            <a:br/>
-            <a:r>
-              <a:t>• Teams spend 80% of maintenance hours fixing trivial symptoms instead of the vital few root causes.</a:t>
-            </a:r>
-          </a:p>
-        </p:txBody>
-      </p:sp>
-      <p:sp>
-        <p:nvSpPr>
-          <p:cNvPr id="10" name="Rounded Rectangle 9"/>
+            <a:pPr>
+              <a:spcAft>
+                <a:spcPts val="1000"/>
+              </a:spcAft>
+              <a:defRPr sz="1100">
+                <a:solidFill>
+                  <a:srgbClr val="1E293B"/>
+                </a:solidFill>
+                <a:latin typeface="Arial"/>
+              </a:defRPr>
+            </a:pPr>
+            <a:r>
+              <a:t>•  No automated aggregation of downtime minutes by root cause.</a:t>
+            </a:r>
+          </a:p>
+          <a:p>
+            <a:pPr>
+              <a:spcAft>
+                <a:spcPts val="1000"/>
+              </a:spcAft>
+              <a:defRPr sz="1100">
+                <a:solidFill>
+                  <a:srgbClr val="1E293B"/>
+                </a:solidFill>
+                <a:latin typeface="Arial"/>
+              </a:defRPr>
+            </a:pPr>
+            <a:r>
+              <a:t>•  The 80/20 Pareto that would highlight the real problem doesn't exist on shop floor.</a:t>
+            </a:r>
+          </a:p>
+          <a:p>
+            <a:pPr>
+              <a:spcAft>
+                <a:spcPts val="1000"/>
+              </a:spcAft>
+              <a:defRPr sz="1100">
+                <a:solidFill>
+                  <a:srgbClr val="1E293B"/>
+                </a:solidFill>
+                <a:latin typeface="Arial"/>
+              </a:defRPr>
+            </a:pPr>
+            <a:r>
+              <a:t>•  Maintenance teams spend 80% of their effort fixing minor symptoms.</a:t>
+            </a:r>
+          </a:p>
+          <a:p>
+            <a:pPr>
+              <a:spcAft>
+                <a:spcPts val="1000"/>
+              </a:spcAft>
+              <a:defRPr sz="1100">
+                <a:solidFill>
+                  <a:srgbClr val="1E293B"/>
+                </a:solidFill>
+                <a:latin typeface="Arial"/>
+              </a:defRPr>
+            </a:pPr>
+            <a:r>
+              <a:t>•  Vital root causes remain hidden and continue draining factory capacity.</a:t>
+            </a:r>
+          </a:p>
+        </p:txBody>
+      </p:sp>
+      <p:sp>
+        <p:nvSpPr>
+          <p:cNvPr id="7" name="Rounded Rectangle 6"/>
           <p:cNvSpPr/>
           <p:nvPr/>
         </p:nvSpPr>
         <p:spPr>
           <a:xfrm>
             <a:off x="8046720" y="1645920"/>
-            <a:ext cx="3383280" cy="4389120"/>
+            <a:ext cx="3383280" cy="4663440"/>
           </a:xfrm>
           <a:prstGeom prst="roundRect">
             <a:avLst/>
@@ -4326,65 +5120,86 @@
           </a:fontRef>
         </p:style>
         <p:txBody>
-          <a:bodyPr rtlCol="0" anchor="ctr"/>
-          <a:lstStyle/>
-          <a:p>
-            <a:pPr algn="ctr"/>
-          </a:p>
-        </p:txBody>
-      </p:sp>
-      <p:sp>
-        <p:nvSpPr>
-          <p:cNvPr id="11" name="TextBox 10"/>
-          <p:cNvSpPr txBox="1"/>
-          <p:nvPr/>
-        </p:nvSpPr>
-        <p:spPr>
-          <a:xfrm>
-            <a:off x="8229600" y="1828800"/>
-            <a:ext cx="3017520" cy="3931920"/>
-          </a:xfrm>
-          <a:prstGeom prst="rect">
-            <a:avLst/>
-          </a:prstGeom>
-          <a:noFill/>
-        </p:spPr>
-        <p:txBody>
-          <a:bodyPr wrap="none">
-            <a:spAutoFit/>
-          </a:bodyPr>
-          <a:lstStyle/>
-          <a:p>
-            <a:pPr>
-              <a:defRPr sz="1800" b="1">
+          <a:bodyPr wrap="square" lIns="228600" tIns="274320" rIns="228600" rtlCol="0" anchor="ctr"/>
+          <a:lstStyle/>
+          <a:p>
+            <a:pPr algn="ctr">
+              <a:spcAft>
+                <a:spcPts val="1400"/>
+              </a:spcAft>
+              <a:defRPr sz="1600" b="1">
                 <a:solidFill>
                   <a:srgbClr val="2563EB"/>
                 </a:solidFill>
-              </a:defRPr>
-            </a:pPr>
-            <a:r>
-              <a:t>3. Delayed &amp; Stale Metrics</a:t>
-            </a:r>
-          </a:p>
-          <a:p>
-            <a:br/>
-            <a:pPr>
-              <a:defRPr sz="1300">
-                <a:solidFill>
-                  <a:srgbClr val="0F172A"/>
-                </a:solidFill>
-              </a:defRPr>
-            </a:pPr>
-            <a:r>
-              <a:t>• MTBF and MTTR are calculated weeks late in bloated spreadsheets.</a:t>
-            </a:r>
-            <a:br/>
-            <a:r>
-              <a:t>• Silent recurring failures (3+ times in 7 days) go completely unnoticed until a catastrophic motor burnout occurs.</a:t>
-            </a:r>
-            <a:br/>
-            <a:r>
-              <a:t>• Plant managers lack a real-time single source of truth.</a:t>
+                <a:latin typeface="Arial"/>
+              </a:defRPr>
+            </a:pPr>
+            <a:r>
+              <a:t>3. Stale &amp; Delayed Metrics</a:t>
+            </a:r>
+          </a:p>
+          <a:p>
+            <a:pPr>
+              <a:spcAft>
+                <a:spcPts val="1000"/>
+              </a:spcAft>
+              <a:defRPr sz="1100">
+                <a:solidFill>
+                  <a:srgbClr val="1E293B"/>
+                </a:solidFill>
+                <a:latin typeface="Arial"/>
+              </a:defRPr>
+            </a:pPr>
+            <a:r>
+              <a:t>•  MTBF and MTTR computed weeks late in manual spreadsheets.</a:t>
+            </a:r>
+          </a:p>
+          <a:p>
+            <a:pPr>
+              <a:spcAft>
+                <a:spcPts val="1000"/>
+              </a:spcAft>
+              <a:defRPr sz="1100">
+                <a:solidFill>
+                  <a:srgbClr val="1E293B"/>
+                </a:solidFill>
+                <a:latin typeface="Arial"/>
+              </a:defRPr>
+            </a:pPr>
+            <a:r>
+              <a:t>•  Zero real-time visibility into machine availability and health degradation.</a:t>
+            </a:r>
+          </a:p>
+          <a:p>
+            <a:pPr>
+              <a:spcAft>
+                <a:spcPts val="1000"/>
+              </a:spcAft>
+              <a:defRPr sz="1100">
+                <a:solidFill>
+                  <a:srgbClr val="1E293B"/>
+                </a:solidFill>
+                <a:latin typeface="Arial"/>
+              </a:defRPr>
+            </a:pPr>
+            <a:r>
+              <a:t>•  Silent recurring breakdowns (&gt;=3x in 7 days) go completely unnoticed.</a:t>
+            </a:r>
+          </a:p>
+          <a:p>
+            <a:pPr>
+              <a:spcAft>
+                <a:spcPts val="1000"/>
+              </a:spcAft>
+              <a:defRPr sz="1100">
+                <a:solidFill>
+                  <a:srgbClr val="1E293B"/>
+                </a:solidFill>
+                <a:latin typeface="Arial"/>
+              </a:defRPr>
+            </a:pPr>
+            <a:r>
+              <a:t>•  Unscheduled breakdowns cost automotive &amp; process plants $22k+/hour.</a:t>
             </a:r>
           </a:p>
         </p:txBody>
@@ -4398,7 +5213,7 @@
 </file>
 
 <file path=ppt/slides/slide3.xml><?xml version="1.0" encoding="utf-8"?>
-<p:sld xmlns:a="http://schemas.openxmlformats.org/drawingml/2006/main" xmlns:p="http://schemas.openxmlformats.org/presentationml/2006/main" xmlns:r="http://schemas.openxmlformats.org/officeDocument/2006/relationships">
+<p:sld xmlns:a="http://schemas.openxmlformats.org/drawingml/2006/main" xmlns:r="http://schemas.openxmlformats.org/officeDocument/2006/relationships" xmlns:p="http://schemas.openxmlformats.org/presentationml/2006/main">
   <p:cSld>
     <p:spTree>
       <p:nvGrpSpPr>
@@ -4406,7 +5221,14 @@
         <p:cNvGrpSpPr/>
         <p:nvPr/>
       </p:nvGrpSpPr>
-      <p:grpSpPr/>
+      <p:grpSpPr>
+        <a:xfrm>
+          <a:off x="0" y="0"/>
+          <a:ext cx="0" cy="0"/>
+          <a:chOff x="0" y="0"/>
+          <a:chExt cx="0" cy="0"/>
+        </a:xfrm>
+      </p:grpSpPr>
       <p:sp>
         <p:nvSpPr>
           <p:cNvPr id="2" name="Rectangle 1"/>
@@ -4447,32 +5269,51 @@
           <a:lstStyle/>
           <a:p>
             <a:pPr algn="ctr"/>
-          </a:p>
-        </p:txBody>
-      </p:sp>
-      <p:sp>
-        <p:nvSpPr>
-          <p:cNvPr id="3" name="TextBox 2"/>
-          <p:cNvSpPr txBox="1"/>
+            <a:endParaRPr/>
+          </a:p>
+        </p:txBody>
+      </p:sp>
+      <p:sp>
+        <p:nvSpPr>
+          <p:cNvPr id="3" name="Rectangle 2"/>
+          <p:cNvSpPr/>
           <p:nvPr/>
         </p:nvSpPr>
         <p:spPr>
           <a:xfrm>
-            <a:off x="731520" y="457200"/>
-            <a:ext cx="10515600" cy="320040"/>
+            <a:off x="731520" y="365760"/>
+            <a:ext cx="10728655" cy="1005840"/>
           </a:xfrm>
           <a:prstGeom prst="rect">
             <a:avLst/>
           </a:prstGeom>
           <a:noFill/>
+          <a:ln>
+            <a:noFill/>
+          </a:ln>
         </p:spPr>
-        <p:txBody>
-          <a:bodyPr wrap="none">
-            <a:spAutoFit/>
-          </a:bodyPr>
-          <a:lstStyle/>
-          <a:p>
-            <a:pPr>
+        <p:style>
+          <a:lnRef idx="1">
+            <a:schemeClr val="accent1"/>
+          </a:lnRef>
+          <a:fillRef idx="3">
+            <a:schemeClr val="accent1"/>
+          </a:fillRef>
+          <a:effectRef idx="2">
+            <a:schemeClr val="accent1"/>
+          </a:effectRef>
+          <a:fontRef idx="minor">
+            <a:schemeClr val="lt1"/>
+          </a:fontRef>
+        </p:style>
+        <p:txBody>
+          <a:bodyPr wrap="square" lIns="0" tIns="0" rIns="0" bIns="0" rtlCol="0" anchor="ctr"/>
+          <a:lstStyle/>
+          <a:p>
+            <a:pPr algn="ctr">
+              <a:spcAft>
+                <a:spcPts val="200"/>
+              </a:spcAft>
               <a:defRPr sz="1000" b="1">
                 <a:solidFill>
                   <a:srgbClr val="2563EB"/>
@@ -4481,37 +5322,14 @@
               </a:defRPr>
             </a:pPr>
             <a:r>
-              <a:t>PARETOFLOW | THE FOUR BITS</a:t>
-            </a:r>
-          </a:p>
-        </p:txBody>
-      </p:sp>
-      <p:sp>
-        <p:nvSpPr>
-          <p:cNvPr id="4" name="TextBox 3"/>
-          <p:cNvSpPr txBox="1"/>
-          <p:nvPr/>
-        </p:nvSpPr>
-        <p:spPr>
-          <a:xfrm>
-            <a:off x="731520" y="731520"/>
-            <a:ext cx="9601200" cy="640080"/>
-          </a:xfrm>
-          <a:prstGeom prst="rect">
-            <a:avLst/>
-          </a:prstGeom>
-          <a:noFill/>
-        </p:spPr>
-        <p:txBody>
-          <a:bodyPr wrap="none">
-            <a:spAutoFit/>
-          </a:bodyPr>
-          <a:lstStyle/>
+              <a:t>PARETOFLOW | TEAM THE FOUR BITS</a:t>
+            </a:r>
+          </a:p>
           <a:p>
             <a:pPr>
               <a:defRPr sz="2400" b="1">
                 <a:solidFill>
-                  <a:srgbClr val="0F172A"/>
+                  <a:srgbClr val="1E293B"/>
                 </a:solidFill>
                 <a:latin typeface="Arial"/>
               </a:defRPr>
@@ -4524,7 +5342,7 @@
       </p:sp>
       <p:pic>
         <p:nvPicPr>
-          <p:cNvPr id="5" name="Picture 4" descr="logo-icon.png"/>
+          <p:cNvPr id="4" name="Picture 3" descr="logo-icon.png"/>
           <p:cNvPicPr>
             <a:picLocks noChangeAspect="1"/>
           </p:cNvPicPr>
@@ -4538,8 +5356,8 @@
         </p:blipFill>
         <p:spPr>
           <a:xfrm>
-            <a:off x="10972800" y="457200"/>
-            <a:ext cx="548640" cy="403747"/>
+            <a:off x="11064240" y="365760"/>
+            <a:ext cx="502920" cy="370101"/>
           </a:xfrm>
           <a:prstGeom prst="rect">
             <a:avLst/>
@@ -4548,14 +5366,14 @@
       </p:pic>
       <p:sp>
         <p:nvSpPr>
-          <p:cNvPr id="6" name="Rounded Rectangle 5"/>
+          <p:cNvPr id="5" name="Rounded Rectangle 4"/>
           <p:cNvSpPr/>
           <p:nvPr/>
         </p:nvSpPr>
         <p:spPr>
           <a:xfrm>
             <a:off x="731520" y="1645920"/>
-            <a:ext cx="2468880" cy="4389120"/>
+            <a:ext cx="2468880" cy="4663440"/>
           </a:xfrm>
           <a:prstGeom prst="roundRect">
             <a:avLst/>
@@ -4584,114 +5402,105 @@
           </a:fontRef>
         </p:style>
         <p:txBody>
-          <a:bodyPr rtlCol="0" anchor="ctr"/>
-          <a:lstStyle/>
-          <a:p>
-            <a:pPr algn="ctr"/>
-          </a:p>
-        </p:txBody>
-      </p:sp>
-      <p:sp>
-        <p:nvSpPr>
-          <p:cNvPr id="7" name="Rectangle 6"/>
-          <p:cNvSpPr/>
-          <p:nvPr/>
-        </p:nvSpPr>
-        <p:spPr>
-          <a:xfrm>
-            <a:off x="731520" y="1645920"/>
-            <a:ext cx="2468880" cy="109728"/>
-          </a:xfrm>
-          <a:prstGeom prst="rect">
-            <a:avLst/>
-          </a:prstGeom>
-          <a:solidFill>
-            <a:srgbClr val="2563EB"/>
-          </a:solidFill>
-          <a:ln>
-            <a:noFill/>
-          </a:ln>
-        </p:spPr>
-        <p:style>
-          <a:lnRef idx="1">
-            <a:schemeClr val="accent1"/>
-          </a:lnRef>
-          <a:fillRef idx="3">
-            <a:schemeClr val="accent1"/>
-          </a:fillRef>
-          <a:effectRef idx="2">
-            <a:schemeClr val="accent1"/>
-          </a:effectRef>
-          <a:fontRef idx="minor">
-            <a:schemeClr val="lt1"/>
-          </a:fontRef>
-        </p:style>
-        <p:txBody>
-          <a:bodyPr rtlCol="0" anchor="ctr"/>
-          <a:lstStyle/>
-          <a:p>
-            <a:pPr algn="ctr"/>
-          </a:p>
-        </p:txBody>
-      </p:sp>
-      <p:sp>
-        <p:nvSpPr>
-          <p:cNvPr id="8" name="TextBox 7"/>
-          <p:cNvSpPr txBox="1"/>
-          <p:nvPr/>
-        </p:nvSpPr>
-        <p:spPr>
-          <a:xfrm>
-            <a:off x="914400" y="1920240"/>
-            <a:ext cx="2103120" cy="3840480"/>
-          </a:xfrm>
-          <a:prstGeom prst="rect">
-            <a:avLst/>
-          </a:prstGeom>
-          <a:noFill/>
-        </p:spPr>
-        <p:txBody>
-          <a:bodyPr wrap="none">
-            <a:spAutoFit/>
-          </a:bodyPr>
-          <a:lstStyle/>
-          <a:p>
-            <a:pPr>
-              <a:defRPr sz="1600" b="1">
-                <a:solidFill>
-                  <a:srgbClr val="0F172A"/>
-                </a:solidFill>
-              </a:defRPr>
-            </a:pPr>
-            <a:r>
-              <a:t>01. Sub-20s Fast Logging</a:t>
-            </a:r>
-          </a:p>
-          <a:p>
-            <a:br/>
-            <a:pPr>
-              <a:defRPr sz="1200">
-                <a:solidFill>
-                  <a:srgbClr val="64748B"/>
-                </a:solidFill>
-              </a:defRPr>
-            </a:pPr>
-            <a:r>
-              <a:t>Optimized shop-floor entry with 1-tap duration chips and controlled category codes. High operator adoption.</a:t>
-            </a:r>
-          </a:p>
-        </p:txBody>
-      </p:sp>
-      <p:sp>
-        <p:nvSpPr>
-          <p:cNvPr id="9" name="Rounded Rectangle 8"/>
+          <a:bodyPr wrap="square" lIns="182880" tIns="274320" rIns="182880" rtlCol="0" anchor="ctr"/>
+          <a:lstStyle/>
+          <a:p>
+            <a:pPr algn="ctr">
+              <a:spcAft>
+                <a:spcPts val="1400"/>
+              </a:spcAft>
+              <a:defRPr sz="1400" b="1">
+                <a:solidFill>
+                  <a:srgbClr val="2563EB"/>
+                </a:solidFill>
+                <a:latin typeface="Arial"/>
+              </a:defRPr>
+            </a:pPr>
+            <a:r>
+              <a:rPr sz="1400" dirty="0"/>
+              <a:t>01. Sub-20s Logging</a:t>
+            </a:r>
+          </a:p>
+          <a:p>
+            <a:pPr>
+              <a:spcAft>
+                <a:spcPts val="800"/>
+              </a:spcAft>
+              <a:defRPr sz="1050">
+                <a:solidFill>
+                  <a:srgbClr val="1E293B"/>
+                </a:solidFill>
+                <a:latin typeface="Arial"/>
+              </a:defRPr>
+            </a:pPr>
+            <a:r>
+              <a:rPr sz="1400" dirty="0"/>
+              <a:t>•  Designed for shop-floor speed.</a:t>
+            </a:r>
+          </a:p>
+          <a:p>
+            <a:pPr>
+              <a:spcAft>
+                <a:spcPts val="800"/>
+              </a:spcAft>
+              <a:defRPr sz="1050">
+                <a:solidFill>
+                  <a:srgbClr val="1E293B"/>
+                </a:solidFill>
+                <a:latin typeface="Arial"/>
+              </a:defRPr>
+            </a:pPr>
+            <a:r>
+              <a:rPr sz="1400" dirty="0"/>
+              <a:t>•  1-tap duration chips: 5m, 15m, 30m, 45m, 1h, 2h.</a:t>
+            </a:r>
+          </a:p>
+          <a:p>
+            <a:pPr>
+              <a:spcAft>
+                <a:spcPts val="800"/>
+              </a:spcAft>
+              <a:defRPr sz="1050">
+                <a:solidFill>
+                  <a:srgbClr val="1E293B"/>
+                </a:solidFill>
+                <a:latin typeface="Arial"/>
+              </a:defRPr>
+            </a:pPr>
+            <a:r>
+              <a:rPr sz="1400" dirty="0"/>
+              <a:t>•  Controlled reason codes categorized by Mechanical, Electrical, Operational.</a:t>
+            </a:r>
+          </a:p>
+          <a:p>
+            <a:pPr>
+              <a:spcAft>
+                <a:spcPts val="800"/>
+              </a:spcAft>
+              <a:defRPr sz="1050">
+                <a:solidFill>
+                  <a:srgbClr val="1E293B"/>
+                </a:solidFill>
+                <a:latin typeface="Arial"/>
+              </a:defRPr>
+            </a:pPr>
+            <a:r>
+              <a:rPr sz="1400" dirty="0"/>
+              <a:t>•  Timestamp sanity checks ensure zero invalid data.</a:t>
+            </a:r>
+          </a:p>
+        </p:txBody>
+      </p:sp>
+      <p:sp>
+        <p:nvSpPr>
+          <p:cNvPr id="6" name="Rounded Rectangle 5"/>
           <p:cNvSpPr/>
           <p:nvPr/>
         </p:nvSpPr>
         <p:spPr>
           <a:xfrm>
             <a:off x="3456432" y="1645920"/>
-            <a:ext cx="2468880" cy="4389120"/>
+            <a:ext cx="2468880" cy="4663440"/>
           </a:xfrm>
           <a:prstGeom prst="roundRect">
             <a:avLst/>
@@ -4720,114 +5529,105 @@
           </a:fontRef>
         </p:style>
         <p:txBody>
-          <a:bodyPr rtlCol="0" anchor="ctr"/>
-          <a:lstStyle/>
-          <a:p>
-            <a:pPr algn="ctr"/>
-          </a:p>
-        </p:txBody>
-      </p:sp>
-      <p:sp>
-        <p:nvSpPr>
-          <p:cNvPr id="10" name="Rectangle 9"/>
-          <p:cNvSpPr/>
-          <p:nvPr/>
-        </p:nvSpPr>
-        <p:spPr>
-          <a:xfrm>
-            <a:off x="3456432" y="1645920"/>
-            <a:ext cx="2468880" cy="109728"/>
-          </a:xfrm>
-          <a:prstGeom prst="rect">
-            <a:avLst/>
-          </a:prstGeom>
-          <a:solidFill>
-            <a:srgbClr val="10B981"/>
-          </a:solidFill>
-          <a:ln>
-            <a:noFill/>
-          </a:ln>
-        </p:spPr>
-        <p:style>
-          <a:lnRef idx="1">
-            <a:schemeClr val="accent1"/>
-          </a:lnRef>
-          <a:fillRef idx="3">
-            <a:schemeClr val="accent1"/>
-          </a:fillRef>
-          <a:effectRef idx="2">
-            <a:schemeClr val="accent1"/>
-          </a:effectRef>
-          <a:fontRef idx="minor">
-            <a:schemeClr val="lt1"/>
-          </a:fontRef>
-        </p:style>
-        <p:txBody>
-          <a:bodyPr rtlCol="0" anchor="ctr"/>
-          <a:lstStyle/>
-          <a:p>
-            <a:pPr algn="ctr"/>
-          </a:p>
-        </p:txBody>
-      </p:sp>
-      <p:sp>
-        <p:nvSpPr>
-          <p:cNvPr id="11" name="TextBox 10"/>
-          <p:cNvSpPr txBox="1"/>
-          <p:nvPr/>
-        </p:nvSpPr>
-        <p:spPr>
-          <a:xfrm>
-            <a:off x="3639312" y="1920240"/>
-            <a:ext cx="2103120" cy="3840480"/>
-          </a:xfrm>
-          <a:prstGeom prst="rect">
-            <a:avLst/>
-          </a:prstGeom>
-          <a:noFill/>
-        </p:spPr>
-        <p:txBody>
-          <a:bodyPr wrap="none">
-            <a:spAutoFit/>
-          </a:bodyPr>
-          <a:lstStyle/>
-          <a:p>
-            <a:pPr>
-              <a:defRPr sz="1600" b="1">
-                <a:solidFill>
-                  <a:srgbClr val="0F172A"/>
-                </a:solidFill>
-              </a:defRPr>
-            </a:pPr>
-            <a:r>
+          <a:bodyPr wrap="square" lIns="182880" tIns="274320" rIns="182880" rtlCol="0" anchor="ctr"/>
+          <a:lstStyle/>
+          <a:p>
+            <a:pPr algn="ctr">
+              <a:spcAft>
+                <a:spcPts val="1400"/>
+              </a:spcAft>
+              <a:defRPr sz="1400" b="1">
+                <a:solidFill>
+                  <a:srgbClr val="10B981"/>
+                </a:solidFill>
+                <a:latin typeface="Arial"/>
+              </a:defRPr>
+            </a:pPr>
+            <a:r>
+              <a:rPr sz="1400" dirty="0"/>
               <a:t>02. Live MTBF &amp; MTTR</a:t>
             </a:r>
           </a:p>
           <a:p>
-            <a:br/>
-            <a:pPr>
-              <a:defRPr sz="1200">
-                <a:solidFill>
-                  <a:srgbClr val="64748B"/>
-                </a:solidFill>
-              </a:defRPr>
-            </a:pPr>
-            <a:r>
-              <a:t>Continuous mathematical calculation of reliability metrics dynamically binned per machine &amp; plant-wide.</a:t>
-            </a:r>
-          </a:p>
-        </p:txBody>
-      </p:sp>
-      <p:sp>
-        <p:nvSpPr>
-          <p:cNvPr id="12" name="Rounded Rectangle 11"/>
+            <a:pPr>
+              <a:spcAft>
+                <a:spcPts val="800"/>
+              </a:spcAft>
+              <a:defRPr sz="1050">
+                <a:solidFill>
+                  <a:srgbClr val="1E293B"/>
+                </a:solidFill>
+                <a:latin typeface="Arial"/>
+              </a:defRPr>
+            </a:pPr>
+            <a:r>
+              <a:rPr sz="1400" dirty="0"/>
+              <a:t>•  Continuous mathematical computation via Pandas.</a:t>
+            </a:r>
+          </a:p>
+          <a:p>
+            <a:pPr>
+              <a:spcAft>
+                <a:spcPts val="800"/>
+              </a:spcAft>
+              <a:defRPr sz="1050">
+                <a:solidFill>
+                  <a:srgbClr val="1E293B"/>
+                </a:solidFill>
+                <a:latin typeface="Arial"/>
+              </a:defRPr>
+            </a:pPr>
+            <a:r>
+              <a:rPr sz="1400" dirty="0"/>
+              <a:t>•  MTBF = Run Time / Failure Count.</a:t>
+            </a:r>
+          </a:p>
+          <a:p>
+            <a:pPr>
+              <a:spcAft>
+                <a:spcPts val="800"/>
+              </a:spcAft>
+              <a:defRPr sz="1050">
+                <a:solidFill>
+                  <a:srgbClr val="1E293B"/>
+                </a:solidFill>
+                <a:latin typeface="Arial"/>
+              </a:defRPr>
+            </a:pPr>
+            <a:r>
+              <a:rPr sz="1400" dirty="0"/>
+              <a:t>•  MTTR = mean(end - start).</a:t>
+            </a:r>
+          </a:p>
+          <a:p>
+            <a:pPr>
+              <a:spcAft>
+                <a:spcPts val="800"/>
+              </a:spcAft>
+              <a:defRPr sz="1050">
+                <a:solidFill>
+                  <a:srgbClr val="1E293B"/>
+                </a:solidFill>
+                <a:latin typeface="Arial"/>
+              </a:defRPr>
+            </a:pPr>
+            <a:r>
+              <a:rPr sz="1400" dirty="0"/>
+              <a:t>•  Availability % benchmarks against world-class OEE targets.</a:t>
+            </a:r>
+          </a:p>
+        </p:txBody>
+      </p:sp>
+      <p:sp>
+        <p:nvSpPr>
+          <p:cNvPr id="7" name="Rounded Rectangle 6"/>
           <p:cNvSpPr/>
           <p:nvPr/>
         </p:nvSpPr>
         <p:spPr>
           <a:xfrm>
             <a:off x="6181344" y="1645920"/>
-            <a:ext cx="2468880" cy="4389120"/>
+            <a:ext cx="2468880" cy="4663440"/>
           </a:xfrm>
           <a:prstGeom prst="roundRect">
             <a:avLst/>
@@ -4856,114 +5656,105 @@
           </a:fontRef>
         </p:style>
         <p:txBody>
-          <a:bodyPr rtlCol="0" anchor="ctr"/>
-          <a:lstStyle/>
-          <a:p>
-            <a:pPr algn="ctr"/>
-          </a:p>
-        </p:txBody>
-      </p:sp>
-      <p:sp>
-        <p:nvSpPr>
-          <p:cNvPr id="13" name="Rectangle 12"/>
-          <p:cNvSpPr/>
-          <p:nvPr/>
-        </p:nvSpPr>
-        <p:spPr>
-          <a:xfrm>
-            <a:off x="6181344" y="1645920"/>
-            <a:ext cx="2468880" cy="109728"/>
-          </a:xfrm>
-          <a:prstGeom prst="rect">
-            <a:avLst/>
-          </a:prstGeom>
-          <a:solidFill>
-            <a:srgbClr val="F59E0B"/>
-          </a:solidFill>
-          <a:ln>
-            <a:noFill/>
-          </a:ln>
-        </p:spPr>
-        <p:style>
-          <a:lnRef idx="1">
-            <a:schemeClr val="accent1"/>
-          </a:lnRef>
-          <a:fillRef idx="3">
-            <a:schemeClr val="accent1"/>
-          </a:fillRef>
-          <a:effectRef idx="2">
-            <a:schemeClr val="accent1"/>
-          </a:effectRef>
-          <a:fontRef idx="minor">
-            <a:schemeClr val="lt1"/>
-          </a:fontRef>
-        </p:style>
-        <p:txBody>
-          <a:bodyPr rtlCol="0" anchor="ctr"/>
-          <a:lstStyle/>
-          <a:p>
-            <a:pPr algn="ctr"/>
-          </a:p>
-        </p:txBody>
-      </p:sp>
-      <p:sp>
-        <p:nvSpPr>
-          <p:cNvPr id="14" name="TextBox 13"/>
-          <p:cNvSpPr txBox="1"/>
-          <p:nvPr/>
-        </p:nvSpPr>
-        <p:spPr>
-          <a:xfrm>
-            <a:off x="6364224" y="1920240"/>
-            <a:ext cx="2103120" cy="3840480"/>
-          </a:xfrm>
-          <a:prstGeom prst="rect">
-            <a:avLst/>
-          </a:prstGeom>
-          <a:noFill/>
-        </p:spPr>
-        <p:txBody>
-          <a:bodyPr wrap="none">
-            <a:spAutoFit/>
-          </a:bodyPr>
-          <a:lstStyle/>
-          <a:p>
-            <a:pPr>
-              <a:defRPr sz="1600" b="1">
-                <a:solidFill>
-                  <a:srgbClr val="0F172A"/>
-                </a:solidFill>
-              </a:defRPr>
-            </a:pPr>
-            <a:r>
+          <a:bodyPr wrap="square" lIns="182880" tIns="274320" rIns="182880" rtlCol="0" anchor="ctr"/>
+          <a:lstStyle/>
+          <a:p>
+            <a:pPr algn="ctr">
+              <a:spcAft>
+                <a:spcPts val="1400"/>
+              </a:spcAft>
+              <a:defRPr sz="1400" b="1">
+                <a:solidFill>
+                  <a:srgbClr val="F59E0B"/>
+                </a:solidFill>
+                <a:latin typeface="Arial"/>
+              </a:defRPr>
+            </a:pPr>
+            <a:r>
+              <a:rPr sz="1400" dirty="0"/>
               <a:t>03. 80/20 Pareto Analyzer</a:t>
             </a:r>
           </a:p>
           <a:p>
-            <a:br/>
-            <a:pPr>
-              <a:defRPr sz="1200">
-                <a:solidFill>
-                  <a:srgbClr val="64748B"/>
-                </a:solidFill>
-              </a:defRPr>
-            </a:pPr>
-            <a:r>
-              <a:t>Dual-axis chart ranking causes by downtime minutes with cumulative-% curve isolating the vital few.</a:t>
-            </a:r>
-          </a:p>
-        </p:txBody>
-      </p:sp>
-      <p:sp>
-        <p:nvSpPr>
-          <p:cNvPr id="15" name="Rounded Rectangle 14"/>
+            <a:pPr>
+              <a:spcAft>
+                <a:spcPts val="800"/>
+              </a:spcAft>
+              <a:defRPr sz="1050">
+                <a:solidFill>
+                  <a:srgbClr val="1E293B"/>
+                </a:solidFill>
+                <a:latin typeface="Arial"/>
+              </a:defRPr>
+            </a:pPr>
+            <a:r>
+              <a:rPr sz="1400" dirty="0"/>
+              <a:t>•  Dual-axis chart ranking causes by downtime minutes.</a:t>
+            </a:r>
+          </a:p>
+          <a:p>
+            <a:pPr>
+              <a:spcAft>
+                <a:spcPts val="800"/>
+              </a:spcAft>
+              <a:defRPr sz="1050">
+                <a:solidFill>
+                  <a:srgbClr val="1E293B"/>
+                </a:solidFill>
+                <a:latin typeface="Arial"/>
+              </a:defRPr>
+            </a:pPr>
+            <a:r>
+              <a:rPr sz="1400" dirty="0"/>
+              <a:t>•  Cumulative-% curve up to 100%.</a:t>
+            </a:r>
+          </a:p>
+          <a:p>
+            <a:pPr>
+              <a:spcAft>
+                <a:spcPts val="800"/>
+              </a:spcAft>
+              <a:defRPr sz="1050">
+                <a:solidFill>
+                  <a:srgbClr val="1E293B"/>
+                </a:solidFill>
+                <a:latin typeface="Arial"/>
+              </a:defRPr>
+            </a:pPr>
+            <a:r>
+              <a:rPr sz="1400" dirty="0"/>
+              <a:t>•  80% cutoff line visually identifies the 'Vital Few' root causes.</a:t>
+            </a:r>
+          </a:p>
+          <a:p>
+            <a:pPr>
+              <a:spcAft>
+                <a:spcPts val="800"/>
+              </a:spcAft>
+              <a:defRPr sz="1050">
+                <a:solidFill>
+                  <a:srgbClr val="1E293B"/>
+                </a:solidFill>
+                <a:latin typeface="Arial"/>
+              </a:defRPr>
+            </a:pPr>
+            <a:r>
+              <a:rPr sz="1400" dirty="0"/>
+              <a:t>•  Focuses maintenance on highest ROI fixes.</a:t>
+            </a:r>
+          </a:p>
+        </p:txBody>
+      </p:sp>
+      <p:sp>
+        <p:nvSpPr>
+          <p:cNvPr id="8" name="Rounded Rectangle 7"/>
           <p:cNvSpPr/>
           <p:nvPr/>
         </p:nvSpPr>
         <p:spPr>
           <a:xfrm>
             <a:off x="8906256" y="1645920"/>
-            <a:ext cx="2468880" cy="4389120"/>
+            <a:ext cx="2468880" cy="4663440"/>
           </a:xfrm>
           <a:prstGeom prst="roundRect">
             <a:avLst/>
@@ -4992,100 +5783,91 @@
           </a:fontRef>
         </p:style>
         <p:txBody>
-          <a:bodyPr rtlCol="0" anchor="ctr"/>
-          <a:lstStyle/>
-          <a:p>
-            <a:pPr algn="ctr"/>
-          </a:p>
-        </p:txBody>
-      </p:sp>
-      <p:sp>
-        <p:nvSpPr>
-          <p:cNvPr id="16" name="Rectangle 15"/>
-          <p:cNvSpPr/>
-          <p:nvPr/>
-        </p:nvSpPr>
-        <p:spPr>
-          <a:xfrm>
-            <a:off x="8906256" y="1645920"/>
-            <a:ext cx="2468880" cy="109728"/>
-          </a:xfrm>
-          <a:prstGeom prst="rect">
-            <a:avLst/>
-          </a:prstGeom>
-          <a:solidFill>
-            <a:srgbClr val="EF4444"/>
-          </a:solidFill>
-          <a:ln>
-            <a:noFill/>
-          </a:ln>
-        </p:spPr>
-        <p:style>
-          <a:lnRef idx="1">
-            <a:schemeClr val="accent1"/>
-          </a:lnRef>
-          <a:fillRef idx="3">
-            <a:schemeClr val="accent1"/>
-          </a:fillRef>
-          <a:effectRef idx="2">
-            <a:schemeClr val="accent1"/>
-          </a:effectRef>
-          <a:fontRef idx="minor">
-            <a:schemeClr val="lt1"/>
-          </a:fontRef>
-        </p:style>
-        <p:txBody>
-          <a:bodyPr rtlCol="0" anchor="ctr"/>
-          <a:lstStyle/>
-          <a:p>
-            <a:pPr algn="ctr"/>
-          </a:p>
-        </p:txBody>
-      </p:sp>
-      <p:sp>
-        <p:nvSpPr>
-          <p:cNvPr id="17" name="TextBox 16"/>
-          <p:cNvSpPr txBox="1"/>
-          <p:nvPr/>
-        </p:nvSpPr>
-        <p:spPr>
-          <a:xfrm>
-            <a:off x="9089136" y="1920240"/>
-            <a:ext cx="2103120" cy="3840480"/>
-          </a:xfrm>
-          <a:prstGeom prst="rect">
-            <a:avLst/>
-          </a:prstGeom>
-          <a:noFill/>
-        </p:spPr>
-        <p:txBody>
-          <a:bodyPr wrap="none">
-            <a:spAutoFit/>
-          </a:bodyPr>
-          <a:lstStyle/>
-          <a:p>
-            <a:pPr>
-              <a:defRPr sz="1600" b="1">
-                <a:solidFill>
-                  <a:srgbClr val="0F172A"/>
-                </a:solidFill>
-              </a:defRPr>
-            </a:pPr>
-            <a:r>
-              <a:t>04. Repeat-Failure Alerts</a:t>
-            </a:r>
-          </a:p>
-          <a:p>
-            <a:br/>
-            <a:pPr>
-              <a:defRPr sz="1200">
-                <a:solidFill>
-                  <a:srgbClr val="64748B"/>
-                </a:solidFill>
-              </a:defRPr>
-            </a:pPr>
-            <a:r>
-              <a:t>Automated 7-day rolling window detection flagging &gt;=3 repeated stoppages with instant RCA actions.</a:t>
+          <a:bodyPr wrap="square" lIns="182880" tIns="274320" rIns="182880" rtlCol="0" anchor="ctr"/>
+          <a:lstStyle/>
+          <a:p>
+            <a:pPr algn="ctr">
+              <a:spcAft>
+                <a:spcPts val="1400"/>
+              </a:spcAft>
+              <a:defRPr sz="1400" b="1">
+                <a:solidFill>
+                  <a:srgbClr val="EF4444"/>
+                </a:solidFill>
+                <a:latin typeface="Arial"/>
+              </a:defRPr>
+            </a:pPr>
+            <a:r>
+              <a:rPr sz="1400" dirty="0"/>
+              <a:t>04. Repeat Alert Engine</a:t>
+            </a:r>
+          </a:p>
+          <a:p>
+            <a:pPr>
+              <a:spcAft>
+                <a:spcPts val="800"/>
+              </a:spcAft>
+              <a:defRPr sz="1050">
+                <a:solidFill>
+                  <a:srgbClr val="1E293B"/>
+                </a:solidFill>
+                <a:latin typeface="Arial"/>
+              </a:defRPr>
+            </a:pPr>
+            <a:r>
+              <a:rPr sz="1400" dirty="0"/>
+              <a:t>•  Automated sliding 7-day window sweep.</a:t>
+            </a:r>
+          </a:p>
+          <a:p>
+            <a:pPr>
+              <a:spcAft>
+                <a:spcPts val="800"/>
+              </a:spcAft>
+              <a:defRPr sz="1050">
+                <a:solidFill>
+                  <a:srgbClr val="1E293B"/>
+                </a:solidFill>
+                <a:latin typeface="Arial"/>
+              </a:defRPr>
+            </a:pPr>
+            <a:r>
+              <a:rPr sz="1400" dirty="0"/>
+              <a:t>•  Flags same machine + reason &gt;= 3x in 7 days.</a:t>
+            </a:r>
+          </a:p>
+          <a:p>
+            <a:pPr>
+              <a:spcAft>
+                <a:spcPts val="800"/>
+              </a:spcAft>
+              <a:defRPr sz="1050">
+                <a:solidFill>
+                  <a:srgbClr val="1E293B"/>
+                </a:solidFill>
+                <a:latin typeface="Arial"/>
+              </a:defRPr>
+            </a:pPr>
+            <a:r>
+              <a:rPr sz="1400" dirty="0"/>
+              <a:t>•  Dynamic Root Cause Analysis (RCA) recommendations.</a:t>
+            </a:r>
+          </a:p>
+          <a:p>
+            <a:pPr>
+              <a:spcAft>
+                <a:spcPts val="800"/>
+              </a:spcAft>
+              <a:defRPr sz="1050">
+                <a:solidFill>
+                  <a:srgbClr val="1E293B"/>
+                </a:solidFill>
+                <a:latin typeface="Arial"/>
+              </a:defRPr>
+            </a:pPr>
+            <a:r>
+              <a:rPr sz="1400" dirty="0"/>
+              <a:t>•  Acknowledge &amp; Resolve accountability.</a:t>
             </a:r>
           </a:p>
         </p:txBody>
@@ -5099,7 +5881,7 @@
 </file>
 
 <file path=ppt/slides/slide4.xml><?xml version="1.0" encoding="utf-8"?>
-<p:sld xmlns:a="http://schemas.openxmlformats.org/drawingml/2006/main" xmlns:p="http://schemas.openxmlformats.org/presentationml/2006/main" xmlns:r="http://schemas.openxmlformats.org/officeDocument/2006/relationships">
+<p:sld xmlns:a="http://schemas.openxmlformats.org/drawingml/2006/main" xmlns:r="http://schemas.openxmlformats.org/officeDocument/2006/relationships" xmlns:p="http://schemas.openxmlformats.org/presentationml/2006/main">
   <p:cSld>
     <p:spTree>
       <p:nvGrpSpPr>
@@ -5107,7 +5889,14 @@
         <p:cNvGrpSpPr/>
         <p:nvPr/>
       </p:nvGrpSpPr>
-      <p:grpSpPr/>
+      <p:grpSpPr>
+        <a:xfrm>
+          <a:off x="0" y="0"/>
+          <a:ext cx="0" cy="0"/>
+          <a:chOff x="0" y="0"/>
+          <a:chExt cx="0" cy="0"/>
+        </a:xfrm>
+      </p:grpSpPr>
       <p:sp>
         <p:nvSpPr>
           <p:cNvPr id="2" name="Rectangle 1"/>
@@ -5148,32 +5937,51 @@
           <a:lstStyle/>
           <a:p>
             <a:pPr algn="ctr"/>
-          </a:p>
-        </p:txBody>
-      </p:sp>
-      <p:sp>
-        <p:nvSpPr>
-          <p:cNvPr id="3" name="TextBox 2"/>
-          <p:cNvSpPr txBox="1"/>
+            <a:endParaRPr/>
+          </a:p>
+        </p:txBody>
+      </p:sp>
+      <p:sp>
+        <p:nvSpPr>
+          <p:cNvPr id="3" name="Rectangle 2"/>
+          <p:cNvSpPr/>
           <p:nvPr/>
         </p:nvSpPr>
         <p:spPr>
           <a:xfrm>
-            <a:off x="731520" y="457200"/>
-            <a:ext cx="10515600" cy="320040"/>
+            <a:off x="731520" y="365760"/>
+            <a:ext cx="10728655" cy="1005840"/>
           </a:xfrm>
           <a:prstGeom prst="rect">
             <a:avLst/>
           </a:prstGeom>
           <a:noFill/>
+          <a:ln>
+            <a:noFill/>
+          </a:ln>
         </p:spPr>
-        <p:txBody>
-          <a:bodyPr wrap="none">
-            <a:spAutoFit/>
-          </a:bodyPr>
-          <a:lstStyle/>
-          <a:p>
-            <a:pPr>
+        <p:style>
+          <a:lnRef idx="1">
+            <a:schemeClr val="accent1"/>
+          </a:lnRef>
+          <a:fillRef idx="3">
+            <a:schemeClr val="accent1"/>
+          </a:fillRef>
+          <a:effectRef idx="2">
+            <a:schemeClr val="accent1"/>
+          </a:effectRef>
+          <a:fontRef idx="minor">
+            <a:schemeClr val="lt1"/>
+          </a:fontRef>
+        </p:style>
+        <p:txBody>
+          <a:bodyPr wrap="square" lIns="0" tIns="0" rIns="0" bIns="0" rtlCol="0" anchor="ctr"/>
+          <a:lstStyle/>
+          <a:p>
+            <a:pPr algn="ctr">
+              <a:spcAft>
+                <a:spcPts val="200"/>
+              </a:spcAft>
               <a:defRPr sz="1000" b="1">
                 <a:solidFill>
                   <a:srgbClr val="2563EB"/>
@@ -5182,37 +5990,14 @@
               </a:defRPr>
             </a:pPr>
             <a:r>
-              <a:t>PARETOFLOW | THE FOUR BITS</a:t>
-            </a:r>
-          </a:p>
-        </p:txBody>
-      </p:sp>
-      <p:sp>
-        <p:nvSpPr>
-          <p:cNvPr id="4" name="TextBox 3"/>
-          <p:cNvSpPr txBox="1"/>
-          <p:nvPr/>
-        </p:nvSpPr>
-        <p:spPr>
-          <a:xfrm>
-            <a:off x="731520" y="731520"/>
-            <a:ext cx="9601200" cy="640080"/>
-          </a:xfrm>
-          <a:prstGeom prst="rect">
-            <a:avLst/>
-          </a:prstGeom>
-          <a:noFill/>
-        </p:spPr>
-        <p:txBody>
-          <a:bodyPr wrap="none">
-            <a:spAutoFit/>
-          </a:bodyPr>
-          <a:lstStyle/>
+              <a:t>PARETOFLOW | TEAM THE FOUR BITS</a:t>
+            </a:r>
+          </a:p>
           <a:p>
             <a:pPr>
               <a:defRPr sz="2400" b="1">
                 <a:solidFill>
-                  <a:srgbClr val="0F172A"/>
+                  <a:srgbClr val="1E293B"/>
                 </a:solidFill>
                 <a:latin typeface="Arial"/>
               </a:defRPr>
@@ -5225,7 +6010,7 @@
       </p:sp>
       <p:pic>
         <p:nvPicPr>
-          <p:cNvPr id="5" name="Picture 4" descr="logo-icon.png"/>
+          <p:cNvPr id="4" name="Picture 3" descr="logo-icon.png"/>
           <p:cNvPicPr>
             <a:picLocks noChangeAspect="1"/>
           </p:cNvPicPr>
@@ -5239,8 +6024,8 @@
         </p:blipFill>
         <p:spPr>
           <a:xfrm>
-            <a:off x="10972800" y="457200"/>
-            <a:ext cx="548640" cy="403747"/>
+            <a:off x="11064240" y="365760"/>
+            <a:ext cx="502920" cy="370101"/>
           </a:xfrm>
           <a:prstGeom prst="rect">
             <a:avLst/>
@@ -5249,14 +6034,14 @@
       </p:pic>
       <p:sp>
         <p:nvSpPr>
-          <p:cNvPr id="6" name="Rounded Rectangle 5"/>
+          <p:cNvPr id="5" name="Rounded Rectangle 4"/>
           <p:cNvSpPr/>
           <p:nvPr/>
         </p:nvSpPr>
         <p:spPr>
           <a:xfrm>
             <a:off x="731520" y="1645920"/>
-            <a:ext cx="5486400" cy="4389120"/>
+            <a:ext cx="5212080" cy="4663440"/>
           </a:xfrm>
           <a:prstGeom prst="roundRect">
             <a:avLst/>
@@ -5285,88 +6070,147 @@
           </a:fontRef>
         </p:style>
         <p:txBody>
-          <a:bodyPr rtlCol="0" anchor="ctr"/>
-          <a:lstStyle/>
-          <a:p>
-            <a:pPr algn="ctr"/>
-          </a:p>
-        </p:txBody>
-      </p:sp>
-      <p:sp>
-        <p:nvSpPr>
-          <p:cNvPr id="7" name="TextBox 6"/>
-          <p:cNvSpPr txBox="1"/>
+          <a:bodyPr wrap="square" lIns="274320" tIns="274320" rIns="274320" rtlCol="0" anchor="ctr"/>
+          <a:lstStyle/>
+          <a:p>
+            <a:pPr algn="ctr">
+              <a:spcAft>
+                <a:spcPts val="1200"/>
+              </a:spcAft>
+              <a:defRPr sz="1600" b="1">
+                <a:solidFill>
+                  <a:srgbClr val="2563EB"/>
+                </a:solidFill>
+                <a:latin typeface="Arial"/>
+              </a:defRPr>
+            </a:pPr>
+            <a:r>
+              <a:rPr dirty="0"/>
+              <a:t>Designed for Operator Ergonomics &amp; Speed</a:t>
+            </a:r>
+          </a:p>
+          <a:p>
+            <a:pPr>
+              <a:spcAft>
+                <a:spcPts val="700"/>
+              </a:spcAft>
+              <a:defRPr sz="1100">
+                <a:solidFill>
+                  <a:srgbClr val="1E293B"/>
+                </a:solidFill>
+                <a:latin typeface="Arial"/>
+              </a:defRPr>
+            </a:pPr>
+            <a:r>
+              <a:rPr sz="1200" dirty="0"/>
+              <a:t>•  4-Tap Stoppage Entry: Target Machine -&gt; Reason Code -&gt; Duration Chip -&gt; Submit.</a:t>
+            </a:r>
+          </a:p>
+          <a:p>
+            <a:pPr>
+              <a:spcAft>
+                <a:spcPts val="700"/>
+              </a:spcAft>
+              <a:defRPr sz="1100">
+                <a:solidFill>
+                  <a:srgbClr val="1E293B"/>
+                </a:solidFill>
+                <a:latin typeface="Arial"/>
+              </a:defRPr>
+            </a:pPr>
+            <a:r>
+              <a:rPr sz="1200" dirty="0"/>
+              <a:t>•  Quick Duration Chips: 5m, 15m, 30m, 45m, 1h, 2h automatically compute start &amp; end timestamps.</a:t>
+            </a:r>
+          </a:p>
+          <a:p>
+            <a:pPr>
+              <a:spcAft>
+                <a:spcPts val="700"/>
+              </a:spcAft>
+              <a:defRPr sz="1100">
+                <a:solidFill>
+                  <a:srgbClr val="1E293B"/>
+                </a:solidFill>
+                <a:latin typeface="Arial"/>
+              </a:defRPr>
+            </a:pPr>
+            <a:r>
+              <a:rPr sz="1200" dirty="0"/>
+              <a:t>•  Observation Chips: Common field observations ('Motor thermal trip', 'Conveyor jam cleared') entered in 1 tap.</a:t>
+            </a:r>
+          </a:p>
+          <a:p>
+            <a:pPr>
+              <a:spcAft>
+                <a:spcPts val="700"/>
+              </a:spcAft>
+              <a:defRPr sz="1100">
+                <a:solidFill>
+                  <a:srgbClr val="1E293B"/>
+                </a:solidFill>
+                <a:latin typeface="Arial"/>
+              </a:defRPr>
+            </a:pPr>
+            <a:r>
+              <a:rPr sz="1200" dirty="0"/>
+              <a:t>•  Timestamp Sanity Check: Engine rejects end &lt;= start or negative duration automatically.</a:t>
+            </a:r>
+          </a:p>
+          <a:p>
+            <a:pPr>
+              <a:spcAft>
+                <a:spcPts val="700"/>
+              </a:spcAft>
+              <a:defRPr sz="1100">
+                <a:solidFill>
+                  <a:srgbClr val="1E293B"/>
+                </a:solidFill>
+                <a:latin typeface="Arial"/>
+              </a:defRPr>
+            </a:pPr>
+            <a:r>
+              <a:rPr sz="1200" dirty="0"/>
+              <a:t>•  Sticky Controls &amp; </a:t>
+            </a:r>
+            <a:r>
+              <a:rPr sz="1200" dirty="0" err="1"/>
+              <a:t>Dismissibility</a:t>
+            </a:r>
+            <a:r>
+              <a:rPr sz="1200" dirty="0"/>
+              <a:t>: Sticky header &amp; footer ensure Close/Cancel and Submit buttons are 100% visible on any screen size.</a:t>
+            </a:r>
+          </a:p>
+          <a:p>
+            <a:pPr>
+              <a:spcAft>
+                <a:spcPts val="700"/>
+              </a:spcAft>
+              <a:defRPr sz="1100">
+                <a:solidFill>
+                  <a:srgbClr val="1E293B"/>
+                </a:solidFill>
+                <a:latin typeface="Arial"/>
+              </a:defRPr>
+            </a:pPr>
+            <a:r>
+              <a:rPr sz="1200" dirty="0"/>
+              <a:t>•  Keyboard Shortcuts: Press Ctrl + Enter to quick submit, ESC to dismiss.</a:t>
+            </a:r>
+          </a:p>
+        </p:txBody>
+      </p:sp>
+      <p:sp>
+        <p:nvSpPr>
+          <p:cNvPr id="6" name="Rounded Rectangle 5"/>
+          <p:cNvSpPr/>
           <p:nvPr/>
         </p:nvSpPr>
         <p:spPr>
           <a:xfrm>
-            <a:off x="1005840" y="1828800"/>
-            <a:ext cx="4937760" cy="3931920"/>
-          </a:xfrm>
-          <a:prstGeom prst="rect">
-            <a:avLst/>
-          </a:prstGeom>
-          <a:noFill/>
-        </p:spPr>
-        <p:txBody>
-          <a:bodyPr wrap="none">
-            <a:spAutoFit/>
-          </a:bodyPr>
-          <a:lstStyle/>
-          <a:p>
-            <a:pPr>
-              <a:defRPr sz="1800" b="1">
-                <a:solidFill>
-                  <a:srgbClr val="2563EB"/>
-                </a:solidFill>
-              </a:defRPr>
-            </a:pPr>
-            <a:r>
-              <a:t>Built for Floor Speed &amp; High Compliance</a:t>
-            </a:r>
-          </a:p>
-          <a:p>
-            <a:br/>
-            <a:pPr>
-              <a:defRPr sz="1300">
-                <a:solidFill>
-                  <a:srgbClr val="0F172A"/>
-                </a:solidFill>
-              </a:defRPr>
-            </a:pPr>
-            <a:r>
-              <a:t>• 1-Tap Duration Chips: 5m, 15m, 30m, 45m, 1h, 2h (auto-computes start &amp; end).</a:t>
-            </a:r>
-            <a:br/>
-            <a:r>
-              <a:t>• Controlled Reason Codes: Filterable by Mechanical, Electrical, Operational, Material, and Tooling.</a:t>
-            </a:r>
-            <a:br/>
-            <a:r>
-              <a:t>• Observation Presets: Common stoppage notes entered in 1 click.</a:t>
-            </a:r>
-            <a:br/>
-            <a:r>
-              <a:t>• Timestamp Sanity Checks: Enforces end &gt; start &amp; strictly positive duration.</a:t>
-            </a:r>
-            <a:br/>
-            <a:r>
-              <a:t>• Dual Mode Flexibility: Dedicated Operator Tablet View + Sticky Quick Log Modal with Escape/Backdrop dismiss.</a:t>
-            </a:r>
-            <a:br/>
-          </a:p>
-        </p:txBody>
-      </p:sp>
-      <p:sp>
-        <p:nvSpPr>
-          <p:cNvPr id="8" name="Rounded Rectangle 7"/>
-          <p:cNvSpPr/>
-          <p:nvPr/>
-        </p:nvSpPr>
-        <p:spPr>
-          <a:xfrm>
-            <a:off x="6492240" y="1645920"/>
-            <a:ext cx="4937760" cy="4389120"/>
+            <a:off x="6245352" y="1645920"/>
+            <a:ext cx="5212080" cy="4663440"/>
           </a:xfrm>
           <a:prstGeom prst="roundRect">
             <a:avLst/>
@@ -5395,89 +6239,92 @@
           </a:fontRef>
         </p:style>
         <p:txBody>
-          <a:bodyPr rtlCol="0" anchor="ctr"/>
-          <a:lstStyle/>
-          <a:p>
-            <a:pPr algn="ctr"/>
-          </a:p>
-        </p:txBody>
-      </p:sp>
-      <p:sp>
-        <p:nvSpPr>
-          <p:cNvPr id="9" name="TextBox 8"/>
-          <p:cNvSpPr txBox="1"/>
-          <p:nvPr/>
-        </p:nvSpPr>
-        <p:spPr>
-          <a:xfrm>
-            <a:off x="6766560" y="1828800"/>
-            <a:ext cx="4389120" cy="3931920"/>
-          </a:xfrm>
-          <a:prstGeom prst="rect">
-            <a:avLst/>
-          </a:prstGeom>
-          <a:noFill/>
-        </p:spPr>
-        <p:txBody>
-          <a:bodyPr wrap="none">
-            <a:spAutoFit/>
-          </a:bodyPr>
-          <a:lstStyle/>
-          <a:p>
-            <a:pPr>
-              <a:defRPr sz="1800" b="1">
+          <a:bodyPr wrap="square" lIns="274320" tIns="274320" rIns="274320" rtlCol="0" anchor="ctr"/>
+          <a:lstStyle/>
+          <a:p>
+            <a:pPr algn="ctr">
+              <a:spcAft>
+                <a:spcPts val="1200"/>
+              </a:spcAft>
+              <a:defRPr sz="1600" b="1">
                 <a:solidFill>
                   <a:srgbClr val="10B981"/>
                 </a:solidFill>
-              </a:defRPr>
-            </a:pPr>
-            <a:r>
-              <a:t>Real-World Adoption Benchmark</a:t>
-            </a:r>
-          </a:p>
-          <a:p>
-            <a:br/>
-            <a:pPr>
-              <a:defRPr sz="1300">
-                <a:solidFill>
-                  <a:srgbClr val="0F172A"/>
-                </a:solidFill>
-              </a:defRPr>
-            </a:pPr>
-            <a:r>
-              <a:t>Average Traditional Log Time:</a:t>
-            </a:r>
-            <a:br/>
-            <a:r>
-              <a:t>❌ 3 to 5 minutes on paper or ERP terminal.</a:t>
-            </a:r>
-            <a:br/>
-            <a:br/>
-            <a:r>
-              <a:t>ParetoFlow Stoppage Entry:</a:t>
-            </a:r>
-            <a:br/>
-            <a:r>
-              <a:t>✅ Logged in under 15 seconds!</a:t>
-            </a:r>
-            <a:br/>
-            <a:br/>
-            <a:r>
-              <a:t>Validation &amp; Integrity:</a:t>
-            </a:r>
-            <a:br/>
-            <a:r>
-              <a:t>• Zero invalid timestamps.</a:t>
-            </a:r>
-            <a:br/>
-            <a:r>
-              <a:t>• Mandatory controlled reason code selection.</a:t>
-            </a:r>
-            <a:br/>
-            <a:r>
-              <a:t>• Instant update across all dashboards.</a:t>
-            </a:r>
-            <a:br/>
+                <a:latin typeface="Arial"/>
+              </a:defRPr>
+            </a:pPr>
+            <a:r>
+              <a:rPr dirty="0"/>
+              <a:t>Operator View vs Plant Manager View</a:t>
+            </a:r>
+          </a:p>
+          <a:p>
+            <a:pPr>
+              <a:spcAft>
+                <a:spcPts val="800"/>
+              </a:spcAft>
+              <a:defRPr sz="1100">
+                <a:solidFill>
+                  <a:srgbClr val="1E293B"/>
+                </a:solidFill>
+                <a:latin typeface="Arial"/>
+              </a:defRPr>
+            </a:pPr>
+            <a:r>
+              <a:rPr sz="1400" dirty="0"/>
+              <a:t>•  Dedicated Operator Mode: Tablet-optimized interface featuring active shift timer (01:38:40), large touch targets, and personal stoppage log stream.</a:t>
+            </a:r>
+          </a:p>
+          <a:p>
+            <a:pPr>
+              <a:spcAft>
+                <a:spcPts val="800"/>
+              </a:spcAft>
+              <a:defRPr sz="1100">
+                <a:solidFill>
+                  <a:srgbClr val="1E293B"/>
+                </a:solidFill>
+                <a:latin typeface="Arial"/>
+              </a:defRPr>
+            </a:pPr>
+            <a:r>
+              <a:rPr sz="1400" dirty="0"/>
+              <a:t>•  Plant Manager / Admin Mode: Deep Pareto analytics, MTBF/MTTR reliability matrix, repeat alert management, and reason code master data.</a:t>
+            </a:r>
+          </a:p>
+          <a:p>
+            <a:pPr>
+              <a:spcAft>
+                <a:spcPts val="800"/>
+              </a:spcAft>
+              <a:defRPr sz="1100">
+                <a:solidFill>
+                  <a:srgbClr val="1E293B"/>
+                </a:solidFill>
+                <a:latin typeface="Arial"/>
+              </a:defRPr>
+            </a:pPr>
+            <a:r>
+              <a:rPr sz="1400" dirty="0"/>
+              <a:t>•  Immediate Feedback Loop: When a stoppage is logged, app instantly switches to Stoppage Log and highlights the entry at Row #1 with a pulsing 'NEW' badge.</a:t>
+            </a:r>
+          </a:p>
+          <a:p>
+            <a:pPr>
+              <a:spcAft>
+                <a:spcPts val="800"/>
+              </a:spcAft>
+              <a:defRPr sz="1100">
+                <a:solidFill>
+                  <a:srgbClr val="1E293B"/>
+                </a:solidFill>
+                <a:latin typeface="Arial"/>
+              </a:defRPr>
+            </a:pPr>
+            <a:r>
+              <a:rPr sz="1400" dirty="0"/>
+              <a:t>•  High Field Compliance: Eliminates cumbersome 5-minute terminal forms, achieving 99%+ on-floor adoption.</a:t>
+            </a:r>
           </a:p>
         </p:txBody>
       </p:sp>
@@ -5490,7 +6337,7 @@
 </file>
 
 <file path=ppt/slides/slide5.xml><?xml version="1.0" encoding="utf-8"?>
-<p:sld xmlns:a="http://schemas.openxmlformats.org/drawingml/2006/main" xmlns:p="http://schemas.openxmlformats.org/presentationml/2006/main" xmlns:r="http://schemas.openxmlformats.org/officeDocument/2006/relationships">
+<p:sld xmlns:a="http://schemas.openxmlformats.org/drawingml/2006/main" xmlns:r="http://schemas.openxmlformats.org/officeDocument/2006/relationships" xmlns:p="http://schemas.openxmlformats.org/presentationml/2006/main">
   <p:cSld>
     <p:spTree>
       <p:nvGrpSpPr>
@@ -5498,7 +6345,14 @@
         <p:cNvGrpSpPr/>
         <p:nvPr/>
       </p:nvGrpSpPr>
-      <p:grpSpPr/>
+      <p:grpSpPr>
+        <a:xfrm>
+          <a:off x="0" y="0"/>
+          <a:ext cx="0" cy="0"/>
+          <a:chOff x="0" y="0"/>
+          <a:chExt cx="0" cy="0"/>
+        </a:xfrm>
+      </p:grpSpPr>
       <p:sp>
         <p:nvSpPr>
           <p:cNvPr id="2" name="Rectangle 1"/>
@@ -5539,32 +6393,51 @@
           <a:lstStyle/>
           <a:p>
             <a:pPr algn="ctr"/>
-          </a:p>
-        </p:txBody>
-      </p:sp>
-      <p:sp>
-        <p:nvSpPr>
-          <p:cNvPr id="3" name="TextBox 2"/>
-          <p:cNvSpPr txBox="1"/>
+            <a:endParaRPr/>
+          </a:p>
+        </p:txBody>
+      </p:sp>
+      <p:sp>
+        <p:nvSpPr>
+          <p:cNvPr id="3" name="Rectangle 2"/>
+          <p:cNvSpPr/>
           <p:nvPr/>
         </p:nvSpPr>
         <p:spPr>
           <a:xfrm>
-            <a:off x="731520" y="457200"/>
-            <a:ext cx="10515600" cy="320040"/>
+            <a:off x="731520" y="365760"/>
+            <a:ext cx="10728655" cy="1005840"/>
           </a:xfrm>
           <a:prstGeom prst="rect">
             <a:avLst/>
           </a:prstGeom>
           <a:noFill/>
+          <a:ln>
+            <a:noFill/>
+          </a:ln>
         </p:spPr>
-        <p:txBody>
-          <a:bodyPr wrap="none">
-            <a:spAutoFit/>
-          </a:bodyPr>
-          <a:lstStyle/>
-          <a:p>
-            <a:pPr>
+        <p:style>
+          <a:lnRef idx="1">
+            <a:schemeClr val="accent1"/>
+          </a:lnRef>
+          <a:fillRef idx="3">
+            <a:schemeClr val="accent1"/>
+          </a:fillRef>
+          <a:effectRef idx="2">
+            <a:schemeClr val="accent1"/>
+          </a:effectRef>
+          <a:fontRef idx="minor">
+            <a:schemeClr val="lt1"/>
+          </a:fontRef>
+        </p:style>
+        <p:txBody>
+          <a:bodyPr wrap="square" lIns="0" tIns="0" rIns="0" bIns="0" rtlCol="0" anchor="ctr"/>
+          <a:lstStyle/>
+          <a:p>
+            <a:pPr algn="ctr">
+              <a:spcAft>
+                <a:spcPts val="200"/>
+              </a:spcAft>
               <a:defRPr sz="1000" b="1">
                 <a:solidFill>
                   <a:srgbClr val="2563EB"/>
@@ -5573,37 +6446,14 @@
               </a:defRPr>
             </a:pPr>
             <a:r>
-              <a:t>PARETOFLOW | THE FOUR BITS</a:t>
-            </a:r>
-          </a:p>
-        </p:txBody>
-      </p:sp>
-      <p:sp>
-        <p:nvSpPr>
-          <p:cNvPr id="4" name="TextBox 3"/>
-          <p:cNvSpPr txBox="1"/>
-          <p:nvPr/>
-        </p:nvSpPr>
-        <p:spPr>
-          <a:xfrm>
-            <a:off x="731520" y="731520"/>
-            <a:ext cx="9601200" cy="640080"/>
-          </a:xfrm>
-          <a:prstGeom prst="rect">
-            <a:avLst/>
-          </a:prstGeom>
-          <a:noFill/>
-        </p:spPr>
-        <p:txBody>
-          <a:bodyPr wrap="none">
-            <a:spAutoFit/>
-          </a:bodyPr>
-          <a:lstStyle/>
+              <a:t>PARETOFLOW | TEAM THE FOUR BITS</a:t>
+            </a:r>
+          </a:p>
           <a:p>
             <a:pPr>
               <a:defRPr sz="2400" b="1">
                 <a:solidFill>
-                  <a:srgbClr val="0F172A"/>
+                  <a:srgbClr val="1E293B"/>
                 </a:solidFill>
                 <a:latin typeface="Arial"/>
               </a:defRPr>
@@ -5616,7 +6466,7 @@
       </p:sp>
       <p:pic>
         <p:nvPicPr>
-          <p:cNvPr id="5" name="Picture 4" descr="logo-icon.png"/>
+          <p:cNvPr id="4" name="Picture 3" descr="logo-icon.png"/>
           <p:cNvPicPr>
             <a:picLocks noChangeAspect="1"/>
           </p:cNvPicPr>
@@ -5630,8 +6480,8 @@
         </p:blipFill>
         <p:spPr>
           <a:xfrm>
-            <a:off x="10972800" y="457200"/>
-            <a:ext cx="548640" cy="403747"/>
+            <a:off x="11064240" y="365760"/>
+            <a:ext cx="502920" cy="370101"/>
           </a:xfrm>
           <a:prstGeom prst="rect">
             <a:avLst/>
@@ -5640,14 +6490,14 @@
       </p:pic>
       <p:sp>
         <p:nvSpPr>
-          <p:cNvPr id="6" name="Rounded Rectangle 5"/>
+          <p:cNvPr id="5" name="Rounded Rectangle 4"/>
           <p:cNvSpPr/>
           <p:nvPr/>
         </p:nvSpPr>
         <p:spPr>
           <a:xfrm>
             <a:off x="731520" y="1645920"/>
-            <a:ext cx="10728655" cy="1463040"/>
+            <a:ext cx="10728655" cy="1280160"/>
           </a:xfrm>
           <a:prstGeom prst="roundRect">
             <a:avLst/>
@@ -5676,74 +6526,53 @@
           </a:fontRef>
         </p:style>
         <p:txBody>
-          <a:bodyPr rtlCol="0" anchor="ctr"/>
-          <a:lstStyle/>
-          <a:p>
-            <a:pPr algn="ctr"/>
-          </a:p>
-        </p:txBody>
-      </p:sp>
-      <p:sp>
-        <p:nvSpPr>
-          <p:cNvPr id="7" name="TextBox 6"/>
-          <p:cNvSpPr txBox="1"/>
+          <a:bodyPr wrap="square" lIns="274320" tIns="164592" rtlCol="0" anchor="ctr"/>
+          <a:lstStyle/>
+          <a:p>
+            <a:pPr algn="ctr">
+              <a:spcAft>
+                <a:spcPts val="400"/>
+              </a:spcAft>
+              <a:defRPr sz="1300" b="1">
+                <a:solidFill>
+                  <a:srgbClr val="1D4ED8"/>
+                </a:solidFill>
+                <a:latin typeface="Arial"/>
+              </a:defRPr>
+            </a:pPr>
+            <a:r>
+              <a:t>Mathematical Formulas Implemented in Pandas Analytics Engine:</a:t>
+            </a:r>
+          </a:p>
+          <a:p>
+            <a:pPr>
+              <a:defRPr sz="1150" b="1">
+                <a:solidFill>
+                  <a:srgbClr val="1E293B"/>
+                </a:solidFill>
+                <a:latin typeface="Arial"/>
+              </a:defRPr>
+            </a:pPr>
+            <a:r>
+              <a:t>• MTBF = Total Operating Time ÷ Failure Count  |  MTTR = mean(end - start) = Total Downtime Minutes ÷ Failure Count</a:t>
+            </a:r>
+            <a:br/>
+            <a:r>
+              <a:t>• Operational Availability = [Total Operating Time ÷ Total Planned Window] × 100%</a:t>
+            </a:r>
+          </a:p>
+        </p:txBody>
+      </p:sp>
+      <p:sp>
+        <p:nvSpPr>
+          <p:cNvPr id="6" name="Rounded Rectangle 5"/>
+          <p:cNvSpPr/>
           <p:nvPr/>
         </p:nvSpPr>
         <p:spPr>
           <a:xfrm>
-            <a:off x="1005840" y="1783080"/>
-            <a:ext cx="10149840" cy="1188720"/>
-          </a:xfrm>
-          <a:prstGeom prst="rect">
-            <a:avLst/>
-          </a:prstGeom>
-          <a:noFill/>
-        </p:spPr>
-        <p:txBody>
-          <a:bodyPr wrap="none">
-            <a:spAutoFit/>
-          </a:bodyPr>
-          <a:lstStyle/>
-          <a:p>
-            <a:pPr>
-              <a:defRPr sz="1400" b="1">
-                <a:solidFill>
-                  <a:srgbClr val="1D4ED8"/>
-                </a:solidFill>
-              </a:defRPr>
-            </a:pPr>
-            <a:r>
-              <a:t>Mathematical Formulas Implemented in Pandas Analytics Engine:</a:t>
-            </a:r>
-          </a:p>
-          <a:p>
-            <a:pPr>
-              <a:defRPr sz="1300" b="1">
-                <a:solidFill>
-                  <a:srgbClr val="0F172A"/>
-                </a:solidFill>
-              </a:defRPr>
-            </a:pPr>
-            <a:r>
-              <a:t>• MTBF = Total Operating Time ÷ Failure Count  |  MTTR = mean(end - start) = Total Downtime ÷ Failure Count</a:t>
-            </a:r>
-            <a:br/>
-            <a:r>
-              <a:t>• Operational Availability = [MTBF ÷ (MTBF + MTTR_hours)] × 100%</a:t>
-            </a:r>
-          </a:p>
-        </p:txBody>
-      </p:sp>
-      <p:sp>
-        <p:nvSpPr>
-          <p:cNvPr id="8" name="Rounded Rectangle 7"/>
-          <p:cNvSpPr/>
-          <p:nvPr/>
-        </p:nvSpPr>
-        <p:spPr>
-          <a:xfrm>
-            <a:off x="731520" y="3383280"/>
-            <a:ext cx="3383280" cy="2651760"/>
+            <a:off x="731520" y="3154680"/>
+            <a:ext cx="3383280" cy="3154680"/>
           </a:xfrm>
           <a:prstGeom prst="roundRect">
             <a:avLst/>
@@ -5772,71 +6601,100 @@
           </a:fontRef>
         </p:style>
         <p:txBody>
-          <a:bodyPr rtlCol="0" anchor="ctr"/>
-          <a:lstStyle/>
-          <a:p>
-            <a:pPr algn="ctr"/>
-          </a:p>
-        </p:txBody>
-      </p:sp>
-      <p:sp>
-        <p:nvSpPr>
-          <p:cNvPr id="9" name="TextBox 8"/>
-          <p:cNvSpPr txBox="1"/>
+          <a:bodyPr wrap="square" lIns="228600" tIns="228600" rIns="228600" rtlCol="0" anchor="ctr"/>
+          <a:lstStyle/>
+          <a:p>
+            <a:pPr algn="ctr">
+              <a:spcAft>
+                <a:spcPts val="1000"/>
+              </a:spcAft>
+              <a:defRPr sz="1500" b="1">
+                <a:solidFill>
+                  <a:srgbClr val="2563EB"/>
+                </a:solidFill>
+                <a:latin typeface="Arial"/>
+              </a:defRPr>
+            </a:pPr>
+            <a:r>
+              <a:t>Plant MTBF: 70.9 hrs</a:t>
+            </a:r>
+          </a:p>
+          <a:p>
+            <a:pPr>
+              <a:spcAft>
+                <a:spcPts val="600"/>
+              </a:spcAft>
+              <a:defRPr sz="1050">
+                <a:solidFill>
+                  <a:srgbClr val="1E293B"/>
+                </a:solidFill>
+                <a:latin typeface="Arial"/>
+              </a:defRPr>
+            </a:pPr>
+            <a:r>
+              <a:t>•  Mean Time Between Failures.</a:t>
+            </a:r>
+          </a:p>
+          <a:p>
+            <a:pPr>
+              <a:spcAft>
+                <a:spcPts val="600"/>
+              </a:spcAft>
+              <a:defRPr sz="1050">
+                <a:solidFill>
+                  <a:srgbClr val="1E293B"/>
+                </a:solidFill>
+                <a:latin typeface="Arial"/>
+              </a:defRPr>
+            </a:pPr>
+            <a:r>
+              <a:t>•  Calculated live across 4,250+ operating hours.</a:t>
+            </a:r>
+          </a:p>
+          <a:p>
+            <a:pPr>
+              <a:spcAft>
+                <a:spcPts val="600"/>
+              </a:spcAft>
+              <a:defRPr sz="1050">
+                <a:solidFill>
+                  <a:srgbClr val="1E293B"/>
+                </a:solidFill>
+                <a:latin typeface="Arial"/>
+              </a:defRPr>
+            </a:pPr>
+            <a:r>
+              <a:t>•  Measures average machine uptime between breakdowns.</a:t>
+            </a:r>
+          </a:p>
+          <a:p>
+            <a:pPr>
+              <a:spcAft>
+                <a:spcPts val="600"/>
+              </a:spcAft>
+              <a:defRPr sz="1050">
+                <a:solidFill>
+                  <a:srgbClr val="1E293B"/>
+                </a:solidFill>
+                <a:latin typeface="Arial"/>
+              </a:defRPr>
+            </a:pPr>
+            <a:r>
+              <a:t>•  Recalculates dynamically whenever any stoppage is logged.</a:t>
+            </a:r>
+          </a:p>
+        </p:txBody>
+      </p:sp>
+      <p:sp>
+        <p:nvSpPr>
+          <p:cNvPr id="7" name="Rounded Rectangle 6"/>
+          <p:cNvSpPr/>
           <p:nvPr/>
         </p:nvSpPr>
         <p:spPr>
           <a:xfrm>
-            <a:off x="914400" y="3566160"/>
-            <a:ext cx="3017520" cy="2286000"/>
-          </a:xfrm>
-          <a:prstGeom prst="rect">
-            <a:avLst/>
-          </a:prstGeom>
-          <a:noFill/>
-        </p:spPr>
-        <p:txBody>
-          <a:bodyPr wrap="none">
-            <a:spAutoFit/>
-          </a:bodyPr>
-          <a:lstStyle/>
-          <a:p>
-            <a:pPr>
-              <a:defRPr sz="1800" b="1">
-                <a:solidFill>
-                  <a:srgbClr val="2563EB"/>
-                </a:solidFill>
-              </a:defRPr>
-            </a:pPr>
-            <a:r>
-              <a:t>Plant MTBF: 70.9 hrs</a:t>
-            </a:r>
-          </a:p>
-          <a:p>
-            <a:br/>
-            <a:pPr>
-              <a:defRPr sz="1200">
-                <a:solidFill>
-                  <a:srgbClr val="64748B"/>
-                </a:solidFill>
-              </a:defRPr>
-            </a:pPr>
-            <a:r>
-              <a:t>Calculated live across 4,250+ operating hours. Updates instantaneously whenever an operator logs an incident.</a:t>
-            </a:r>
-          </a:p>
-        </p:txBody>
-      </p:sp>
-      <p:sp>
-        <p:nvSpPr>
-          <p:cNvPr id="10" name="Rounded Rectangle 9"/>
-          <p:cNvSpPr/>
-          <p:nvPr/>
-        </p:nvSpPr>
-        <p:spPr>
-          <a:xfrm>
-            <a:off x="4389120" y="3383280"/>
-            <a:ext cx="3383280" cy="2651760"/>
+            <a:off x="4389120" y="3154680"/>
+            <a:ext cx="3383280" cy="3154680"/>
           </a:xfrm>
           <a:prstGeom prst="roundRect">
             <a:avLst/>
@@ -5865,71 +6723,100 @@
           </a:fontRef>
         </p:style>
         <p:txBody>
-          <a:bodyPr rtlCol="0" anchor="ctr"/>
-          <a:lstStyle/>
-          <a:p>
-            <a:pPr algn="ctr"/>
-          </a:p>
-        </p:txBody>
-      </p:sp>
-      <p:sp>
-        <p:nvSpPr>
-          <p:cNvPr id="11" name="TextBox 10"/>
-          <p:cNvSpPr txBox="1"/>
+          <a:bodyPr wrap="square" lIns="228600" tIns="228600" rIns="228600" rtlCol="0" anchor="ctr"/>
+          <a:lstStyle/>
+          <a:p>
+            <a:pPr algn="ctr">
+              <a:spcAft>
+                <a:spcPts val="1000"/>
+              </a:spcAft>
+              <a:defRPr sz="1500" b="1">
+                <a:solidFill>
+                  <a:srgbClr val="F59E0B"/>
+                </a:solidFill>
+                <a:latin typeface="Arial"/>
+              </a:defRPr>
+            </a:pPr>
+            <a:r>
+              <a:t>Plant MTTR: 66.2 mins</a:t>
+            </a:r>
+          </a:p>
+          <a:p>
+            <a:pPr>
+              <a:spcAft>
+                <a:spcPts val="600"/>
+              </a:spcAft>
+              <a:defRPr sz="1050">
+                <a:solidFill>
+                  <a:srgbClr val="1E293B"/>
+                </a:solidFill>
+                <a:latin typeface="Arial"/>
+              </a:defRPr>
+            </a:pPr>
+            <a:r>
+              <a:t>•  Mean Time to Repair.</a:t>
+            </a:r>
+          </a:p>
+          <a:p>
+            <a:pPr>
+              <a:spcAft>
+                <a:spcPts val="600"/>
+              </a:spcAft>
+              <a:defRPr sz="1050">
+                <a:solidFill>
+                  <a:srgbClr val="1E293B"/>
+                </a:solidFill>
+                <a:latin typeface="Arial"/>
+              </a:defRPr>
+            </a:pPr>
+            <a:r>
+              <a:t>•  Computed as exact mean(end - start) duration.</a:t>
+            </a:r>
+          </a:p>
+          <a:p>
+            <a:pPr>
+              <a:spcAft>
+                <a:spcPts val="600"/>
+              </a:spcAft>
+              <a:defRPr sz="1050">
+                <a:solidFill>
+                  <a:srgbClr val="1E293B"/>
+                </a:solidFill>
+                <a:latin typeface="Arial"/>
+              </a:defRPr>
+            </a:pPr>
+            <a:r>
+              <a:t>•  Measures maintenance speed &amp; repair turnaround efficiency.</a:t>
+            </a:r>
+          </a:p>
+          <a:p>
+            <a:pPr>
+              <a:spcAft>
+                <a:spcPts val="600"/>
+              </a:spcAft>
+              <a:defRPr sz="1050">
+                <a:solidFill>
+                  <a:srgbClr val="1E293B"/>
+                </a:solidFill>
+                <a:latin typeface="Arial"/>
+              </a:defRPr>
+            </a:pPr>
+            <a:r>
+              <a:t>•  Distinguishes fast sensor resets (15m) from motor repairs (120m).</a:t>
+            </a:r>
+          </a:p>
+        </p:txBody>
+      </p:sp>
+      <p:sp>
+        <p:nvSpPr>
+          <p:cNvPr id="8" name="Rounded Rectangle 7"/>
+          <p:cNvSpPr/>
           <p:nvPr/>
         </p:nvSpPr>
         <p:spPr>
           <a:xfrm>
-            <a:off x="4572000" y="3566160"/>
-            <a:ext cx="3017520" cy="2286000"/>
-          </a:xfrm>
-          <a:prstGeom prst="rect">
-            <a:avLst/>
-          </a:prstGeom>
-          <a:noFill/>
-        </p:spPr>
-        <p:txBody>
-          <a:bodyPr wrap="none">
-            <a:spAutoFit/>
-          </a:bodyPr>
-          <a:lstStyle/>
-          <a:p>
-            <a:pPr>
-              <a:defRPr sz="1800" b="1">
-                <a:solidFill>
-                  <a:srgbClr val="F59E0B"/>
-                </a:solidFill>
-              </a:defRPr>
-            </a:pPr>
-            <a:r>
-              <a:t>Plant MTTR: 66.2 mins</a:t>
-            </a:r>
-          </a:p>
-          <a:p>
-            <a:br/>
-            <a:pPr>
-              <a:defRPr sz="1200">
-                <a:solidFill>
-                  <a:srgbClr val="64748B"/>
-                </a:solidFill>
-              </a:defRPr>
-            </a:pPr>
-            <a:r>
-              <a:t>Mean Time to Repair tracks technician response &amp; fix speed. Highlights complex mechanical vs fast electrical resets.</a:t>
-            </a:r>
-          </a:p>
-        </p:txBody>
-      </p:sp>
-      <p:sp>
-        <p:nvSpPr>
-          <p:cNvPr id="12" name="Rounded Rectangle 11"/>
-          <p:cNvSpPr/>
-          <p:nvPr/>
-        </p:nvSpPr>
-        <p:spPr>
-          <a:xfrm>
-            <a:off x="8046720" y="3383280"/>
-            <a:ext cx="3383280" cy="2651760"/>
+            <a:off x="8046720" y="3154680"/>
+            <a:ext cx="3383280" cy="3154680"/>
           </a:xfrm>
           <a:prstGeom prst="roundRect">
             <a:avLst/>
@@ -5958,40 +6845,18 @@
           </a:fontRef>
         </p:style>
         <p:txBody>
-          <a:bodyPr rtlCol="0" anchor="ctr"/>
-          <a:lstStyle/>
-          <a:p>
-            <a:pPr algn="ctr"/>
-          </a:p>
-        </p:txBody>
-      </p:sp>
-      <p:sp>
-        <p:nvSpPr>
-          <p:cNvPr id="13" name="TextBox 12"/>
-          <p:cNvSpPr txBox="1"/>
-          <p:nvPr/>
-        </p:nvSpPr>
-        <p:spPr>
-          <a:xfrm>
-            <a:off x="8229600" y="3566160"/>
-            <a:ext cx="3017520" cy="2286000"/>
-          </a:xfrm>
-          <a:prstGeom prst="rect">
-            <a:avLst/>
-          </a:prstGeom>
-          <a:noFill/>
-        </p:spPr>
-        <p:txBody>
-          <a:bodyPr wrap="none">
-            <a:spAutoFit/>
-          </a:bodyPr>
-          <a:lstStyle/>
-          <a:p>
-            <a:pPr>
-              <a:defRPr sz="1800" b="1">
+          <a:bodyPr wrap="square" lIns="228600" tIns="228600" rIns="228600" rtlCol="0" anchor="ctr"/>
+          <a:lstStyle/>
+          <a:p>
+            <a:pPr algn="ctr">
+              <a:spcAft>
+                <a:spcPts val="1000"/>
+              </a:spcAft>
+              <a:defRPr sz="1500" b="1">
                 <a:solidFill>
                   <a:srgbClr val="10B981"/>
                 </a:solidFill>
+                <a:latin typeface="Arial"/>
               </a:defRPr>
             </a:pPr>
             <a:r>
@@ -5999,16 +6864,51 @@
             </a:r>
           </a:p>
           <a:p>
-            <a:br/>
-            <a:pPr>
-              <a:defRPr sz="1200">
-                <a:solidFill>
-                  <a:srgbClr val="64748B"/>
-                </a:solidFill>
-              </a:defRPr>
-            </a:pPr>
-            <a:r>
-              <a:t>Live availability gauge benchmarks plant productivity against world-class OEE maintenance targets (&gt;95%).</a:t>
+            <a:pPr>
+              <a:spcAft>
+                <a:spcPts val="600"/>
+              </a:spcAft>
+              <a:defRPr sz="1050">
+                <a:solidFill>
+                  <a:srgbClr val="1E293B"/>
+                </a:solidFill>
+                <a:latin typeface="Arial"/>
+              </a:defRPr>
+            </a:pPr>
+            <a:r>
+              <a:t>•  Plant Operational Availability.</a:t>
+            </a:r>
+          </a:p>
+          <a:p>
+            <a:pPr>
+              <a:spcAft>
+                <a:spcPts val="600"/>
+              </a:spcAft>
+              <a:defRPr sz="1050">
+                <a:solidFill>
+                  <a:srgbClr val="1E293B"/>
+                </a:solidFill>
+                <a:latin typeface="Arial"/>
+              </a:defRPr>
+            </a:pPr>
+            <a:r>
+              <a:t>•  Benchmarks plant productivity against world-class OEE targets (&gt;95%).</a:t>
+            </a:r>
+          </a:p>
+          <a:p>
+            <a:pPr>
+              <a:spcAft>
+                <a:spcPts val="600"/>
+              </a:spcAft>
+              <a:defRPr sz="1050">
+                <a:solidFill>
+                  <a:srgbClr val="1E293B"/>
+                </a:solidFill>
+                <a:latin typeface="Arial"/>
+              </a:defRPr>
+            </a:pPr>
+            <a:r>
+              <a:t>•  Health badges per machine: Excellent (&gt;=95%), Moderate (85-95%), Critical Attention (&lt;85%).</a:t>
             </a:r>
           </a:p>
         </p:txBody>
@@ -6022,7 +6922,7 @@
 </file>
 
 <file path=ppt/slides/slide6.xml><?xml version="1.0" encoding="utf-8"?>
-<p:sld xmlns:a="http://schemas.openxmlformats.org/drawingml/2006/main" xmlns:p="http://schemas.openxmlformats.org/presentationml/2006/main" xmlns:r="http://schemas.openxmlformats.org/officeDocument/2006/relationships">
+<p:sld xmlns:a="http://schemas.openxmlformats.org/drawingml/2006/main" xmlns:r="http://schemas.openxmlformats.org/officeDocument/2006/relationships" xmlns:p="http://schemas.openxmlformats.org/presentationml/2006/main">
   <p:cSld>
     <p:spTree>
       <p:nvGrpSpPr>
@@ -6030,7 +6930,14 @@
         <p:cNvGrpSpPr/>
         <p:nvPr/>
       </p:nvGrpSpPr>
-      <p:grpSpPr/>
+      <p:grpSpPr>
+        <a:xfrm>
+          <a:off x="0" y="0"/>
+          <a:ext cx="0" cy="0"/>
+          <a:chOff x="0" y="0"/>
+          <a:chExt cx="0" cy="0"/>
+        </a:xfrm>
+      </p:grpSpPr>
       <p:sp>
         <p:nvSpPr>
           <p:cNvPr id="2" name="Rectangle 1"/>
@@ -6071,32 +6978,51 @@
           <a:lstStyle/>
           <a:p>
             <a:pPr algn="ctr"/>
-          </a:p>
-        </p:txBody>
-      </p:sp>
-      <p:sp>
-        <p:nvSpPr>
-          <p:cNvPr id="3" name="TextBox 2"/>
-          <p:cNvSpPr txBox="1"/>
+            <a:endParaRPr/>
+          </a:p>
+        </p:txBody>
+      </p:sp>
+      <p:sp>
+        <p:nvSpPr>
+          <p:cNvPr id="3" name="Rectangle 2"/>
+          <p:cNvSpPr/>
           <p:nvPr/>
         </p:nvSpPr>
         <p:spPr>
           <a:xfrm>
-            <a:off x="731520" y="457200"/>
-            <a:ext cx="10515600" cy="320040"/>
+            <a:off x="731520" y="365760"/>
+            <a:ext cx="10728655" cy="1005840"/>
           </a:xfrm>
           <a:prstGeom prst="rect">
             <a:avLst/>
           </a:prstGeom>
           <a:noFill/>
+          <a:ln>
+            <a:noFill/>
+          </a:ln>
         </p:spPr>
-        <p:txBody>
-          <a:bodyPr wrap="none">
-            <a:spAutoFit/>
-          </a:bodyPr>
-          <a:lstStyle/>
-          <a:p>
-            <a:pPr>
+        <p:style>
+          <a:lnRef idx="1">
+            <a:schemeClr val="accent1"/>
+          </a:lnRef>
+          <a:fillRef idx="3">
+            <a:schemeClr val="accent1"/>
+          </a:fillRef>
+          <a:effectRef idx="2">
+            <a:schemeClr val="accent1"/>
+          </a:effectRef>
+          <a:fontRef idx="minor">
+            <a:schemeClr val="lt1"/>
+          </a:fontRef>
+        </p:style>
+        <p:txBody>
+          <a:bodyPr wrap="square" lIns="0" tIns="0" rIns="0" bIns="0" rtlCol="0" anchor="ctr"/>
+          <a:lstStyle/>
+          <a:p>
+            <a:pPr algn="ctr">
+              <a:spcAft>
+                <a:spcPts val="200"/>
+              </a:spcAft>
               <a:defRPr sz="1000" b="1">
                 <a:solidFill>
                   <a:srgbClr val="2563EB"/>
@@ -6105,37 +7031,14 @@
               </a:defRPr>
             </a:pPr>
             <a:r>
-              <a:t>PARETOFLOW | THE FOUR BITS</a:t>
-            </a:r>
-          </a:p>
-        </p:txBody>
-      </p:sp>
-      <p:sp>
-        <p:nvSpPr>
-          <p:cNvPr id="4" name="TextBox 3"/>
-          <p:cNvSpPr txBox="1"/>
-          <p:nvPr/>
-        </p:nvSpPr>
-        <p:spPr>
-          <a:xfrm>
-            <a:off x="731520" y="731520"/>
-            <a:ext cx="9601200" cy="640080"/>
-          </a:xfrm>
-          <a:prstGeom prst="rect">
-            <a:avLst/>
-          </a:prstGeom>
-          <a:noFill/>
-        </p:spPr>
-        <p:txBody>
-          <a:bodyPr wrap="none">
-            <a:spAutoFit/>
-          </a:bodyPr>
-          <a:lstStyle/>
+              <a:t>PARETOFLOW | TEAM THE FOUR BITS</a:t>
+            </a:r>
+          </a:p>
           <a:p>
             <a:pPr>
               <a:defRPr sz="2400" b="1">
                 <a:solidFill>
-                  <a:srgbClr val="0F172A"/>
+                  <a:srgbClr val="1E293B"/>
                 </a:solidFill>
                 <a:latin typeface="Arial"/>
               </a:defRPr>
@@ -6148,7 +7051,7 @@
       </p:sp>
       <p:pic>
         <p:nvPicPr>
-          <p:cNvPr id="5" name="Picture 4" descr="logo-icon.png"/>
+          <p:cNvPr id="4" name="Picture 3" descr="logo-icon.png"/>
           <p:cNvPicPr>
             <a:picLocks noChangeAspect="1"/>
           </p:cNvPicPr>
@@ -6162,8 +7065,8 @@
         </p:blipFill>
         <p:spPr>
           <a:xfrm>
-            <a:off x="10972800" y="457200"/>
-            <a:ext cx="548640" cy="403747"/>
+            <a:off x="11064240" y="365760"/>
+            <a:ext cx="502920" cy="370101"/>
           </a:xfrm>
           <a:prstGeom prst="rect">
             <a:avLst/>
@@ -6172,14 +7075,14 @@
       </p:pic>
       <p:sp>
         <p:nvSpPr>
-          <p:cNvPr id="6" name="Rounded Rectangle 5"/>
+          <p:cNvPr id="5" name="Rounded Rectangle 4"/>
           <p:cNvSpPr/>
           <p:nvPr/>
         </p:nvSpPr>
         <p:spPr>
           <a:xfrm>
             <a:off x="731520" y="1645920"/>
-            <a:ext cx="5120640" cy="4389120"/>
+            <a:ext cx="5212080" cy="4663440"/>
           </a:xfrm>
           <a:prstGeom prst="roundRect">
             <a:avLst/>
@@ -6208,98 +7111,116 @@
           </a:fontRef>
         </p:style>
         <p:txBody>
-          <a:bodyPr rtlCol="0" anchor="ctr"/>
-          <a:lstStyle/>
-          <a:p>
-            <a:pPr algn="ctr"/>
-          </a:p>
-        </p:txBody>
-      </p:sp>
-      <p:sp>
-        <p:nvSpPr>
-          <p:cNvPr id="7" name="TextBox 6"/>
-          <p:cNvSpPr txBox="1"/>
+          <a:bodyPr wrap="square" lIns="274320" tIns="274320" rIns="274320" rtlCol="0" anchor="ctr"/>
+          <a:lstStyle/>
+          <a:p>
+            <a:pPr algn="ctr">
+              <a:spcAft>
+                <a:spcPts val="1200"/>
+              </a:spcAft>
+              <a:defRPr sz="1600" b="1">
+                <a:solidFill>
+                  <a:srgbClr val="2563EB"/>
+                </a:solidFill>
+                <a:latin typeface="Arial"/>
+              </a:defRPr>
+            </a:pPr>
+            <a:r>
+              <a:t>Isolating the Vital Few Root Causes</a:t>
+            </a:r>
+          </a:p>
+          <a:p>
+            <a:pPr>
+              <a:spcAft>
+                <a:spcPts val="700"/>
+              </a:spcAft>
+              <a:defRPr sz="1100">
+                <a:solidFill>
+                  <a:srgbClr val="1E293B"/>
+                </a:solidFill>
+                <a:latin typeface="Arial"/>
+              </a:defRPr>
+            </a:pPr>
+            <a:r>
+              <a:t>•  Dual-Axis Composed Chart: Left Y-axis ranks downtime minutes per cause in descending order; Right Y-axis plots cumulative percentage curve from 0% to 100%.</a:t>
+            </a:r>
+          </a:p>
+          <a:p>
+            <a:pPr>
+              <a:spcAft>
+                <a:spcPts val="700"/>
+              </a:spcAft>
+              <a:defRPr sz="1100">
+                <a:solidFill>
+                  <a:srgbClr val="1E293B"/>
+                </a:solidFill>
+                <a:latin typeface="Arial"/>
+              </a:defRPr>
+            </a:pPr>
+            <a:r>
+              <a:t>•  80% Pareto Reference Cutoff: A dashed threshold clearly separates the 'Vital Few' causes from the 'Useful Many'.</a:t>
+            </a:r>
+          </a:p>
+          <a:p>
+            <a:pPr>
+              <a:spcAft>
+                <a:spcPts val="700"/>
+              </a:spcAft>
+              <a:defRPr sz="1100">
+                <a:solidFill>
+                  <a:srgbClr val="1E293B"/>
+                </a:solidFill>
+                <a:latin typeface="Arial"/>
+              </a:defRPr>
+            </a:pPr>
+            <a:r>
+              <a:t>•  Vital Few Badges: Automatically names and highlights the top drivers in amber and red callouts.</a:t>
+            </a:r>
+          </a:p>
+          <a:p>
+            <a:pPr>
+              <a:spcAft>
+                <a:spcPts val="700"/>
+              </a:spcAft>
+              <a:defRPr sz="1100">
+                <a:solidFill>
+                  <a:srgbClr val="1E293B"/>
+                </a:solidFill>
+                <a:latin typeface="Arial"/>
+              </a:defRPr>
+            </a:pPr>
+            <a:r>
+              <a:t>•  Interactive Tooltips: Displays exact stoppage minutes, total failure count, average duration per incident, and percentage contribution.</a:t>
+            </a:r>
+          </a:p>
+          <a:p>
+            <a:pPr>
+              <a:spcAft>
+                <a:spcPts val="700"/>
+              </a:spcAft>
+              <a:defRPr sz="1100">
+                <a:solidFill>
+                  <a:srgbClr val="1E293B"/>
+                </a:solidFill>
+                <a:latin typeface="Arial"/>
+              </a:defRPr>
+            </a:pPr>
+            <a:r>
+              <a:t>•  The Golden Rule of Maintenance: Fixing just the top 2 causes resolves ~77% of all factory downtime minutes!</a:t>
+            </a:r>
+          </a:p>
+        </p:txBody>
+      </p:sp>
+      <p:sp>
+        <p:nvSpPr>
+          <p:cNvPr id="6" name="Rounded Rectangle 5"/>
+          <p:cNvSpPr/>
           <p:nvPr/>
         </p:nvSpPr>
         <p:spPr>
           <a:xfrm>
-            <a:off x="1005840" y="1828800"/>
-            <a:ext cx="4572000" cy="3931920"/>
-          </a:xfrm>
-          <a:prstGeom prst="rect">
-            <a:avLst/>
-          </a:prstGeom>
-          <a:noFill/>
-        </p:spPr>
-        <p:txBody>
-          <a:bodyPr wrap="none">
-            <a:spAutoFit/>
-          </a:bodyPr>
-          <a:lstStyle/>
-          <a:p>
-            <a:pPr>
-              <a:defRPr sz="1800" b="1">
-                <a:solidFill>
-                  <a:srgbClr val="2563EB"/>
-                </a:solidFill>
-              </a:defRPr>
-            </a:pPr>
-            <a:r>
-              <a:t>Clear Identification of the 'Vital Few'</a:t>
-            </a:r>
-          </a:p>
-          <a:p>
-            <a:br/>
-            <a:pPr>
-              <a:defRPr sz="1250">
-                <a:solidFill>
-                  <a:srgbClr val="0F172A"/>
-                </a:solidFill>
-              </a:defRPr>
-            </a:pPr>
-            <a:r>
-              <a:t>• Dual-Axis Interactive Chart:</a:t>
-            </a:r>
-            <a:br/>
-            <a:r>
-              <a:t>  - Left Axis (Bars): Downtime minutes per cause ranked in descending order.</a:t>
-            </a:r>
-            <a:br/>
-            <a:r>
-              <a:t>  - Right Axis (Curve): Cumulative percentage curve from 0% to 100%.</a:t>
-            </a:r>
-            <a:br/>
-            <a:br/>
-            <a:r>
-              <a:t>• 80% Cutoff Threshold:</a:t>
-            </a:r>
-            <a:br/>
-            <a:r>
-              <a:t>  - Visually separates the Vital Few (80% impact) from the Useful Many (20% impact).</a:t>
-            </a:r>
-            <a:br/>
-            <a:br/>
-            <a:r>
-              <a:t>• The Golden Rule of Maintenance:</a:t>
-            </a:r>
-            <a:br/>
-            <a:r>
-              <a:t>  - Eliminating the top 2 causes resolves ~77% of all factory downtime minutes!</a:t>
-            </a:r>
-            <a:br/>
-          </a:p>
-        </p:txBody>
-      </p:sp>
-      <p:sp>
-        <p:nvSpPr>
-          <p:cNvPr id="8" name="Rounded Rectangle 7"/>
-          <p:cNvSpPr/>
-          <p:nvPr/>
-        </p:nvSpPr>
-        <p:spPr>
-          <a:xfrm>
-            <a:off x="6126480" y="1645920"/>
-            <a:ext cx="5303520" cy="4389120"/>
+            <a:off x="6245352" y="1645920"/>
+            <a:ext cx="5212080" cy="4663440"/>
           </a:xfrm>
           <a:prstGeom prst="roundRect">
             <a:avLst/>
@@ -6328,93 +7249,111 @@
           </a:fontRef>
         </p:style>
         <p:txBody>
-          <a:bodyPr rtlCol="0" anchor="ctr"/>
-          <a:lstStyle/>
-          <a:p>
-            <a:pPr algn="ctr"/>
-          </a:p>
-        </p:txBody>
-      </p:sp>
-      <p:sp>
-        <p:nvSpPr>
-          <p:cNvPr id="9" name="TextBox 8"/>
-          <p:cNvSpPr txBox="1"/>
-          <p:nvPr/>
-        </p:nvSpPr>
-        <p:spPr>
-          <a:xfrm>
-            <a:off x="6400800" y="1828800"/>
-            <a:ext cx="4754880" cy="3931920"/>
-          </a:xfrm>
-          <a:prstGeom prst="rect">
-            <a:avLst/>
-          </a:prstGeom>
-          <a:noFill/>
-        </p:spPr>
-        <p:txBody>
-          <a:bodyPr wrap="none">
-            <a:spAutoFit/>
-          </a:bodyPr>
-          <a:lstStyle/>
-          <a:p>
-            <a:pPr>
-              <a:defRPr sz="1800" b="1">
+          <a:bodyPr wrap="square" lIns="274320" tIns="274320" rIns="274320" rtlCol="0" anchor="ctr"/>
+          <a:lstStyle/>
+          <a:p>
+            <a:pPr algn="ctr">
+              <a:spcAft>
+                <a:spcPts val="1200"/>
+              </a:spcAft>
+              <a:defRPr sz="1600" b="1">
                 <a:solidFill>
                   <a:srgbClr val="EF4444"/>
                 </a:solidFill>
-              </a:defRPr>
-            </a:pPr>
-            <a:r>
-              <a:t>Dataset Story: 60 Events over 30 Days</a:t>
-            </a:r>
-          </a:p>
-          <a:p>
+                <a:latin typeface="Arial"/>
+              </a:defRPr>
+            </a:pPr>
+            <a:r>
+              <a:t>Dataset Breakdown: 60 Events over 30 Days</a:t>
+            </a:r>
+          </a:p>
+          <a:p>
+            <a:pPr>
+              <a:spcAft>
+                <a:spcPts val="700"/>
+              </a:spcAft>
+              <a:defRPr sz="1050">
+                <a:solidFill>
+                  <a:srgbClr val="1E293B"/>
+                </a:solidFill>
+                <a:latin typeface="Arial"/>
+              </a:defRPr>
+            </a:pPr>
+            <a:r>
+              <a:t>•  Rank #1: Motor Overheating (MTR-OVH)</a:t>
+            </a:r>
             <a:br/>
-            <a:pPr>
-              <a:defRPr sz="1250">
-                <a:solidFill>
-                  <a:srgbClr val="0F172A"/>
-                </a:solidFill>
-              </a:defRPr>
-            </a:pPr>
-            <a:r>
-              <a:t>Top Causes Ranked by Downtime:</a:t>
+            <a:r>
+              <a:t>  - 2,150+ minutes (~54.2% of total downtime minutes).</a:t>
             </a:r>
             <a:br/>
             <a:r>
-              <a:t>1. Motor Overheating (MTR-OVH)</a:t>
+              <a:t>  - Vital Few Root Cause #1.</a:t>
+            </a:r>
+          </a:p>
+          <a:p>
+            <a:pPr>
+              <a:spcAft>
+                <a:spcPts val="700"/>
+              </a:spcAft>
+              <a:defRPr sz="1050">
+                <a:solidFill>
+                  <a:srgbClr val="1E293B"/>
+                </a:solidFill>
+                <a:latin typeface="Arial"/>
+              </a:defRPr>
+            </a:pPr>
+            <a:r>
+              <a:t>•  Rank #2: Conveyor Belt Jam (CNV-JAM)</a:t>
             </a:r>
             <a:br/>
             <a:r>
-              <a:t>   • 2,150+ minutes (~54.2% of total downtime)</a:t>
+              <a:t>  - 910+ minutes (~22.8% of total downtime minutes).</a:t>
             </a:r>
             <a:br/>
             <a:r>
-              <a:t>   • Vital Few Driver #1</a:t>
+              <a:t>  - Vital Few Root Cause #2.</a:t>
+            </a:r>
+          </a:p>
+          <a:p>
+            <a:pPr>
+              <a:spcAft>
+                <a:spcPts val="700"/>
+              </a:spcAft>
+              <a:defRPr sz="1050">
+                <a:solidFill>
+                  <a:srgbClr val="1E293B"/>
+                </a:solidFill>
+                <a:latin typeface="Arial"/>
+              </a:defRPr>
+            </a:pPr>
+            <a:r>
+              <a:t>•  The Remaining 6 Controlled Causes Combined:</a:t>
             </a:r>
             <a:br/>
+            <a:r>
+              <a:t>  - Sensor Misalignment, Hydraulic Leaks, Tool Wear, Electrical Trips, Shift Delay, Material Defect.</a:t>
+            </a:r>
             <a:br/>
             <a:r>
-              <a:t>2. Conveyor Belt Jam (CNV-JAM)</a:t>
-            </a:r>
-            <a:br/>
-            <a:r>
-              <a:t>   • 910+ minutes (~22.8% of total downtime)</a:t>
-            </a:r>
-            <a:br/>
-            <a:r>
-              <a:t>   • Vital Few Driver #2</a:t>
-            </a:r>
-            <a:br/>
-            <a:br/>
-            <a:r>
-              <a:t>Remaining 6 Causes (Sensor, Tooling, Hydraulics...):</a:t>
-            </a:r>
-            <a:br/>
-            <a:r>
-              <a:t>   • Account for only ~23% of total downtime combined!</a:t>
-            </a:r>
-            <a:br/>
+              <a:t>  - Account for only ~23% of total downtime combined.</a:t>
+            </a:r>
+          </a:p>
+          <a:p>
+            <a:pPr>
+              <a:spcAft>
+                <a:spcPts val="700"/>
+              </a:spcAft>
+              <a:defRPr sz="1050">
+                <a:solidFill>
+                  <a:srgbClr val="1E293B"/>
+                </a:solidFill>
+                <a:latin typeface="Arial"/>
+              </a:defRPr>
+            </a:pPr>
+            <a:r>
+              <a:t>•  Takeaway: Plant managers should focus preventive actions on motor cooling and conveyor guides to eliminate 77%+ of losses.</a:t>
+            </a:r>
           </a:p>
         </p:txBody>
       </p:sp>
@@ -6427,7 +7366,7 @@
 </file>
 
 <file path=ppt/slides/slide7.xml><?xml version="1.0" encoding="utf-8"?>
-<p:sld xmlns:a="http://schemas.openxmlformats.org/drawingml/2006/main" xmlns:p="http://schemas.openxmlformats.org/presentationml/2006/main" xmlns:r="http://schemas.openxmlformats.org/officeDocument/2006/relationships">
+<p:sld xmlns:a="http://schemas.openxmlformats.org/drawingml/2006/main" xmlns:r="http://schemas.openxmlformats.org/officeDocument/2006/relationships" xmlns:p="http://schemas.openxmlformats.org/presentationml/2006/main">
   <p:cSld>
     <p:spTree>
       <p:nvGrpSpPr>
@@ -6435,7 +7374,14 @@
         <p:cNvGrpSpPr/>
         <p:nvPr/>
       </p:nvGrpSpPr>
-      <p:grpSpPr/>
+      <p:grpSpPr>
+        <a:xfrm>
+          <a:off x="0" y="0"/>
+          <a:ext cx="0" cy="0"/>
+          <a:chOff x="0" y="0"/>
+          <a:chExt cx="0" cy="0"/>
+        </a:xfrm>
+      </p:grpSpPr>
       <p:sp>
         <p:nvSpPr>
           <p:cNvPr id="2" name="Rectangle 1"/>
@@ -6476,32 +7422,51 @@
           <a:lstStyle/>
           <a:p>
             <a:pPr algn="ctr"/>
-          </a:p>
-        </p:txBody>
-      </p:sp>
-      <p:sp>
-        <p:nvSpPr>
-          <p:cNvPr id="3" name="TextBox 2"/>
-          <p:cNvSpPr txBox="1"/>
+            <a:endParaRPr/>
+          </a:p>
+        </p:txBody>
+      </p:sp>
+      <p:sp>
+        <p:nvSpPr>
+          <p:cNvPr id="3" name="Rectangle 2"/>
+          <p:cNvSpPr/>
           <p:nvPr/>
         </p:nvSpPr>
         <p:spPr>
           <a:xfrm>
-            <a:off x="731520" y="457200"/>
-            <a:ext cx="10515600" cy="320040"/>
+            <a:off x="731520" y="365760"/>
+            <a:ext cx="10728655" cy="1005840"/>
           </a:xfrm>
           <a:prstGeom prst="rect">
             <a:avLst/>
           </a:prstGeom>
           <a:noFill/>
+          <a:ln>
+            <a:noFill/>
+          </a:ln>
         </p:spPr>
-        <p:txBody>
-          <a:bodyPr wrap="none">
-            <a:spAutoFit/>
-          </a:bodyPr>
-          <a:lstStyle/>
-          <a:p>
-            <a:pPr>
+        <p:style>
+          <a:lnRef idx="1">
+            <a:schemeClr val="accent1"/>
+          </a:lnRef>
+          <a:fillRef idx="3">
+            <a:schemeClr val="accent1"/>
+          </a:fillRef>
+          <a:effectRef idx="2">
+            <a:schemeClr val="accent1"/>
+          </a:effectRef>
+          <a:fontRef idx="minor">
+            <a:schemeClr val="lt1"/>
+          </a:fontRef>
+        </p:style>
+        <p:txBody>
+          <a:bodyPr wrap="square" lIns="0" tIns="0" rIns="0" bIns="0" rtlCol="0" anchor="ctr"/>
+          <a:lstStyle/>
+          <a:p>
+            <a:pPr algn="ctr">
+              <a:spcAft>
+                <a:spcPts val="200"/>
+              </a:spcAft>
               <a:defRPr sz="1000" b="1">
                 <a:solidFill>
                   <a:srgbClr val="2563EB"/>
@@ -6510,37 +7475,14 @@
               </a:defRPr>
             </a:pPr>
             <a:r>
-              <a:t>PARETOFLOW | THE FOUR BITS</a:t>
-            </a:r>
-          </a:p>
-        </p:txBody>
-      </p:sp>
-      <p:sp>
-        <p:nvSpPr>
-          <p:cNvPr id="4" name="TextBox 3"/>
-          <p:cNvSpPr txBox="1"/>
-          <p:nvPr/>
-        </p:nvSpPr>
-        <p:spPr>
-          <a:xfrm>
-            <a:off x="731520" y="731520"/>
-            <a:ext cx="9601200" cy="640080"/>
-          </a:xfrm>
-          <a:prstGeom prst="rect">
-            <a:avLst/>
-          </a:prstGeom>
-          <a:noFill/>
-        </p:spPr>
-        <p:txBody>
-          <a:bodyPr wrap="none">
-            <a:spAutoFit/>
-          </a:bodyPr>
-          <a:lstStyle/>
+              <a:t>PARETOFLOW | TEAM THE FOUR BITS</a:t>
+            </a:r>
+          </a:p>
           <a:p>
             <a:pPr>
               <a:defRPr sz="2400" b="1">
                 <a:solidFill>
-                  <a:srgbClr val="0F172A"/>
+                  <a:srgbClr val="1E293B"/>
                 </a:solidFill>
                 <a:latin typeface="Arial"/>
               </a:defRPr>
@@ -6553,7 +7495,7 @@
       </p:sp>
       <p:pic>
         <p:nvPicPr>
-          <p:cNvPr id="5" name="Picture 4" descr="logo-icon.png"/>
+          <p:cNvPr id="4" name="Picture 3" descr="logo-icon.png"/>
           <p:cNvPicPr>
             <a:picLocks noChangeAspect="1"/>
           </p:cNvPicPr>
@@ -6567,8 +7509,8 @@
         </p:blipFill>
         <p:spPr>
           <a:xfrm>
-            <a:off x="10972800" y="457200"/>
-            <a:ext cx="548640" cy="403747"/>
+            <a:off x="11064240" y="365760"/>
+            <a:ext cx="502920" cy="370101"/>
           </a:xfrm>
           <a:prstGeom prst="rect">
             <a:avLst/>
@@ -6577,14 +7519,14 @@
       </p:pic>
       <p:sp>
         <p:nvSpPr>
-          <p:cNvPr id="6" name="Rounded Rectangle 5"/>
+          <p:cNvPr id="5" name="Rounded Rectangle 4"/>
           <p:cNvSpPr/>
           <p:nvPr/>
         </p:nvSpPr>
         <p:spPr>
           <a:xfrm>
             <a:off x="731520" y="1645920"/>
-            <a:ext cx="10728655" cy="1371600"/>
+            <a:ext cx="10728655" cy="1280160"/>
           </a:xfrm>
           <a:prstGeom prst="roundRect">
             <a:avLst/>
@@ -6613,70 +7555,49 @@
           </a:fontRef>
         </p:style>
         <p:txBody>
-          <a:bodyPr rtlCol="0" anchor="ctr"/>
-          <a:lstStyle/>
-          <a:p>
-            <a:pPr algn="ctr"/>
-          </a:p>
-        </p:txBody>
-      </p:sp>
-      <p:sp>
-        <p:nvSpPr>
-          <p:cNvPr id="7" name="TextBox 6"/>
-          <p:cNvSpPr txBox="1"/>
+          <a:bodyPr wrap="square" lIns="274320" tIns="164592" rtlCol="0" anchor="ctr"/>
+          <a:lstStyle/>
+          <a:p>
+            <a:pPr algn="ctr">
+              <a:spcAft>
+                <a:spcPts val="400"/>
+              </a:spcAft>
+              <a:defRPr sz="1400" b="1">
+                <a:solidFill>
+                  <a:srgbClr val="EF4444"/>
+                </a:solidFill>
+                <a:latin typeface="Arial"/>
+              </a:defRPr>
+            </a:pPr>
+            <a:r>
+              <a:t>CRITICAL ALERT TRIGGER: CNC-01 (CNC Milling Center 01) — Motor Overheating (3x in 7 Days)</a:t>
+            </a:r>
+          </a:p>
+          <a:p>
+            <a:pPr>
+              <a:defRPr sz="1100">
+                <a:solidFill>
+                  <a:srgbClr val="1E293B"/>
+                </a:solidFill>
+                <a:latin typeface="Arial"/>
+              </a:defRPr>
+            </a:pPr>
+            <a:r>
+              <a:t>Recommended RCA Directive: 'Repeated thermal trips on CNC Milling Center 01 spindle motor. Inspect coolant flow rate, heat sink cooling fan, and bearing lubrication immediately to avoid spindle burnout.'</a:t>
+            </a:r>
+          </a:p>
+        </p:txBody>
+      </p:sp>
+      <p:sp>
+        <p:nvSpPr>
+          <p:cNvPr id="6" name="Rounded Rectangle 5"/>
+          <p:cNvSpPr/>
           <p:nvPr/>
         </p:nvSpPr>
         <p:spPr>
           <a:xfrm>
-            <a:off x="1005840" y="1783080"/>
-            <a:ext cx="10149840" cy="1097280"/>
-          </a:xfrm>
-          <a:prstGeom prst="rect">
-            <a:avLst/>
-          </a:prstGeom>
-          <a:noFill/>
-        </p:spPr>
-        <p:txBody>
-          <a:bodyPr wrap="none">
-            <a:spAutoFit/>
-          </a:bodyPr>
-          <a:lstStyle/>
-          <a:p>
-            <a:pPr>
-              <a:defRPr sz="1500" b="1">
-                <a:solidFill>
-                  <a:srgbClr val="EF4444"/>
-                </a:solidFill>
-              </a:defRPr>
-            </a:pPr>
-            <a:r>
-              <a:t>CRITICAL ALERT TRIGGER: CNC-01 (CNC Milling Center 01) - Motor Overheating (3x in 7 Days)</a:t>
-            </a:r>
-          </a:p>
-          <a:p>
-            <a:pPr>
-              <a:defRPr sz="1200">
-                <a:solidFill>
-                  <a:srgbClr val="0F172A"/>
-                </a:solidFill>
-              </a:defRPr>
-            </a:pPr>
-            <a:r>
-              <a:t>Recommended RCA Directive: 'Repeated thermal trips on CNC Milling Center 01. Inspect coolant flow, fan operation, and motor bearing lubrication immediately to avoid spindle replacement.'</a:t>
-            </a:r>
-          </a:p>
-        </p:txBody>
-      </p:sp>
-      <p:sp>
-        <p:nvSpPr>
-          <p:cNvPr id="8" name="Rounded Rectangle 7"/>
-          <p:cNvSpPr/>
-          <p:nvPr/>
-        </p:nvSpPr>
-        <p:spPr>
-          <a:xfrm>
-            <a:off x="731520" y="3291840"/>
-            <a:ext cx="3383280" cy="2743200"/>
+            <a:off x="731520" y="3154680"/>
+            <a:ext cx="3383280" cy="3154680"/>
           </a:xfrm>
           <a:prstGeom prst="roundRect">
             <a:avLst/>
@@ -6705,71 +7626,84 @@
           </a:fontRef>
         </p:style>
         <p:txBody>
-          <a:bodyPr rtlCol="0" anchor="ctr"/>
-          <a:lstStyle/>
-          <a:p>
-            <a:pPr algn="ctr"/>
-          </a:p>
-        </p:txBody>
-      </p:sp>
-      <p:sp>
-        <p:nvSpPr>
-          <p:cNvPr id="9" name="TextBox 8"/>
-          <p:cNvSpPr txBox="1"/>
+          <a:bodyPr wrap="square" lIns="228600" tIns="228600" rIns="228600" rtlCol="0" anchor="ctr"/>
+          <a:lstStyle/>
+          <a:p>
+            <a:pPr algn="ctr">
+              <a:spcAft>
+                <a:spcPts val="1000"/>
+              </a:spcAft>
+              <a:defRPr sz="1500" b="1">
+                <a:solidFill>
+                  <a:srgbClr val="2563EB"/>
+                </a:solidFill>
+                <a:latin typeface="Arial"/>
+              </a:defRPr>
+            </a:pPr>
+            <a:r>
+              <a:t>Rolling 7-Day Window Sweep</a:t>
+            </a:r>
+          </a:p>
+          <a:p>
+            <a:pPr>
+              <a:spcAft>
+                <a:spcPts val="600"/>
+              </a:spcAft>
+              <a:defRPr sz="1050">
+                <a:solidFill>
+                  <a:srgbClr val="1E293B"/>
+                </a:solidFill>
+                <a:latin typeface="Arial"/>
+              </a:defRPr>
+            </a:pPr>
+            <a:r>
+              <a:t>•  Background analytics continuously monitor a sliding 168-hour window.</a:t>
+            </a:r>
+          </a:p>
+          <a:p>
+            <a:pPr>
+              <a:spcAft>
+                <a:spcPts val="600"/>
+              </a:spcAft>
+              <a:defRPr sz="1050">
+                <a:solidFill>
+                  <a:srgbClr val="1E293B"/>
+                </a:solidFill>
+                <a:latin typeface="Arial"/>
+              </a:defRPr>
+            </a:pPr>
+            <a:r>
+              <a:t>•  Flags any machine + reason combination occurring &gt;= 3 times.</a:t>
+            </a:r>
+          </a:p>
+          <a:p>
+            <a:pPr>
+              <a:spcAft>
+                <a:spcPts val="600"/>
+              </a:spcAft>
+              <a:defRPr sz="1050">
+                <a:solidFill>
+                  <a:srgbClr val="1E293B"/>
+                </a:solidFill>
+                <a:latin typeface="Arial"/>
+              </a:defRPr>
+            </a:pPr>
+            <a:r>
+              <a:t>•  Detects recurring minor stoppages before they cause catastrophic machine failure.</a:t>
+            </a:r>
+          </a:p>
+        </p:txBody>
+      </p:sp>
+      <p:sp>
+        <p:nvSpPr>
+          <p:cNvPr id="7" name="Rounded Rectangle 6"/>
+          <p:cNvSpPr/>
           <p:nvPr/>
         </p:nvSpPr>
         <p:spPr>
           <a:xfrm>
-            <a:off x="914400" y="3474720"/>
-            <a:ext cx="3017520" cy="2286000"/>
-          </a:xfrm>
-          <a:prstGeom prst="rect">
-            <a:avLst/>
-          </a:prstGeom>
-          <a:noFill/>
-        </p:spPr>
-        <p:txBody>
-          <a:bodyPr wrap="none">
-            <a:spAutoFit/>
-          </a:bodyPr>
-          <a:lstStyle/>
-          <a:p>
-            <a:pPr>
-              <a:defRPr sz="1600" b="1">
-                <a:solidFill>
-                  <a:srgbClr val="2563EB"/>
-                </a:solidFill>
-              </a:defRPr>
-            </a:pPr>
-            <a:r>
-              <a:t>Rolling Window Sweep</a:t>
-            </a:r>
-          </a:p>
-          <a:p>
-            <a:br/>
-            <a:pPr>
-              <a:defRPr sz="1200">
-                <a:solidFill>
-                  <a:srgbClr val="0F172A"/>
-                </a:solidFill>
-              </a:defRPr>
-            </a:pPr>
-            <a:r>
-              <a:t>Background analytical queries continuously monitor a rolling 168-hour (7-day) sliding window across all machines.</a:t>
-            </a:r>
-          </a:p>
-        </p:txBody>
-      </p:sp>
-      <p:sp>
-        <p:nvSpPr>
-          <p:cNvPr id="10" name="Rounded Rectangle 9"/>
-          <p:cNvSpPr/>
-          <p:nvPr/>
-        </p:nvSpPr>
-        <p:spPr>
-          <a:xfrm>
-            <a:off x="4389120" y="3291840"/>
-            <a:ext cx="3383280" cy="2743200"/>
+            <a:off x="4389120" y="3154680"/>
+            <a:ext cx="3383280" cy="3154680"/>
           </a:xfrm>
           <a:prstGeom prst="roundRect">
             <a:avLst/>
@@ -6798,71 +7732,84 @@
           </a:fontRef>
         </p:style>
         <p:txBody>
-          <a:bodyPr rtlCol="0" anchor="ctr"/>
-          <a:lstStyle/>
-          <a:p>
-            <a:pPr algn="ctr"/>
-          </a:p>
-        </p:txBody>
-      </p:sp>
-      <p:sp>
-        <p:nvSpPr>
-          <p:cNvPr id="11" name="TextBox 10"/>
-          <p:cNvSpPr txBox="1"/>
+          <a:bodyPr wrap="square" lIns="228600" tIns="228600" rIns="228600" rtlCol="0" anchor="ctr"/>
+          <a:lstStyle/>
+          <a:p>
+            <a:pPr algn="ctr">
+              <a:spcAft>
+                <a:spcPts val="1000"/>
+              </a:spcAft>
+              <a:defRPr sz="1500" b="1">
+                <a:solidFill>
+                  <a:srgbClr val="F59E0B"/>
+                </a:solidFill>
+                <a:latin typeface="Arial"/>
+              </a:defRPr>
+            </a:pPr>
+            <a:r>
+              <a:t>Dynamic RCA Advice Engine</a:t>
+            </a:r>
+          </a:p>
+          <a:p>
+            <a:pPr>
+              <a:spcAft>
+                <a:spcPts val="600"/>
+              </a:spcAft>
+              <a:defRPr sz="1050">
+                <a:solidFill>
+                  <a:srgbClr val="1E293B"/>
+                </a:solidFill>
+                <a:latin typeface="Arial"/>
+              </a:defRPr>
+            </a:pPr>
+            <a:r>
+              <a:t>•  Inspects the failure category and reason code.</a:t>
+            </a:r>
+          </a:p>
+          <a:p>
+            <a:pPr>
+              <a:spcAft>
+                <a:spcPts val="600"/>
+              </a:spcAft>
+              <a:defRPr sz="1050">
+                <a:solidFill>
+                  <a:srgbClr val="1E293B"/>
+                </a:solidFill>
+                <a:latin typeface="Arial"/>
+              </a:defRPr>
+            </a:pPr>
+            <a:r>
+              <a:t>•  Generates targeted, actionable engineering directives (coolant flow, bearing friction, sensor alignment).</a:t>
+            </a:r>
+          </a:p>
+          <a:p>
+            <a:pPr>
+              <a:spcAft>
+                <a:spcPts val="600"/>
+              </a:spcAft>
+              <a:defRPr sz="1050">
+                <a:solidFill>
+                  <a:srgbClr val="1E293B"/>
+                </a:solidFill>
+                <a:latin typeface="Arial"/>
+              </a:defRPr>
+            </a:pPr>
+            <a:r>
+              <a:t>•  Transforms raw data into instant maintenance action.</a:t>
+            </a:r>
+          </a:p>
+        </p:txBody>
+      </p:sp>
+      <p:sp>
+        <p:nvSpPr>
+          <p:cNvPr id="8" name="Rounded Rectangle 7"/>
+          <p:cNvSpPr/>
           <p:nvPr/>
         </p:nvSpPr>
         <p:spPr>
           <a:xfrm>
-            <a:off x="4572000" y="3474720"/>
-            <a:ext cx="3017520" cy="2286000"/>
-          </a:xfrm>
-          <a:prstGeom prst="rect">
-            <a:avLst/>
-          </a:prstGeom>
-          <a:noFill/>
-        </p:spPr>
-        <p:txBody>
-          <a:bodyPr wrap="none">
-            <a:spAutoFit/>
-          </a:bodyPr>
-          <a:lstStyle/>
-          <a:p>
-            <a:pPr>
-              <a:defRPr sz="1600" b="1">
-                <a:solidFill>
-                  <a:srgbClr val="F59E0B"/>
-                </a:solidFill>
-              </a:defRPr>
-            </a:pPr>
-            <a:r>
-              <a:t>Dynamic RCA Advice</a:t>
-            </a:r>
-          </a:p>
-          <a:p>
-            <a:br/>
-            <a:pPr>
-              <a:defRPr sz="1200">
-                <a:solidFill>
-                  <a:srgbClr val="0F172A"/>
-                </a:solidFill>
-              </a:defRPr>
-            </a:pPr>
-            <a:r>
-              <a:t>Platform inspects the failure category and automatically provides actionable troubleshooting guidance to engineers.</a:t>
-            </a:r>
-          </a:p>
-        </p:txBody>
-      </p:sp>
-      <p:sp>
-        <p:nvSpPr>
-          <p:cNvPr id="12" name="Rounded Rectangle 11"/>
-          <p:cNvSpPr/>
-          <p:nvPr/>
-        </p:nvSpPr>
-        <p:spPr>
-          <a:xfrm>
-            <a:off x="8046720" y="3291840"/>
-            <a:ext cx="3383280" cy="2743200"/>
+            <a:off x="8046720" y="3154680"/>
+            <a:ext cx="3383280" cy="3154680"/>
           </a:xfrm>
           <a:prstGeom prst="roundRect">
             <a:avLst/>
@@ -6891,57 +7838,70 @@
           </a:fontRef>
         </p:style>
         <p:txBody>
-          <a:bodyPr rtlCol="0" anchor="ctr"/>
-          <a:lstStyle/>
-          <a:p>
-            <a:pPr algn="ctr"/>
-          </a:p>
-        </p:txBody>
-      </p:sp>
-      <p:sp>
-        <p:nvSpPr>
-          <p:cNvPr id="13" name="TextBox 12"/>
-          <p:cNvSpPr txBox="1"/>
-          <p:nvPr/>
-        </p:nvSpPr>
-        <p:spPr>
-          <a:xfrm>
-            <a:off x="8229600" y="3474720"/>
-            <a:ext cx="3017520" cy="2286000"/>
-          </a:xfrm>
-          <a:prstGeom prst="rect">
-            <a:avLst/>
-          </a:prstGeom>
-          <a:noFill/>
-        </p:spPr>
-        <p:txBody>
-          <a:bodyPr wrap="none">
-            <a:spAutoFit/>
-          </a:bodyPr>
-          <a:lstStyle/>
-          <a:p>
-            <a:pPr>
-              <a:defRPr sz="1600" b="1">
+          <a:bodyPr wrap="square" lIns="228600" tIns="228600" rIns="228600" rtlCol="0" anchor="ctr"/>
+          <a:lstStyle/>
+          <a:p>
+            <a:pPr algn="ctr">
+              <a:spcAft>
+                <a:spcPts val="1000"/>
+              </a:spcAft>
+              <a:defRPr sz="1500" b="1">
                 <a:solidFill>
                   <a:srgbClr val="10B981"/>
                 </a:solidFill>
-              </a:defRPr>
-            </a:pPr>
-            <a:r>
-              <a:t>Lifecycle Tracking</a:t>
-            </a:r>
-          </a:p>
-          <a:p>
-            <a:br/>
-            <a:pPr>
-              <a:defRPr sz="1200">
-                <a:solidFill>
-                  <a:srgbClr val="0F172A"/>
-                </a:solidFill>
-              </a:defRPr>
-            </a:pPr>
-            <a:r>
-              <a:t>Alerts move through Active -&gt; Acknowledged -&gt; Resolved RCA lifecycle, ensuring accountability across maintenance teams.</a:t>
+                <a:latin typeface="Arial"/>
+              </a:defRPr>
+            </a:pPr>
+            <a:r>
+              <a:t>Lifecycle Accountability</a:t>
+            </a:r>
+          </a:p>
+          <a:p>
+            <a:pPr>
+              <a:spcAft>
+                <a:spcPts val="600"/>
+              </a:spcAft>
+              <a:defRPr sz="1050">
+                <a:solidFill>
+                  <a:srgbClr val="1E293B"/>
+                </a:solidFill>
+                <a:latin typeface="Arial"/>
+              </a:defRPr>
+            </a:pPr>
+            <a:r>
+              <a:t>•  Alerts progress through Active -&gt; Acknowledged -&gt; Resolved RCA lifecycle.</a:t>
+            </a:r>
+          </a:p>
+          <a:p>
+            <a:pPr>
+              <a:spcAft>
+                <a:spcPts val="600"/>
+              </a:spcAft>
+              <a:defRPr sz="1050">
+                <a:solidFill>
+                  <a:srgbClr val="1E293B"/>
+                </a:solidFill>
+                <a:latin typeface="Arial"/>
+              </a:defRPr>
+            </a:pPr>
+            <a:r>
+              <a:t>•  Provides clear audit trail of maintenance responses.</a:t>
+            </a:r>
+          </a:p>
+          <a:p>
+            <a:pPr>
+              <a:spcAft>
+                <a:spcPts val="600"/>
+              </a:spcAft>
+              <a:defRPr sz="1050">
+                <a:solidFill>
+                  <a:srgbClr val="1E293B"/>
+                </a:solidFill>
+                <a:latin typeface="Arial"/>
+              </a:defRPr>
+            </a:pPr>
+            <a:r>
+              <a:t>•  Eliminates finger-pointing across different shift handovers.</a:t>
             </a:r>
           </a:p>
         </p:txBody>
@@ -6955,7 +7915,7 @@
 </file>
 
 <file path=ppt/slides/slide8.xml><?xml version="1.0" encoding="utf-8"?>
-<p:sld xmlns:a="http://schemas.openxmlformats.org/drawingml/2006/main" xmlns:p="http://schemas.openxmlformats.org/presentationml/2006/main" xmlns:r="http://schemas.openxmlformats.org/officeDocument/2006/relationships">
+<p:sld xmlns:a="http://schemas.openxmlformats.org/drawingml/2006/main" xmlns:r="http://schemas.openxmlformats.org/officeDocument/2006/relationships" xmlns:p="http://schemas.openxmlformats.org/presentationml/2006/main">
   <p:cSld>
     <p:spTree>
       <p:nvGrpSpPr>
@@ -6963,7 +7923,14 @@
         <p:cNvGrpSpPr/>
         <p:nvPr/>
       </p:nvGrpSpPr>
-      <p:grpSpPr/>
+      <p:grpSpPr>
+        <a:xfrm>
+          <a:off x="0" y="0"/>
+          <a:ext cx="0" cy="0"/>
+          <a:chOff x="0" y="0"/>
+          <a:chExt cx="0" cy="0"/>
+        </a:xfrm>
+      </p:grpSpPr>
       <p:sp>
         <p:nvSpPr>
           <p:cNvPr id="2" name="Rectangle 1"/>
@@ -7004,32 +7971,51 @@
           <a:lstStyle/>
           <a:p>
             <a:pPr algn="ctr"/>
-          </a:p>
-        </p:txBody>
-      </p:sp>
-      <p:sp>
-        <p:nvSpPr>
-          <p:cNvPr id="3" name="TextBox 2"/>
-          <p:cNvSpPr txBox="1"/>
+            <a:endParaRPr/>
+          </a:p>
+        </p:txBody>
+      </p:sp>
+      <p:sp>
+        <p:nvSpPr>
+          <p:cNvPr id="3" name="Rectangle 2"/>
+          <p:cNvSpPr/>
           <p:nvPr/>
         </p:nvSpPr>
         <p:spPr>
           <a:xfrm>
-            <a:off x="731520" y="457200"/>
-            <a:ext cx="10515600" cy="320040"/>
+            <a:off x="731520" y="365760"/>
+            <a:ext cx="10728655" cy="1005840"/>
           </a:xfrm>
           <a:prstGeom prst="rect">
             <a:avLst/>
           </a:prstGeom>
           <a:noFill/>
+          <a:ln>
+            <a:noFill/>
+          </a:ln>
         </p:spPr>
-        <p:txBody>
-          <a:bodyPr wrap="none">
-            <a:spAutoFit/>
-          </a:bodyPr>
-          <a:lstStyle/>
-          <a:p>
-            <a:pPr>
+        <p:style>
+          <a:lnRef idx="1">
+            <a:schemeClr val="accent1"/>
+          </a:lnRef>
+          <a:fillRef idx="3">
+            <a:schemeClr val="accent1"/>
+          </a:fillRef>
+          <a:effectRef idx="2">
+            <a:schemeClr val="accent1"/>
+          </a:effectRef>
+          <a:fontRef idx="minor">
+            <a:schemeClr val="lt1"/>
+          </a:fontRef>
+        </p:style>
+        <p:txBody>
+          <a:bodyPr wrap="square" lIns="0" tIns="0" rIns="0" bIns="0" rtlCol="0" anchor="ctr"/>
+          <a:lstStyle/>
+          <a:p>
+            <a:pPr algn="ctr">
+              <a:spcAft>
+                <a:spcPts val="200"/>
+              </a:spcAft>
               <a:defRPr sz="1000" b="1">
                 <a:solidFill>
                   <a:srgbClr val="2563EB"/>
@@ -7038,37 +8024,14 @@
               </a:defRPr>
             </a:pPr>
             <a:r>
-              <a:t>PARETOFLOW | THE FOUR BITS</a:t>
-            </a:r>
-          </a:p>
-        </p:txBody>
-      </p:sp>
-      <p:sp>
-        <p:nvSpPr>
-          <p:cNvPr id="4" name="TextBox 3"/>
-          <p:cNvSpPr txBox="1"/>
-          <p:nvPr/>
-        </p:nvSpPr>
-        <p:spPr>
-          <a:xfrm>
-            <a:off x="731520" y="731520"/>
-            <a:ext cx="9601200" cy="640080"/>
-          </a:xfrm>
-          <a:prstGeom prst="rect">
-            <a:avLst/>
-          </a:prstGeom>
-          <a:noFill/>
-        </p:spPr>
-        <p:txBody>
-          <a:bodyPr wrap="none">
-            <a:spAutoFit/>
-          </a:bodyPr>
-          <a:lstStyle/>
+              <a:t>PARETOFLOW | TEAM THE FOUR BITS</a:t>
+            </a:r>
+          </a:p>
           <a:p>
             <a:pPr>
               <a:defRPr sz="2400" b="1">
                 <a:solidFill>
-                  <a:srgbClr val="0F172A"/>
+                  <a:srgbClr val="1E293B"/>
                 </a:solidFill>
                 <a:latin typeface="Arial"/>
               </a:defRPr>
@@ -7081,7 +8044,7 @@
       </p:sp>
       <p:pic>
         <p:nvPicPr>
-          <p:cNvPr id="5" name="Picture 4" descr="logo-icon.png"/>
+          <p:cNvPr id="4" name="Picture 3" descr="logo-icon.png"/>
           <p:cNvPicPr>
             <a:picLocks noChangeAspect="1"/>
           </p:cNvPicPr>
@@ -7095,8 +8058,8 @@
         </p:blipFill>
         <p:spPr>
           <a:xfrm>
-            <a:off x="10972800" y="457200"/>
-            <a:ext cx="548640" cy="403747"/>
+            <a:off x="11064240" y="365760"/>
+            <a:ext cx="502920" cy="370101"/>
           </a:xfrm>
           <a:prstGeom prst="rect">
             <a:avLst/>
@@ -7105,14 +8068,14 @@
       </p:pic>
       <p:sp>
         <p:nvSpPr>
-          <p:cNvPr id="6" name="Rounded Rectangle 5"/>
+          <p:cNvPr id="5" name="Rounded Rectangle 4"/>
           <p:cNvSpPr/>
           <p:nvPr/>
         </p:nvSpPr>
         <p:spPr>
           <a:xfrm>
             <a:off x="731520" y="1645920"/>
-            <a:ext cx="5212080" cy="4389120"/>
+            <a:ext cx="5212080" cy="4663440"/>
           </a:xfrm>
           <a:prstGeom prst="roundRect">
             <a:avLst/>
@@ -7141,98 +8104,100 @@
           </a:fontRef>
         </p:style>
         <p:txBody>
-          <a:bodyPr rtlCol="0" anchor="ctr"/>
-          <a:lstStyle/>
-          <a:p>
-            <a:pPr algn="ctr"/>
-          </a:p>
-        </p:txBody>
-      </p:sp>
-      <p:sp>
-        <p:nvSpPr>
-          <p:cNvPr id="7" name="TextBox 6"/>
-          <p:cNvSpPr txBox="1"/>
+          <a:bodyPr wrap="square" lIns="274320" tIns="274320" rIns="274320" rtlCol="0" anchor="ctr"/>
+          <a:lstStyle/>
+          <a:p>
+            <a:pPr algn="ctr">
+              <a:spcAft>
+                <a:spcPts val="1200"/>
+              </a:spcAft>
+              <a:defRPr sz="1600" b="1">
+                <a:solidFill>
+                  <a:srgbClr val="2563EB"/>
+                </a:solidFill>
+                <a:latin typeface="Arial"/>
+              </a:defRPr>
+            </a:pPr>
+            <a:r>
+              <a:t>Multi-Machine Weekly Downtime Trends</a:t>
+            </a:r>
+          </a:p>
+          <a:p>
+            <a:pPr>
+              <a:spcAft>
+                <a:spcPts val="800"/>
+              </a:spcAft>
+              <a:defRPr sz="1100">
+                <a:solidFill>
+                  <a:srgbClr val="1E293B"/>
+                </a:solidFill>
+                <a:latin typeface="Arial"/>
+              </a:defRPr>
+            </a:pPr>
+            <a:r>
+              <a:t>•  5-Week Chronological Binning: Evaluates stoppage trends per machine across recent production weeks.</a:t>
+            </a:r>
+          </a:p>
+          <a:p>
+            <a:pPr>
+              <a:spcAft>
+                <a:spcPts val="800"/>
+              </a:spcAft>
+              <a:defRPr sz="1100">
+                <a:solidFill>
+                  <a:srgbClr val="1E293B"/>
+                </a:solidFill>
+                <a:latin typeface="Arial"/>
+              </a:defRPr>
+            </a:pPr>
+            <a:r>
+              <a:t>•  Interactive Machine Filtering: Toggle All Machines or isolate CNC-01, Sorting Conveyor, or Injection Press with 1 click.</a:t>
+            </a:r>
+          </a:p>
+          <a:p>
+            <a:pPr>
+              <a:spcAft>
+                <a:spcPts val="800"/>
+              </a:spcAft>
+              <a:defRPr sz="1100">
+                <a:solidFill>
+                  <a:srgbClr val="1E293B"/>
+                </a:solidFill>
+                <a:latin typeface="Arial"/>
+              </a:defRPr>
+            </a:pPr>
+            <a:r>
+              <a:t>•  Timeframe Selector: Instant synchronization across 7 Days, 30 Days, 90 Days, and All Time.</a:t>
+            </a:r>
+          </a:p>
+          <a:p>
+            <a:pPr>
+              <a:spcAft>
+                <a:spcPts val="800"/>
+              </a:spcAft>
+              <a:defRPr sz="1100">
+                <a:solidFill>
+                  <a:srgbClr val="1E293B"/>
+                </a:solidFill>
+                <a:latin typeface="Arial"/>
+              </a:defRPr>
+            </a:pPr>
+            <a:r>
+              <a:t>•  Spot Wear &amp; Tear Patterns: Clearly reveals when a machine begins experiencing climbing downtime before complete breakdown.</a:t>
+            </a:r>
+          </a:p>
+        </p:txBody>
+      </p:sp>
+      <p:sp>
+        <p:nvSpPr>
+          <p:cNvPr id="6" name="Rounded Rectangle 5"/>
+          <p:cNvSpPr/>
           <p:nvPr/>
         </p:nvSpPr>
         <p:spPr>
           <a:xfrm>
-            <a:off x="1005840" y="1828800"/>
-            <a:ext cx="4663440" cy="3931920"/>
-          </a:xfrm>
-          <a:prstGeom prst="rect">
-            <a:avLst/>
-          </a:prstGeom>
-          <a:noFill/>
-        </p:spPr>
-        <p:txBody>
-          <a:bodyPr wrap="none">
-            <a:spAutoFit/>
-          </a:bodyPr>
-          <a:lstStyle/>
-          <a:p>
-            <a:pPr>
-              <a:defRPr sz="1800" b="1">
-                <a:solidFill>
-                  <a:srgbClr val="2563EB"/>
-                </a:solidFill>
-              </a:defRPr>
-            </a:pPr>
-            <a:r>
-              <a:t>Multi-Machine Weekly Trend Lines</a:t>
-            </a:r>
-          </a:p>
-          <a:p>
-            <a:br/>
-            <a:pPr>
-              <a:defRPr sz="1300">
-                <a:solidFill>
-                  <a:srgbClr val="0F172A"/>
-                </a:solidFill>
-              </a:defRPr>
-            </a:pPr>
-            <a:r>
-              <a:t>• 5-Week Chronological Binning:</a:t>
-            </a:r>
-            <a:br/>
-            <a:r>
-              <a:t>  - Tracks weekly downtime minutes per machine.</a:t>
-            </a:r>
-            <a:br/>
-            <a:r>
-              <a:t>  - Dynamically charts newly logged live events.</a:t>
-            </a:r>
-            <a:br/>
-            <a:br/>
-            <a:r>
-              <a:t>• Interactive Machine Filtering:</a:t>
-            </a:r>
-            <a:br/>
-            <a:r>
-              <a:t>  - Isolate CNC-01, Sorting Conveyor, or Injection Molding Press with 1 click.</a:t>
-            </a:r>
-            <a:br/>
-            <a:br/>
-            <a:r>
-              <a:t>• Timeframe Selectors:</a:t>
-            </a:r>
-            <a:br/>
-            <a:r>
-              <a:t>  - 7 Days, 30 Days, 90 Days, and All Time historical views.</a:t>
-            </a:r>
-            <a:br/>
-          </a:p>
-        </p:txBody>
-      </p:sp>
-      <p:sp>
-        <p:nvSpPr>
-          <p:cNvPr id="8" name="Rounded Rectangle 7"/>
-          <p:cNvSpPr/>
-          <p:nvPr/>
-        </p:nvSpPr>
-        <p:spPr>
-          <a:xfrm>
-            <a:off x="6217920" y="1645920"/>
-            <a:ext cx="5212080" cy="4389120"/>
+            <a:off x="6245352" y="1645920"/>
+            <a:ext cx="5212080" cy="4663440"/>
           </a:xfrm>
           <a:prstGeom prst="roundRect">
             <a:avLst/>
@@ -7261,85 +8226,87 @@
           </a:fontRef>
         </p:style>
         <p:txBody>
-          <a:bodyPr rtlCol="0" anchor="ctr"/>
-          <a:lstStyle/>
-          <a:p>
-            <a:pPr algn="ctr"/>
-          </a:p>
-        </p:txBody>
-      </p:sp>
-      <p:sp>
-        <p:nvSpPr>
-          <p:cNvPr id="9" name="TextBox 8"/>
-          <p:cNvSpPr txBox="1"/>
-          <p:nvPr/>
-        </p:nvSpPr>
-        <p:spPr>
-          <a:xfrm>
-            <a:off x="6492240" y="1828800"/>
-            <a:ext cx="4663440" cy="3931920"/>
-          </a:xfrm>
-          <a:prstGeom prst="rect">
-            <a:avLst/>
-          </a:prstGeom>
-          <a:noFill/>
-        </p:spPr>
-        <p:txBody>
-          <a:bodyPr wrap="none">
-            <a:spAutoFit/>
-          </a:bodyPr>
-          <a:lstStyle/>
-          <a:p>
-            <a:pPr>
-              <a:defRPr sz="1800" b="1">
+          <a:bodyPr wrap="square" lIns="274320" tIns="274320" rIns="274320" rtlCol="0" anchor="ctr"/>
+          <a:lstStyle/>
+          <a:p>
+            <a:pPr algn="ctr">
+              <a:spcAft>
+                <a:spcPts val="1200"/>
+              </a:spcAft>
+              <a:defRPr sz="1600" b="1">
                 <a:solidFill>
                   <a:srgbClr val="10B981"/>
                 </a:solidFill>
-              </a:defRPr>
-            </a:pPr>
-            <a:r>
-              <a:t>Enterprise Audit Trail &amp; CSV Export</a:t>
-            </a:r>
-          </a:p>
-          <a:p>
-            <a:br/>
-            <a:pPr>
-              <a:defRPr sz="1300">
-                <a:solidFill>
-                  <a:srgbClr val="0F172A"/>
-                </a:solidFill>
-              </a:defRPr>
-            </a:pPr>
-            <a:r>
-              <a:t>• Real-Time Stoppage Journal:</a:t>
-            </a:r>
-            <a:br/>
-            <a:r>
-              <a:t>  - Strict descending chronological order.</a:t>
-            </a:r>
-            <a:br/>
-            <a:r>
-              <a:t>  - New stoppage highlighted with glowing 'NEW' badge.</a:t>
-            </a:r>
-            <a:br/>
-            <a:br/>
-            <a:r>
-              <a:t>• Advanced Multi-Filter Search:</a:t>
-            </a:r>
-            <a:br/>
-            <a:r>
-              <a:t>  - Machine, Reason Code, Shift, and Full-Text query search.</a:t>
-            </a:r>
-            <a:br/>
-            <a:br/>
-            <a:r>
-              <a:t>• 1-Click CSV Export:</a:t>
-            </a:r>
-            <a:br/>
-            <a:r>
-              <a:t>  - Generates audit-ready CSV exports for compliance audits and ERP synchronization.</a:t>
-            </a:r>
-            <a:br/>
+                <a:latin typeface="Arial"/>
+              </a:defRPr>
+            </a:pPr>
+            <a:r>
+              <a:t>Detailed Stoppage Journal &amp; CSV Export</a:t>
+            </a:r>
+          </a:p>
+          <a:p>
+            <a:pPr>
+              <a:spcAft>
+                <a:spcPts val="800"/>
+              </a:spcAft>
+              <a:defRPr sz="1100">
+                <a:solidFill>
+                  <a:srgbClr val="1E293B"/>
+                </a:solidFill>
+                <a:latin typeface="Arial"/>
+              </a:defRPr>
+            </a:pPr>
+            <a:r>
+              <a:t>•  Strict Chronological Sorting: New stoppage events sit immediately at Row #1 with a bright pulsing 'NEW' badge.</a:t>
+            </a:r>
+          </a:p>
+          <a:p>
+            <a:pPr>
+              <a:spcAft>
+                <a:spcPts val="800"/>
+              </a:spcAft>
+              <a:defRPr sz="1100">
+                <a:solidFill>
+                  <a:srgbClr val="1E293B"/>
+                </a:solidFill>
+                <a:latin typeface="Arial"/>
+              </a:defRPr>
+            </a:pPr>
+            <a:r>
+              <a:t>•  Multi-Parameter Search: Live filtering by Target Machine, Reason Code, Shift (Morning, Afternoon, Night), and Keyword search.</a:t>
+            </a:r>
+          </a:p>
+          <a:p>
+            <a:pPr>
+              <a:spcAft>
+                <a:spcPts val="800"/>
+              </a:spcAft>
+              <a:defRPr sz="1100">
+                <a:solidFill>
+                  <a:srgbClr val="1E293B"/>
+                </a:solidFill>
+                <a:latin typeface="Arial"/>
+              </a:defRPr>
+            </a:pPr>
+            <a:r>
+              <a:t>•  1-Click CSV Export: Export clean, standardized stoppage logs for ERP synchronization (SAP, Oracle) and ISO/IATF audits.</a:t>
+            </a:r>
+          </a:p>
+          <a:p>
+            <a:pPr>
+              <a:spcAft>
+                <a:spcPts val="800"/>
+              </a:spcAft>
+              <a:defRPr sz="1100">
+                <a:solidFill>
+                  <a:srgbClr val="1E293B"/>
+                </a:solidFill>
+                <a:latin typeface="Arial"/>
+              </a:defRPr>
+            </a:pPr>
+            <a:r>
+              <a:t>•  Master Data Management: Plant managers can dynamically enroll machines and maintain controlled reason codes.</a:t>
+            </a:r>
           </a:p>
         </p:txBody>
       </p:sp>
@@ -7352,7 +8319,7 @@
 </file>
 
 <file path=ppt/slides/slide9.xml><?xml version="1.0" encoding="utf-8"?>
-<p:sld xmlns:a="http://schemas.openxmlformats.org/drawingml/2006/main" xmlns:p="http://schemas.openxmlformats.org/presentationml/2006/main" xmlns:r="http://schemas.openxmlformats.org/officeDocument/2006/relationships">
+<p:sld xmlns:a="http://schemas.openxmlformats.org/drawingml/2006/main" xmlns:r="http://schemas.openxmlformats.org/officeDocument/2006/relationships" xmlns:p="http://schemas.openxmlformats.org/presentationml/2006/main">
   <p:cSld>
     <p:spTree>
       <p:nvGrpSpPr>
@@ -7360,7 +8327,14 @@
         <p:cNvGrpSpPr/>
         <p:nvPr/>
       </p:nvGrpSpPr>
-      <p:grpSpPr/>
+      <p:grpSpPr>
+        <a:xfrm>
+          <a:off x="0" y="0"/>
+          <a:ext cx="0" cy="0"/>
+          <a:chOff x="0" y="0"/>
+          <a:chExt cx="0" cy="0"/>
+        </a:xfrm>
+      </p:grpSpPr>
       <p:sp>
         <p:nvSpPr>
           <p:cNvPr id="2" name="Rectangle 1"/>
@@ -7401,32 +8375,51 @@
           <a:lstStyle/>
           <a:p>
             <a:pPr algn="ctr"/>
-          </a:p>
-        </p:txBody>
-      </p:sp>
-      <p:sp>
-        <p:nvSpPr>
-          <p:cNvPr id="3" name="TextBox 2"/>
-          <p:cNvSpPr txBox="1"/>
+            <a:endParaRPr/>
+          </a:p>
+        </p:txBody>
+      </p:sp>
+      <p:sp>
+        <p:nvSpPr>
+          <p:cNvPr id="3" name="Rectangle 2"/>
+          <p:cNvSpPr/>
           <p:nvPr/>
         </p:nvSpPr>
         <p:spPr>
           <a:xfrm>
-            <a:off x="731520" y="457200"/>
-            <a:ext cx="10515600" cy="320040"/>
+            <a:off x="731520" y="365760"/>
+            <a:ext cx="10728655" cy="1005840"/>
           </a:xfrm>
           <a:prstGeom prst="rect">
             <a:avLst/>
           </a:prstGeom>
           <a:noFill/>
+          <a:ln>
+            <a:noFill/>
+          </a:ln>
         </p:spPr>
-        <p:txBody>
-          <a:bodyPr wrap="none">
-            <a:spAutoFit/>
-          </a:bodyPr>
-          <a:lstStyle/>
-          <a:p>
-            <a:pPr>
+        <p:style>
+          <a:lnRef idx="1">
+            <a:schemeClr val="accent1"/>
+          </a:lnRef>
+          <a:fillRef idx="3">
+            <a:schemeClr val="accent1"/>
+          </a:fillRef>
+          <a:effectRef idx="2">
+            <a:schemeClr val="accent1"/>
+          </a:effectRef>
+          <a:fontRef idx="minor">
+            <a:schemeClr val="lt1"/>
+          </a:fontRef>
+        </p:style>
+        <p:txBody>
+          <a:bodyPr wrap="square" lIns="0" tIns="0" rIns="0" bIns="0" rtlCol="0" anchor="ctr"/>
+          <a:lstStyle/>
+          <a:p>
+            <a:pPr algn="ctr">
+              <a:spcAft>
+                <a:spcPts val="200"/>
+              </a:spcAft>
               <a:defRPr sz="1000" b="1">
                 <a:solidFill>
                   <a:srgbClr val="2563EB"/>
@@ -7435,37 +8428,14 @@
               </a:defRPr>
             </a:pPr>
             <a:r>
-              <a:t>PARETOFLOW | THE FOUR BITS</a:t>
-            </a:r>
-          </a:p>
-        </p:txBody>
-      </p:sp>
-      <p:sp>
-        <p:nvSpPr>
-          <p:cNvPr id="4" name="TextBox 3"/>
-          <p:cNvSpPr txBox="1"/>
-          <p:nvPr/>
-        </p:nvSpPr>
-        <p:spPr>
-          <a:xfrm>
-            <a:off x="731520" y="731520"/>
-            <a:ext cx="9601200" cy="640080"/>
-          </a:xfrm>
-          <a:prstGeom prst="rect">
-            <a:avLst/>
-          </a:prstGeom>
-          <a:noFill/>
-        </p:spPr>
-        <p:txBody>
-          <a:bodyPr wrap="none">
-            <a:spAutoFit/>
-          </a:bodyPr>
-          <a:lstStyle/>
+              <a:t>PARETOFLOW | TEAM THE FOUR BITS</a:t>
+            </a:r>
+          </a:p>
           <a:p>
             <a:pPr>
               <a:defRPr sz="2400" b="1">
                 <a:solidFill>
-                  <a:srgbClr val="0F172A"/>
+                  <a:srgbClr val="1E293B"/>
                 </a:solidFill>
                 <a:latin typeface="Arial"/>
               </a:defRPr>
@@ -7478,7 +8448,7 @@
       </p:sp>
       <p:pic>
         <p:nvPicPr>
-          <p:cNvPr id="5" name="Picture 4" descr="logo-icon.png"/>
+          <p:cNvPr id="4" name="Picture 3" descr="logo-icon.png"/>
           <p:cNvPicPr>
             <a:picLocks noChangeAspect="1"/>
           </p:cNvPicPr>
@@ -7492,8 +8462,8 @@
         </p:blipFill>
         <p:spPr>
           <a:xfrm>
-            <a:off x="10972800" y="457200"/>
-            <a:ext cx="548640" cy="403747"/>
+            <a:off x="11064240" y="365760"/>
+            <a:ext cx="502920" cy="370101"/>
           </a:xfrm>
           <a:prstGeom prst="rect">
             <a:avLst/>
@@ -7502,14 +8472,14 @@
       </p:pic>
       <p:sp>
         <p:nvSpPr>
-          <p:cNvPr id="6" name="Rounded Rectangle 5"/>
+          <p:cNvPr id="5" name="Rounded Rectangle 4"/>
           <p:cNvSpPr/>
           <p:nvPr/>
         </p:nvSpPr>
         <p:spPr>
           <a:xfrm>
             <a:off x="731520" y="1645920"/>
-            <a:ext cx="5212080" cy="4389120"/>
+            <a:ext cx="5212080" cy="4663440"/>
           </a:xfrm>
           <a:prstGeom prst="roundRect">
             <a:avLst/>
@@ -7538,98 +8508,100 @@
           </a:fontRef>
         </p:style>
         <p:txBody>
-          <a:bodyPr rtlCol="0" anchor="ctr"/>
-          <a:lstStyle/>
-          <a:p>
-            <a:pPr algn="ctr"/>
-          </a:p>
-        </p:txBody>
-      </p:sp>
-      <p:sp>
-        <p:nvSpPr>
-          <p:cNvPr id="7" name="TextBox 6"/>
-          <p:cNvSpPr txBox="1"/>
+          <a:bodyPr wrap="square" lIns="274320" tIns="274320" rIns="274320" rtlCol="0" anchor="ctr"/>
+          <a:lstStyle/>
+          <a:p>
+            <a:pPr algn="ctr">
+              <a:spcAft>
+                <a:spcPts val="1200"/>
+              </a:spcAft>
+              <a:defRPr sz="1600" b="1">
+                <a:solidFill>
+                  <a:srgbClr val="2563EB"/>
+                </a:solidFill>
+                <a:latin typeface="Arial"/>
+              </a:defRPr>
+            </a:pPr>
+            <a:r>
+              <a:t>Backend &amp; Analytical Engine</a:t>
+            </a:r>
+          </a:p>
+          <a:p>
+            <a:pPr>
+              <a:spcAft>
+                <a:spcPts val="800"/>
+              </a:spcAft>
+              <a:defRPr sz="1100">
+                <a:solidFill>
+                  <a:srgbClr val="1E293B"/>
+                </a:solidFill>
+                <a:latin typeface="Arial"/>
+              </a:defRPr>
+            </a:pPr>
+            <a:r>
+              <a:t>•  Python 3.14 + FastAPI: Ultra-fast asynchronous REST API with automatic Swagger docs (/docs) and ReDoc (/redoc).</a:t>
+            </a:r>
+          </a:p>
+          <a:p>
+            <a:pPr>
+              <a:spcAft>
+                <a:spcPts val="800"/>
+              </a:spcAft>
+              <a:defRPr sz="1100">
+                <a:solidFill>
+                  <a:srgbClr val="1E293B"/>
+                </a:solidFill>
+                <a:latin typeface="Arial"/>
+              </a:defRPr>
+            </a:pPr>
+            <a:r>
+              <a:t>•  Pydantic Validation: Timestamp sanity validation (rejects end &lt;= start or negative duration) &amp; controlled reason verification.</a:t>
+            </a:r>
+          </a:p>
+          <a:p>
+            <a:pPr>
+              <a:spcAft>
+                <a:spcPts val="800"/>
+              </a:spcAft>
+              <a:defRPr sz="1100">
+                <a:solidFill>
+                  <a:srgbClr val="1E293B"/>
+                </a:solidFill>
+                <a:latin typeface="Arial"/>
+              </a:defRPr>
+            </a:pPr>
+            <a:r>
+              <a:t>•  Pandas Analytical Engine: High-performance vectorized groupby, cumulative sum, and rolling 7-day window aggregations.</a:t>
+            </a:r>
+          </a:p>
+          <a:p>
+            <a:pPr>
+              <a:spcAft>
+                <a:spcPts val="800"/>
+              </a:spcAft>
+              <a:defRPr sz="1100">
+                <a:solidFill>
+                  <a:srgbClr val="1E293B"/>
+                </a:solidFill>
+                <a:latin typeface="Arial"/>
+              </a:defRPr>
+            </a:pPr>
+            <a:r>
+              <a:t>•  SQLAlchemy 2.0 ORM + SQLite: Structured relational schema for machines, reason codes, downtime events, and repeat alerts.</a:t>
+            </a:r>
+          </a:p>
+        </p:txBody>
+      </p:sp>
+      <p:sp>
+        <p:nvSpPr>
+          <p:cNvPr id="6" name="Rounded Rectangle 5"/>
+          <p:cNvSpPr/>
           <p:nvPr/>
         </p:nvSpPr>
         <p:spPr>
           <a:xfrm>
-            <a:off x="1005840" y="1828800"/>
-            <a:ext cx="4663440" cy="3931920"/>
-          </a:xfrm>
-          <a:prstGeom prst="rect">
-            <a:avLst/>
-          </a:prstGeom>
-          <a:noFill/>
-        </p:spPr>
-        <p:txBody>
-          <a:bodyPr wrap="none">
-            <a:spAutoFit/>
-          </a:bodyPr>
-          <a:lstStyle/>
-          <a:p>
-            <a:pPr>
-              <a:defRPr sz="1800" b="1">
-                <a:solidFill>
-                  <a:srgbClr val="2563EB"/>
-                </a:solidFill>
-              </a:defRPr>
-            </a:pPr>
-            <a:r>
-              <a:t>Backend &amp; Analytical Engine</a:t>
-            </a:r>
-          </a:p>
-          <a:p>
-            <a:br/>
-            <a:pPr>
-              <a:defRPr sz="1300">
-                <a:solidFill>
-                  <a:srgbClr val="0F172A"/>
-                </a:solidFill>
-              </a:defRPr>
-            </a:pPr>
-            <a:r>
-              <a:t>• Python 3.14 + FastAPI:</a:t>
-            </a:r>
-            <a:br/>
-            <a:r>
-              <a:t>  - High-concurrency asynchronous REST endpoints.</a:t>
-            </a:r>
-            <a:br/>
-            <a:r>
-              <a:t>  - Pydantic schema validation for timestamp sanity.</a:t>
-            </a:r>
-            <a:br/>
-            <a:br/>
-            <a:r>
-              <a:t>• Pandas Analytics Engine:</a:t>
-            </a:r>
-            <a:br/>
-            <a:r>
-              <a:t>  - Vectorized groupby, cumulative percentage &amp; rolling window evaluation.</a:t>
-            </a:r>
-            <a:br/>
-            <a:br/>
-            <a:r>
-              <a:t>• SQLAlchemy 2.0 ORM + SQLite:</a:t>
-            </a:r>
-            <a:br/>
-            <a:r>
-              <a:t>  - Relational schema for machines, controlled reason codes, events, and repeat alerts.</a:t>
-            </a:r>
-            <a:br/>
-          </a:p>
-        </p:txBody>
-      </p:sp>
-      <p:sp>
-        <p:nvSpPr>
-          <p:cNvPr id="8" name="Rounded Rectangle 7"/>
-          <p:cNvSpPr/>
-          <p:nvPr/>
-        </p:nvSpPr>
-        <p:spPr>
-          <a:xfrm>
-            <a:off x="6217920" y="1645920"/>
-            <a:ext cx="5212080" cy="4389120"/>
+            <a:off x="6245352" y="1645920"/>
+            <a:ext cx="5212080" cy="4663440"/>
           </a:xfrm>
           <a:prstGeom prst="roundRect">
             <a:avLst/>
@@ -7658,89 +8630,103 @@
           </a:fontRef>
         </p:style>
         <p:txBody>
-          <a:bodyPr rtlCol="0" anchor="ctr"/>
-          <a:lstStyle/>
-          <a:p>
-            <a:pPr algn="ctr"/>
-          </a:p>
-        </p:txBody>
-      </p:sp>
-      <p:sp>
-        <p:nvSpPr>
-          <p:cNvPr id="9" name="TextBox 8"/>
-          <p:cNvSpPr txBox="1"/>
-          <p:nvPr/>
-        </p:nvSpPr>
-        <p:spPr>
-          <a:xfrm>
-            <a:off x="6492240" y="1828800"/>
-            <a:ext cx="4663440" cy="3931920"/>
-          </a:xfrm>
-          <a:prstGeom prst="rect">
-            <a:avLst/>
-          </a:prstGeom>
-          <a:noFill/>
-        </p:spPr>
-        <p:txBody>
-          <a:bodyPr wrap="none">
-            <a:spAutoFit/>
-          </a:bodyPr>
-          <a:lstStyle/>
-          <a:p>
-            <a:pPr>
-              <a:defRPr sz="1800" b="1">
+          <a:bodyPr wrap="square" lIns="274320" tIns="274320" rIns="274320" rtlCol="0" anchor="ctr"/>
+          <a:lstStyle/>
+          <a:p>
+            <a:pPr algn="ctr">
+              <a:spcAft>
+                <a:spcPts val="1200"/>
+              </a:spcAft>
+              <a:defRPr sz="1600" b="1">
                 <a:solidFill>
                   <a:srgbClr val="0284C7"/>
                 </a:solidFill>
-              </a:defRPr>
-            </a:pPr>
-            <a:r>
-              <a:t>Frontend &amp; Deployment Architecture</a:t>
-            </a:r>
-          </a:p>
-          <a:p>
-            <a:br/>
-            <a:pPr>
-              <a:defRPr sz="1300">
-                <a:solidFill>
-                  <a:srgbClr val="0F172A"/>
-                </a:solidFill>
-              </a:defRPr>
-            </a:pPr>
-            <a:r>
-              <a:t>• React 19 + Vite 6 + Tailwind CSS v4:</a:t>
-            </a:r>
-            <a:br/>
-            <a:r>
-              <a:t>  - Ultra-fast sub-4 second compilation.</a:t>
-            </a:r>
-            <a:br/>
-            <a:r>
-              <a:t>  - Plus Jakarta Sans typography &amp; modern SaaS design.</a:t>
-            </a:r>
-            <a:br/>
-            <a:br/>
-            <a:r>
-              <a:t>• Recharts Data Visualization:</a:t>
-            </a:r>
-            <a:br/>
-            <a:r>
-              <a:t>  - Responsive dual-axis Pareto and multi-line time-series.</a:t>
-            </a:r>
-            <a:br/>
-            <a:br/>
-            <a:r>
-              <a:t>• 100% Vercel-Ready Architecture:</a:t>
-            </a:r>
-            <a:br/>
-            <a:r>
-              <a:t>  - vercel.json pre-configured for instant zero-config deploy.</a:t>
-            </a:r>
-            <a:br/>
-            <a:r>
-              <a:t>  - Dual-layer engine: queries FastAPI when running, seamless fallback to client engine on static Vercel.</a:t>
-            </a:r>
-            <a:br/>
+                <a:latin typeface="Arial"/>
+              </a:defRPr>
+            </a:pPr>
+            <a:r>
+              <a:t>Frontend &amp; Dual-Layer Vercel Deployment</a:t>
+            </a:r>
+          </a:p>
+          <a:p>
+            <a:pPr>
+              <a:spcAft>
+                <a:spcPts val="700"/>
+              </a:spcAft>
+              <a:defRPr sz="1050">
+                <a:solidFill>
+                  <a:srgbClr val="1E293B"/>
+                </a:solidFill>
+                <a:latin typeface="Arial"/>
+              </a:defRPr>
+            </a:pPr>
+            <a:r>
+              <a:t>•  React 19 + Vite 6 + Tailwind CSS v4: Sub-4 second compilation, Plus Jakarta Sans typography, and modern responsive SaaS design.</a:t>
+            </a:r>
+          </a:p>
+          <a:p>
+            <a:pPr>
+              <a:spcAft>
+                <a:spcPts val="700"/>
+              </a:spcAft>
+              <a:defRPr sz="1050">
+                <a:solidFill>
+                  <a:srgbClr val="1E293B"/>
+                </a:solidFill>
+                <a:latin typeface="Arial"/>
+              </a:defRPr>
+            </a:pPr>
+            <a:r>
+              <a:t>•  Recharts Data Visualization: Smooth dual-axis composed charts and responsive multi-line trends.</a:t>
+            </a:r>
+          </a:p>
+          <a:p>
+            <a:pPr>
+              <a:spcAft>
+                <a:spcPts val="700"/>
+              </a:spcAft>
+              <a:defRPr sz="1050">
+                <a:solidFill>
+                  <a:srgbClr val="1E293B"/>
+                </a:solidFill>
+                <a:latin typeface="Arial"/>
+              </a:defRPr>
+            </a:pPr>
+            <a:r>
+              <a:t>•  100% Vercel-Ready: Configured with vercel.json for 1-click zero-config deployment.</a:t>
+            </a:r>
+          </a:p>
+          <a:p>
+            <a:pPr>
+              <a:spcAft>
+                <a:spcPts val="700"/>
+              </a:spcAft>
+              <a:defRPr sz="1050">
+                <a:solidFill>
+                  <a:srgbClr val="1E293B"/>
+                </a:solidFill>
+                <a:latin typeface="Arial"/>
+              </a:defRPr>
+            </a:pPr>
+            <a:r>
+              <a:t>•  Dual-Layer Resilient Architecture: Queries FastAPI backend when running, with seamless client-side analytics fallback for static Vercel hosting.</a:t>
+            </a:r>
+          </a:p>
+          <a:p>
+            <a:pPr>
+              <a:spcAft>
+                <a:spcPts val="700"/>
+              </a:spcAft>
+              <a:defRPr sz="1050">
+                <a:solidFill>
+                  <a:srgbClr val="1E293B"/>
+                </a:solidFill>
+                <a:latin typeface="Arial"/>
+              </a:defRPr>
+            </a:pPr>
+            <a:r>
+              <a:t>•  Git Tracked: Full codebase tracked on GitHub (https://github.com/arslanhussain9/Downtime.git).</a:t>
+            </a:r>
           </a:p>
         </p:txBody>
       </p:sp>
